--- a/docs/index.pptx
+++ b/docs/index.pptx
@@ -32,6 +32,7 @@
     <p:sldId id="280" r:id="rId26"/>
     <p:sldId id="281" r:id="rId27"/>
     <p:sldId id="282" r:id="rId28"/>
+    <p:sldId id="283" r:id="rId29"/>
   </p:sldIdLst>
   <p:sldSz cx="9144000" cy="5143500" type="screen16x9"/>
   <p:notesSz cx="6858000" cy="9144000"/>
@@ -3141,7 +3142,7 @@
             </a:pPr>
             <a:r>
               <a:rPr/>
-              <a:t>Reproducible data science with Nix and T</a:t>
+              <a:t>A Practical Introduction to Reproducible R with Nix &amp; rix</a:t>
             </a:r>
           </a:p>
         </p:txBody>
@@ -3171,7 +3172,38 @@
             </a:pPr>
             <a:r>
               <a:rPr/>
+              <a:t>R/Pharma 2026 Workshop (Sep 28 – Oct 1) • Conference: Oct 20 – 21</a:t>
+            </a:r>
+            <a:br/>
+            <a:br/>
+            <a:r>
+              <a:rPr/>
               <a:t>Bruno Rodrigues</a:t>
+            </a:r>
+          </a:p>
+        </p:txBody>
+      </p:sp>
+      <p:sp>
+        <p:nvSpPr>
+          <p:cNvPr id="4" name="Date Placeholder 3"/>
+          <p:cNvSpPr>
+            <a:spLocks noGrp="1"/>
+          </p:cNvSpPr>
+          <p:nvPr>
+            <p:ph idx="10" sz="half" type="dt"/>
+          </p:nvPr>
+        </p:nvSpPr>
+        <p:spPr/>
+        <p:txBody>
+          <a:bodyPr/>
+          <a:lstStyle/>
+          <a:p>
+            <a:pPr lvl="0" indent="0" marL="0">
+              <a:buNone/>
+            </a:pPr>
+            <a:r>
+              <a:rPr/>
+              <a:t>2026-10-01</a:t>
             </a:r>
           </a:p>
         </p:txBody>
@@ -3765,7 +3797,7 @@
                 </a:solidFill>
                 <a:latin typeface="Courier"/>
               </a:rPr>
-              <a:t>"2025-06-13"</a:t>
+              <a:t>"2026-09-23"</a:t>
             </a:r>
             <a:r>
               <a:rPr>
@@ -4031,7 +4063,7 @@
                 </a:solidFill>
                 <a:latin typeface="Courier"/>
               </a:rPr>
-              <a:t>"code"</a:t>
+              <a:t>"rstudio"</a:t>
             </a:r>
             <a:r>
               <a:rPr>
@@ -4354,7 +4386,7 @@
                 </a:solidFill>
                 <a:latin typeface="Courier"/>
               </a:rPr>
-              <a:t>"2025-06-09"</a:t>
+              <a:t>"2026-01-14"</a:t>
             </a:r>
             <a:r>
               <a:rPr>
@@ -4993,6 +5025,50 @@
               <a:t>see here</a:t>
             </a:r>
           </a:p>
+          <a:p>
+            <a:pPr lvl="0"/>
+            <a:r>
+              <a:rPr/>
+              <a:t>Polyglot pipelines with </a:t>
+            </a:r>
+            <a:r>
+              <a:rPr>
+                <a:latin typeface="Courier"/>
+              </a:rPr>
+              <a:t>{rixpress}</a:t>
+            </a:r>
+            <a:r>
+              <a:rPr/>
+              <a:t>: </a:t>
+            </a:r>
+            <a:r>
+              <a:rPr>
+                <a:latin typeface="Courier"/>
+              </a:rPr>
+              <a:t>scripts/rixpress_demo/</a:t>
+            </a:r>
+          </a:p>
+          <a:p>
+            <a:pPr lvl="0"/>
+            <a:r>
+              <a:rPr/>
+              <a:t>Polyglot pipelines with </a:t>
+            </a:r>
+            <a:r>
+              <a:rPr b="1"/>
+              <a:t>T</a:t>
+            </a:r>
+            <a:r>
+              <a:rPr/>
+              <a:t> (bonus): </a:t>
+            </a:r>
+            <a:r>
+              <a:rPr>
+                <a:latin typeface="Courier"/>
+              </a:rPr>
+              <a:t>scripts/t_demo/r_py_xgboost_t/</a:t>
+            </a:r>
+          </a:p>
         </p:txBody>
       </p:sp>
     </p:spTree>
@@ -5692,6 +5768,19 @@
               <a:t>Repository of demos</a:t>
             </a:r>
           </a:p>
+          <a:p>
+            <a:pPr lvl="0"/>
+            <a:r>
+              <a:rPr/>
+              <a:t>Local demo in this repo: </a:t>
+            </a:r>
+            <a:r>
+              <a:rPr>
+                <a:latin typeface="Courier"/>
+              </a:rPr>
+              <a:t>scripts/rixpress_demo/</a:t>
+            </a:r>
+          </a:p>
         </p:txBody>
       </p:sp>
     </p:spTree>
@@ -5798,7 +5887,12 @@
             <p:ph type="title"/>
           </p:nvPr>
         </p:nvSpPr>
-        <p:spPr/>
+        <p:spPr>
+          <a:xfrm>
+            <a:off x="722313" y="3305176"/>
+            <a:ext cx="7772400" cy="1021556"/>
+          </a:xfrm>
+        </p:spPr>
         <p:txBody>
           <a:bodyPr/>
           <a:lstStyle/>
@@ -5808,51 +5902,7 @@
             </a:pPr>
             <a:r>
               <a:rPr/>
-              <a:t>T, a new DSL for polyglot data science</a:t>
-            </a:r>
-          </a:p>
-        </p:txBody>
-      </p:sp>
-      <p:sp>
-        <p:nvSpPr>
-          <p:cNvPr id="3" name="Content Placeholder 2"/>
-          <p:cNvSpPr>
-            <a:spLocks noGrp="1"/>
-          </p:cNvSpPr>
-          <p:nvPr>
-            <p:ph idx="1"/>
-          </p:nvPr>
-        </p:nvSpPr>
-        <p:spPr/>
-        <p:txBody>
-          <a:bodyPr/>
-          <a:lstStyle/>
-          <a:p>
-            <a:pPr lvl="0"/>
-            <a:r>
-              <a:rPr/>
-              <a:t>Reproducibility is often an afterthought, with ad-hoc tools</a:t>
-            </a:r>
-          </a:p>
-          <a:p>
-            <a:pPr lvl="0"/>
-            <a:r>
-              <a:rPr/>
-              <a:t>Nix eases the pain, but humans have to play ball! (biggest challenge)</a:t>
-            </a:r>
-          </a:p>
-          <a:p>
-            <a:pPr lvl="0"/>
-            <a:r>
-              <a:rPr/>
-              <a:t>What could a “reproducible by design” language look like?</a:t>
-            </a:r>
-          </a:p>
-          <a:p>
-            <a:pPr lvl="0"/>
-            <a:r>
-              <a:rPr/>
-              <a:t>This is T, a language whose package manager is Nix and pipelines are first-class citizens</a:t>
+              <a:t>If time allows…</a:t>
             </a:r>
           </a:p>
         </p:txBody>
@@ -5899,7 +5949,7 @@
             </a:pPr>
             <a:r>
               <a:rPr/>
-              <a:t>T is reproducible by design</a:t>
+              <a:t>Bonus: T, a new DSL for polyglot data science</a:t>
             </a:r>
           </a:p>
         </p:txBody>
@@ -5922,62 +5972,28 @@
             <a:pPr lvl="0"/>
             <a:r>
               <a:rPr/>
-              <a:t>A new T project is a Nix project:</a:t>
-            </a:r>
-          </a:p>
-          <a:p>
-            <a:pPr lvl="0" indent="0" marL="0">
-              <a:buNone/>
-            </a:pPr>
-            <a:r>
-              <a:rPr/>
-              <a:t>. . .</a:t>
-            </a:r>
-          </a:p>
-          <a:p>
-            <a:pPr lvl="0" indent="0">
-              <a:buNone/>
-            </a:pPr>
-            <a:r>
-              <a:rPr>
-                <a:solidFill>
-                  <a:srgbClr val="003B4F"/>
-                </a:solidFill>
-                <a:latin typeface="Courier"/>
-              </a:rPr>
-              <a:t>nix shell github:b-rodrigues/tlang</a:t>
-            </a:r>
-          </a:p>
-          <a:p>
-            <a:pPr lvl="0" indent="0" marL="0">
-              <a:buNone/>
-            </a:pPr>
-            <a:r>
-              <a:rPr/>
-              <a:t>. . .</a:t>
-            </a:r>
-          </a:p>
-          <a:p>
-            <a:pPr lvl="0" indent="0">
-              <a:buNone/>
-            </a:pPr>
-            <a:r>
-              <a:rPr>
-                <a:solidFill>
-                  <a:srgbClr val="003B4F"/>
-                </a:solidFill>
-                <a:latin typeface="Courier"/>
-              </a:rPr>
-              <a:t>t init </a:t>
-            </a:r>
-            <a:r>
-              <a:rPr>
-                <a:solidFill>
-                  <a:srgbClr val="657422"/>
-                </a:solidFill>
-                <a:latin typeface="Courier"/>
-              </a:rPr>
-              <a:t>--project</a:t>
+              <a:t>Reproducibility is often an afterthought, with ad-hoc tools</a:t>
+            </a:r>
+          </a:p>
+          <a:p>
+            <a:pPr lvl="0"/>
+            <a:r>
+              <a:rPr/>
+              <a:t>Nix eases the pain, but humans have to play ball! (biggest challenge)</a:t>
+            </a:r>
+          </a:p>
+          <a:p>
+            <a:pPr lvl="0"/>
+            <a:r>
+              <a:rPr/>
+              <a:t>What could a “reproducible by design” language look like?</a:t>
+            </a:r>
+          </a:p>
+          <a:p>
+            <a:pPr lvl="0"/>
+            <a:r>
+              <a:rPr/>
+              <a:t>This is T, a language whose package manager is Nix and pipelines are first-class citizens</a:t>
             </a:r>
           </a:p>
         </p:txBody>
@@ -6044,24 +6060,65 @@
           <a:bodyPr/>
           <a:lstStyle/>
           <a:p>
+            <a:pPr lvl="0"/>
+            <a:r>
+              <a:rPr/>
+              <a:t>A new T project is a Nix project:</a:t>
+            </a:r>
+          </a:p>
+          <a:p>
+            <a:pPr lvl="0" indent="0" marL="0">
+              <a:buNone/>
+            </a:pPr>
+            <a:r>
+              <a:rPr/>
+              <a:t>. . .</a:t>
+            </a:r>
+          </a:p>
+          <a:p>
             <a:pPr lvl="0" indent="0">
               <a:buNone/>
             </a:pPr>
             <a:r>
               <a:rPr>
-                <a:latin typeface="Courier"/>
-              </a:rPr>
-              <a:t>my_analysis/
-├── tproject.toml       # Project configuration and dependencies
-├── flake.nix           # Reproducible environment definition
-├── README.md           # Project overview
-├── AGENTS.md           # Onboarding guide for AI Agents
-├── T-LANGUAGE-REFERENCE.md # Tiered language reference for LLMs (git-ignored)
-├── src/
-│   └── pipeline.t      # Your main analysis script
-├── data/               # Place your raw data files here
-├── outputs/            # Output directory for results
-└── tests/              # Unit tests for your analysis</a:t>
+                <a:solidFill>
+                  <a:srgbClr val="003B4F"/>
+                </a:solidFill>
+                <a:latin typeface="Courier"/>
+              </a:rPr>
+              <a:t>nix shell github:b-rodrigues/tlang</a:t>
+            </a:r>
+          </a:p>
+          <a:p>
+            <a:pPr lvl="0" indent="0" marL="0">
+              <a:buNone/>
+            </a:pPr>
+            <a:r>
+              <a:rPr/>
+              <a:t>. . .</a:t>
+            </a:r>
+          </a:p>
+          <a:p>
+            <a:pPr lvl="0" indent="0">
+              <a:buNone/>
+            </a:pPr>
+            <a:r>
+              <a:rPr>
+                <a:solidFill>
+                  <a:srgbClr val="003B4F"/>
+                </a:solidFill>
+                <a:latin typeface="Courier"/>
+              </a:rPr>
+              <a:t>t init </a:t>
+            </a:r>
+            <a:r>
+              <a:rPr>
+                <a:solidFill>
+                  <a:srgbClr val="657422"/>
+                </a:solidFill>
+                <a:latin typeface="Courier"/>
+              </a:rPr>
+              <a:t>--project</a:t>
             </a:r>
           </a:p>
         </p:txBody>
@@ -6128,62 +6185,24 @@
           <a:bodyPr/>
           <a:lstStyle/>
           <a:p>
-            <a:pPr lvl="0"/>
-            <a:r>
-              <a:rPr/>
-              <a:t>Add R, Python or Julia dependecies to </a:t>
-            </a:r>
-            <a:r>
-              <a:rPr>
-                <a:latin typeface="Courier"/>
-              </a:rPr>
-              <a:t>tproject.toml</a:t>
-            </a:r>
-          </a:p>
-          <a:p>
-            <a:pPr lvl="0"/>
-            <a:r>
-              <a:rPr/>
-              <a:t>Run </a:t>
-            </a:r>
-            <a:r>
-              <a:rPr>
-                <a:latin typeface="Courier"/>
-              </a:rPr>
-              <a:t>t update</a:t>
-            </a:r>
-          </a:p>
-          <a:p>
-            <a:pPr lvl="0"/>
-            <a:r>
-              <a:rPr/>
-              <a:t>Exit the temporary shell and run </a:t>
-            </a:r>
-            <a:r>
-              <a:rPr>
-                <a:latin typeface="Courier"/>
-              </a:rPr>
-              <a:t>nix develop</a:t>
-            </a:r>
-          </a:p>
-          <a:p>
-            <a:pPr lvl="0"/>
-            <a:r>
-              <a:rPr/>
-              <a:t>Environment is set up, ready to use!</a:t>
-            </a:r>
-          </a:p>
-          <a:p>
-            <a:pPr lvl="0"/>
-            <a:r>
-              <a:rPr/>
-              <a:t>What pipelines look like </a:t>
-            </a:r>
-            <a:r>
-              <a:rPr>
-                <a:hlinkClick r:id="rId2"/>
-              </a:rPr>
-              <a:t>see here</a:t>
+            <a:pPr lvl="0" indent="0">
+              <a:buNone/>
+            </a:pPr>
+            <a:r>
+              <a:rPr>
+                <a:latin typeface="Courier"/>
+              </a:rPr>
+              <a:t>my_analysis/
+├── tproject.toml       # Project configuration and dependencies
+├── flake.nix           # Reproducible environment definition
+├── README.md           # Project overview
+├── AGENTS.md           # Onboarding guide for AI Agents
+├── T-LANGUAGE-REFERENCE.md # Tiered language reference for LLMs (git-ignored)
+├── src/
+│   └── pipeline.t      # Your main analysis script
+├── data/               # Place your raw data files here
+├── outputs/            # Output directory for results
+└── tests/              # Unit tests for your analysis</a:t>
             </a:r>
           </a:p>
         </p:txBody>
@@ -6230,7 +6249,7 @@
             </a:pPr>
             <a:r>
               <a:rPr/>
-              <a:t>Learning a new language in 2026?!</a:t>
+              <a:t>T is reproducible by design</a:t>
             </a:r>
           </a:p>
         </p:txBody>
@@ -6253,62 +6272,69 @@
             <a:pPr lvl="0"/>
             <a:r>
               <a:rPr/>
-              <a:t>Learning a new language just for pipelines? Never!!</a:t>
-            </a:r>
-          </a:p>
-          <a:p>
-            <a:pPr lvl="0"/>
-            <a:r>
-              <a:rPr/>
-              <a:t>T is built to be </a:t>
-            </a:r>
-            <a:r>
-              <a:rPr i="1"/>
-              <a:t>llm-friendly</a:t>
-            </a:r>
-          </a:p>
-          <a:p>
-            <a:pPr lvl="0"/>
-            <a:r>
-              <a:rPr/>
-              <a:t>Projects ship </a:t>
-            </a:r>
-            <a:r>
-              <a:rPr>
-                <a:latin typeface="Courier"/>
-              </a:rPr>
-              <a:t>AGENTS.md</a:t>
-            </a:r>
-            <a:r>
-              <a:rPr/>
-              <a:t>, </a:t>
-            </a:r>
-            <a:r>
-              <a:rPr>
-                <a:latin typeface="Courier"/>
-              </a:rPr>
-              <a:t>T-LANGUAGE-REFERENCE.md</a:t>
-            </a:r>
-            <a:r>
-              <a:rPr/>
-              <a:t> and </a:t>
-            </a:r>
-            <a:r>
-              <a:rPr>
-                <a:latin typeface="Courier"/>
-              </a:rPr>
-              <a:t>src/pipeline.t</a:t>
-            </a:r>
-            <a:r>
-              <a:rPr/>
-              <a:t> itself is a cheatsheet</a:t>
-            </a:r>
-          </a:p>
-          <a:p>
-            <a:pPr lvl="0"/>
-            <a:r>
-              <a:rPr/>
-              <a:t>LLMs should be able to wire your project using T without much issue!</a:t>
+              <a:t>Add R, Python or Julia dependencies to </a:t>
+            </a:r>
+            <a:r>
+              <a:rPr>
+                <a:latin typeface="Courier"/>
+              </a:rPr>
+              <a:t>tproject.toml</a:t>
+            </a:r>
+          </a:p>
+          <a:p>
+            <a:pPr lvl="0"/>
+            <a:r>
+              <a:rPr/>
+              <a:t>Run </a:t>
+            </a:r>
+            <a:r>
+              <a:rPr>
+                <a:latin typeface="Courier"/>
+              </a:rPr>
+              <a:t>t update</a:t>
+            </a:r>
+          </a:p>
+          <a:p>
+            <a:pPr lvl="0"/>
+            <a:r>
+              <a:rPr/>
+              <a:t>Exit the temporary shell and run </a:t>
+            </a:r>
+            <a:r>
+              <a:rPr>
+                <a:latin typeface="Courier"/>
+              </a:rPr>
+              <a:t>nix develop</a:t>
+            </a:r>
+          </a:p>
+          <a:p>
+            <a:pPr lvl="0"/>
+            <a:r>
+              <a:rPr/>
+              <a:t>Environment is set up, ready to use!</a:t>
+            </a:r>
+          </a:p>
+          <a:p>
+            <a:pPr lvl="0"/>
+            <a:r>
+              <a:rPr/>
+              <a:t>What pipelines look like: </a:t>
+            </a:r>
+            <a:r>
+              <a:rPr>
+                <a:hlinkClick r:id="rId2"/>
+              </a:rPr>
+              <a:t>GitHub repo</a:t>
+            </a:r>
+            <a:r>
+              <a:rPr/>
+              <a:t> or local demo </a:t>
+            </a:r>
+            <a:r>
+              <a:rPr>
+                <a:latin typeface="Courier"/>
+              </a:rPr>
+              <a:t>scripts/t_demo/r_py_xgboost_t/</a:t>
             </a:r>
           </a:p>
         </p:txBody>
@@ -6355,7 +6381,7 @@
             </a:pPr>
             <a:r>
               <a:rPr/>
-              <a:t>Caveat Emptor</a:t>
+              <a:t>Learning a new language in 2026?!</a:t>
             </a:r>
           </a:p>
         </p:txBody>
@@ -6378,28 +6404,62 @@
             <a:pPr lvl="0"/>
             <a:r>
               <a:rPr/>
-              <a:t>This is a 100% vibe-coded side-project by yours truly…</a:t>
-            </a:r>
-          </a:p>
-          <a:p>
-            <a:pPr lvl="0"/>
-            <a:r>
-              <a:rPr/>
-              <a:t>…but throughly tested (2000+ unit tests and 60+ end-to-end tests)</a:t>
-            </a:r>
-          </a:p>
-          <a:p>
-            <a:pPr lvl="0"/>
-            <a:r>
-              <a:rPr/>
-              <a:t>I wanted to stress-test the idea of a “reproducible by design” language</a:t>
-            </a:r>
-          </a:p>
-          <a:p>
-            <a:pPr lvl="0"/>
-            <a:r>
-              <a:rPr/>
-              <a:t>Challenges: input/output between languages</a:t>
+              <a:t>Learning a new language just for pipelines? Never!!</a:t>
+            </a:r>
+          </a:p>
+          <a:p>
+            <a:pPr lvl="0"/>
+            <a:r>
+              <a:rPr/>
+              <a:t>T is built to be </a:t>
+            </a:r>
+            <a:r>
+              <a:rPr i="1"/>
+              <a:t>llm-friendly</a:t>
+            </a:r>
+          </a:p>
+          <a:p>
+            <a:pPr lvl="0"/>
+            <a:r>
+              <a:rPr/>
+              <a:t>Projects ship </a:t>
+            </a:r>
+            <a:r>
+              <a:rPr>
+                <a:latin typeface="Courier"/>
+              </a:rPr>
+              <a:t>AGENTS.md</a:t>
+            </a:r>
+            <a:r>
+              <a:rPr/>
+              <a:t>, </a:t>
+            </a:r>
+            <a:r>
+              <a:rPr>
+                <a:latin typeface="Courier"/>
+              </a:rPr>
+              <a:t>T-LANGUAGE-REFERENCE.md</a:t>
+            </a:r>
+            <a:r>
+              <a:rPr/>
+              <a:t> and </a:t>
+            </a:r>
+            <a:r>
+              <a:rPr>
+                <a:latin typeface="Courier"/>
+              </a:rPr>
+              <a:t>src/pipeline.t</a:t>
+            </a:r>
+            <a:r>
+              <a:rPr/>
+              <a:t> itself is a cheatsheet</a:t>
+            </a:r>
+          </a:p>
+          <a:p>
+            <a:pPr lvl="0"/>
+            <a:r>
+              <a:rPr/>
+              <a:t>LLMs should be able to wire your project using T without much issue!</a:t>
             </a:r>
           </a:p>
         </p:txBody>
@@ -6446,7 +6506,7 @@
             </a:pPr>
             <a:r>
               <a:rPr/>
-              <a:t>How did I build T?</a:t>
+              <a:t>Caveat Emptor</a:t>
             </a:r>
           </a:p>
         </p:txBody>
@@ -6469,49 +6529,28 @@
             <a:pPr lvl="0"/>
             <a:r>
               <a:rPr/>
-              <a:t>100% LLM generated Ocaml code</a:t>
-            </a:r>
-          </a:p>
-          <a:p>
-            <a:pPr lvl="0"/>
-            <a:r>
-              <a:rPr/>
-              <a:t>Start with a specification doc</a:t>
-            </a:r>
-          </a:p>
-          <a:p>
-            <a:pPr lvl="0"/>
-            <a:r>
-              <a:rPr/>
-              <a:t>Keep brainstorming, refining…</a:t>
-            </a:r>
-          </a:p>
-          <a:p>
-            <a:pPr lvl="0"/>
-            <a:r>
-              <a:rPr/>
-              <a:t>Give the doc to an LLM</a:t>
-            </a:r>
-          </a:p>
-          <a:p>
-            <a:pPr lvl="0"/>
-            <a:r>
-              <a:rPr/>
-              <a:t>Let another LLM review the work</a:t>
-            </a:r>
-          </a:p>
-          <a:p>
-            <a:pPr lvl="0"/>
-            <a:r>
-              <a:rPr/>
-              <a:t>Implement and review tests</a:t>
-            </a:r>
-          </a:p>
-          <a:p>
-            <a:pPr lvl="0"/>
-            <a:r>
-              <a:rPr/>
-              <a:t>Repeat!</a:t>
+              <a:t>This is a 100% vibe-coded side-project by yours truly…</a:t>
+            </a:r>
+          </a:p>
+          <a:p>
+            <a:pPr lvl="0"/>
+            <a:r>
+              <a:rPr/>
+              <a:t>…but thoroughly tested (2000+ unit tests and 60+ end-to-end tests)</a:t>
+            </a:r>
+          </a:p>
+          <a:p>
+            <a:pPr lvl="0"/>
+            <a:r>
+              <a:rPr/>
+              <a:t>I wanted to stress-test the idea of a “reproducible by design” language</a:t>
+            </a:r>
+          </a:p>
+          <a:p>
+            <a:pPr lvl="0"/>
+            <a:r>
+              <a:rPr/>
+              <a:t>Challenges: input/output between languages</a:t>
             </a:r>
           </a:p>
         </p:txBody>
@@ -6522,6 +6561,118 @@
 </file>
 
 <file path=ppt/slides/slide27.xml><?xml version="1.0" encoding="utf-8"?>
+<p:sld xmlns:a="http://schemas.openxmlformats.org/drawingml/2006/main" xmlns:r="http://schemas.openxmlformats.org/officeDocument/2006/relationships" xmlns:p="http://schemas.openxmlformats.org/presentationml/2006/main">
+  <p:cSld>
+    <p:spTree>
+      <p:nvGrpSpPr>
+        <p:cNvPr id="1" name=""/>
+        <p:cNvGrpSpPr/>
+        <p:nvPr/>
+      </p:nvGrpSpPr>
+      <p:grpSpPr>
+        <a:xfrm>
+          <a:off x="0" y="0"/>
+          <a:ext cx="0" cy="0"/>
+          <a:chOff x="0" y="0"/>
+          <a:chExt cx="0" cy="0"/>
+        </a:xfrm>
+      </p:grpSpPr>
+      <p:sp>
+        <p:nvSpPr>
+          <p:cNvPr id="2" name="Title 1"/>
+          <p:cNvSpPr>
+            <a:spLocks noGrp="1"/>
+          </p:cNvSpPr>
+          <p:nvPr>
+            <p:ph type="title"/>
+          </p:nvPr>
+        </p:nvSpPr>
+        <p:spPr/>
+        <p:txBody>
+          <a:bodyPr/>
+          <a:lstStyle/>
+          <a:p>
+            <a:pPr lvl="0" indent="0" marL="0">
+              <a:buNone/>
+            </a:pPr>
+            <a:r>
+              <a:rPr/>
+              <a:t>How did I build T?</a:t>
+            </a:r>
+          </a:p>
+        </p:txBody>
+      </p:sp>
+      <p:sp>
+        <p:nvSpPr>
+          <p:cNvPr id="3" name="Content Placeholder 2"/>
+          <p:cNvSpPr>
+            <a:spLocks noGrp="1"/>
+          </p:cNvSpPr>
+          <p:nvPr>
+            <p:ph idx="1"/>
+          </p:nvPr>
+        </p:nvSpPr>
+        <p:spPr/>
+        <p:txBody>
+          <a:bodyPr/>
+          <a:lstStyle/>
+          <a:p>
+            <a:pPr lvl="0"/>
+            <a:r>
+              <a:rPr/>
+              <a:t>100% LLM generated Ocaml code</a:t>
+            </a:r>
+          </a:p>
+          <a:p>
+            <a:pPr lvl="0"/>
+            <a:r>
+              <a:rPr/>
+              <a:t>Start with a specification doc</a:t>
+            </a:r>
+          </a:p>
+          <a:p>
+            <a:pPr lvl="0"/>
+            <a:r>
+              <a:rPr/>
+              <a:t>Keep brainstorming, refining…</a:t>
+            </a:r>
+          </a:p>
+          <a:p>
+            <a:pPr lvl="0"/>
+            <a:r>
+              <a:rPr/>
+              <a:t>Give the doc to an LLM</a:t>
+            </a:r>
+          </a:p>
+          <a:p>
+            <a:pPr lvl="0"/>
+            <a:r>
+              <a:rPr/>
+              <a:t>Let another LLM review the work</a:t>
+            </a:r>
+          </a:p>
+          <a:p>
+            <a:pPr lvl="0"/>
+            <a:r>
+              <a:rPr/>
+              <a:t>Implement and review tests</a:t>
+            </a:r>
+          </a:p>
+          <a:p>
+            <a:pPr lvl="0"/>
+            <a:r>
+              <a:rPr/>
+              <a:t>Repeat!</a:t>
+            </a:r>
+          </a:p>
+        </p:txBody>
+      </p:sp>
+    </p:spTree>
+  </p:cSld>
+</p:sld>
+</file>
+
+<file path=ppt/slides/slide28.xml><?xml version="1.0" encoding="utf-8"?>
 <p:sld xmlns:a="http://schemas.openxmlformats.org/drawingml/2006/main" xmlns:r="http://schemas.openxmlformats.org/officeDocument/2006/relationships" xmlns:p="http://schemas.openxmlformats.org/presentationml/2006/main">
   <p:cSld>
     <p:spTree>
@@ -7264,7 +7415,7 @@
               <a:rPr>
                 <a:hlinkClick r:id="rId2"/>
               </a:rPr>
-              <a:t>https://b-rodrigues.github.io/repro_r_pharma</a:t>
+              <a:t>https://b-rodrigues.github.io/r_pharma_26</a:t>
             </a:r>
           </a:p>
           <a:p>
@@ -7284,7 +7435,7 @@
               <a:rPr>
                 <a:hlinkClick r:id="rId3"/>
               </a:rPr>
-              <a:t>https://github.com/b-rodrigues/repro_r_pharma</a:t>
+              <a:t>https://github.com/b-rodrigues/r_pharma_26</a:t>
             </a:r>
           </a:p>
         </p:txBody>
@@ -7354,7 +7505,100 @@
             <a:pPr lvl="0"/>
             <a:r>
               <a:rPr/>
-              <a:t>Reproducibility of data projects</a:t>
+              <a:t>The reproducibility challenge in R (and limits of </a:t>
+            </a:r>
+            <a:r>
+              <a:rPr>
+                <a:latin typeface="Courier"/>
+              </a:rPr>
+              <a:t>{renv}</a:t>
+            </a:r>
+            <a:r>
+              <a:rPr/>
+              <a:t> &amp; Docker)</a:t>
+            </a:r>
+          </a:p>
+          <a:p>
+            <a:pPr lvl="0"/>
+            <a:r>
+              <a:rPr/>
+              <a:t>Introduction to the Nix package manager</a:t>
+            </a:r>
+          </a:p>
+          <a:p>
+            <a:pPr lvl="0"/>
+            <a:r>
+              <a:rPr>
+                <a:latin typeface="Courier"/>
+              </a:rPr>
+              <a:t>{rix}</a:t>
+            </a:r>
+            <a:r>
+              <a:rPr/>
+              <a:t>: generating declarative, reproducible R environments</a:t>
+            </a:r>
+          </a:p>
+          <a:p>
+            <a:pPr lvl="0"/>
+            <a:r>
+              <a:rPr/>
+              <a:t>Interactive workflows (RStudio, Positron, VS Code)</a:t>
+            </a:r>
+          </a:p>
+          <a:p>
+            <a:pPr lvl="0"/>
+            <a:r>
+              <a:rPr/>
+              <a:t>Production pipelines with </a:t>
+            </a:r>
+            <a:r>
+              <a:rPr>
+                <a:latin typeface="Courier"/>
+              </a:rPr>
+              <a:t>{targets}</a:t>
+            </a:r>
+            <a:r>
+              <a:rPr/>
+              <a:t> and Nix</a:t>
+            </a:r>
+          </a:p>
+          <a:p>
+            <a:pPr lvl="0"/>
+            <a:r>
+              <a:rPr/>
+              <a:t>Nix in production: Docker, Shiny, and GitHub Actions</a:t>
+            </a:r>
+          </a:p>
+          <a:p>
+            <a:pPr lvl="0"/>
+            <a:r>
+              <a:rPr/>
+              <a:t>Polyglot pipelines with </a:t>
+            </a:r>
+            <a:r>
+              <a:rPr>
+                <a:latin typeface="Courier"/>
+              </a:rPr>
+              <a:t>{rixpress}</a:t>
+            </a:r>
+          </a:p>
+          <a:p>
+            <a:pPr lvl="0"/>
+            <a:r>
+              <a:rPr b="1"/>
+              <a:t>Bonus (if time allows)</a:t>
+            </a:r>
+            <a:r>
+              <a:rPr/>
+              <a:t>: A peek at </a:t>
+            </a:r>
+            <a:r>
+              <a:rPr b="1"/>
+              <a:t>T</a:t>
+            </a:r>
+            <a:r>
+              <a:rPr/>
+              <a:t>, a language reproducible by design</a:t>
             </a:r>
           </a:p>
         </p:txBody>

--- a/docs/index.pptx
+++ b/docs/index.pptx
@@ -5612,7 +5612,7 @@
                 </a:solidFill>
                 <a:latin typeface="Courier"/>
               </a:rPr>
-              <a:t>rixpress</a:t>
+              <a:t>rxp_populate</a:t>
             </a:r>
             <a:r>
               <a:rPr>

--- a/docs/index.pptx
+++ b/docs/index.pptx
@@ -6536,7 +6536,7 @@
             <a:pPr lvl="0"/>
             <a:r>
               <a:rPr/>
-              <a:t>…but thoroughly tested (2000+ unit tests and 60+ end-to-end tests)</a:t>
+              <a:t>…but thoroughly tested (6000+ unit tests and 80+ end-to-end tests)</a:t>
             </a:r>
           </a:p>
           <a:p>

--- a/docs/index.pptx
+++ b/docs/index.pptx
@@ -33,6 +33,8 @@
     <p:sldId id="281" r:id="rId27"/>
     <p:sldId id="282" r:id="rId28"/>
     <p:sldId id="283" r:id="rId29"/>
+    <p:sldId id="284" r:id="rId30"/>
+    <p:sldId id="285" r:id="rId31"/>
   </p:sldIdLst>
   <p:sldSz cx="9144000" cy="5143500" type="screen16x9"/>
   <p:notesSz cx="6858000" cy="9144000"/>
@@ -3240,7 +3242,12 @@
             <p:ph type="title"/>
           </p:nvPr>
         </p:nvSpPr>
-        <p:spPr/>
+        <p:spPr>
+          <a:xfrm>
+            <a:off x="457201" y="204787"/>
+            <a:ext cx="3008313" cy="871538"/>
+          </a:xfrm>
+        </p:spPr>
         <p:txBody>
           <a:bodyPr/>
           <a:lstStyle/>
@@ -3250,107 +3257,66 @@
             </a:pPr>
             <a:r>
               <a:rPr/>
-              <a:t>Available solutions for R</a:t>
-            </a:r>
-          </a:p>
-        </p:txBody>
-      </p:sp>
-      <p:sp>
-        <p:nvSpPr>
-          <p:cNvPr id="3" name="Content Placeholder 2"/>
-          <p:cNvSpPr>
-            <a:spLocks noGrp="1"/>
-          </p:cNvSpPr>
-          <p:nvPr>
-            <p:ph idx="1"/>
-          </p:nvPr>
-        </p:nvSpPr>
-        <p:spPr/>
-        <p:txBody>
-          <a:bodyPr/>
-          <a:lstStyle/>
-          <a:p>
-            <a:pPr lvl="0"/>
-            <a:r>
-              <a:rPr>
-                <a:latin typeface="Courier"/>
-              </a:rPr>
-              <a:t>{renv}</a:t>
-            </a:r>
-            <a:r>
-              <a:rPr/>
-              <a:t> or </a:t>
-            </a:r>
-            <a:r>
-              <a:rPr>
-                <a:latin typeface="Courier"/>
-              </a:rPr>
-              <a:t>{groundhog}</a:t>
-            </a:r>
-            <a:r>
-              <a:rPr/>
-              <a:t>: simple to use, but:</a:t>
-            </a:r>
-          </a:p>
-          <a:p>
-            <a:pPr lvl="1"/>
-            <a:r>
-              <a:rPr/>
-              <a:t>Doesn’t save the R version</a:t>
-            </a:r>
-          </a:p>
-          <a:p>
-            <a:pPr lvl="1"/>
-            <a:r>
-              <a:rPr/>
-              <a:t>Installing old packages may fail (system dependencies)</a:t>
-            </a:r>
-          </a:p>
-          <a:p>
-            <a:pPr lvl="0"/>
-            <a:r>
-              <a:rPr/>
-              <a:t>Docker goes further:</a:t>
-            </a:r>
-          </a:p>
-          <a:p>
-            <a:pPr lvl="1"/>
-            <a:r>
-              <a:rPr/>
-              <a:t>Manages R </a:t>
-            </a:r>
-            <a:r>
-              <a:rPr i="1"/>
-              <a:t>and</a:t>
-            </a:r>
-            <a:r>
-              <a:rPr/>
-              <a:t> system dependencies</a:t>
-            </a:r>
-          </a:p>
-          <a:p>
-            <a:pPr lvl="1"/>
-            <a:r>
-              <a:rPr/>
-              <a:t>Containers executable anywhere</a:t>
-            </a:r>
-          </a:p>
-          <a:p>
-            <a:pPr lvl="0"/>
-            <a:r>
-              <a:rPr/>
-              <a:t>But:</a:t>
-            </a:r>
-          </a:p>
-          <a:p>
-            <a:pPr lvl="1"/>
-            <a:r>
-              <a:rPr/>
-              <a:t>Not inherently reproducible</a:t>
-            </a:r>
-          </a:p>
-        </p:txBody>
-      </p:sp>
+              <a:t>What I’ll be talking about</a:t>
+            </a:r>
+          </a:p>
+        </p:txBody>
+      </p:sp>
+      <p:sp>
+        <p:nvSpPr>
+          <p:cNvPr id="4" name="Text Placeholder 3"/>
+          <p:cNvSpPr>
+            <a:spLocks noGrp="1"/>
+          </p:cNvSpPr>
+          <p:nvPr>
+            <p:ph idx="2" sz="half" type="body"/>
+          </p:nvPr>
+        </p:nvSpPr>
+        <p:spPr/>
+        <p:txBody>
+          <a:bodyPr/>
+          <a:lstStyle/>
+          <a:p>
+            <a:pPr lvl="0" indent="0" marL="0">
+              <a:buNone/>
+            </a:pPr>
+            <a:r>
+              <a:rPr/>
+              <a:t>The puzzle with Nix:</a:t>
+            </a:r>
+          </a:p>
+        </p:txBody>
+      </p:sp>
+      <p:pic>
+        <p:nvPicPr>
+          <p:cNvPr descr="img/repro_puzzle_nix.png" id="0" name="Picture 1"/>
+          <p:cNvPicPr>
+            <a:picLocks noGrp="1" noChangeAspect="1"/>
+          </p:cNvPicPr>
+          <p:nvPr/>
+        </p:nvPicPr>
+        <p:blipFill>
+          <a:blip r:embed="rId2"/>
+          <a:stretch>
+            <a:fillRect/>
+          </a:stretch>
+        </p:blipFill>
+        <p:spPr bwMode="auto">
+          <a:xfrm>
+            <a:off x="3924300" y="203200"/>
+            <a:ext cx="4394200" cy="4381500"/>
+          </a:xfrm>
+          <a:prstGeom prst="rect">
+            <a:avLst/>
+          </a:prstGeom>
+          <a:noFill/>
+          <a:ln w="9525">
+            <a:noFill/>
+            <a:headEnd/>
+            <a:tailEnd/>
+          </a:ln>
+        </p:spPr>
+      </p:pic>
     </p:spTree>
   </p:cSld>
 </p:sld>
@@ -3383,6 +3349,149 @@
             <p:ph type="title"/>
           </p:nvPr>
         </p:nvSpPr>
+        <p:spPr/>
+        <p:txBody>
+          <a:bodyPr/>
+          <a:lstStyle/>
+          <a:p>
+            <a:pPr lvl="0" indent="0" marL="0">
+              <a:buNone/>
+            </a:pPr>
+            <a:r>
+              <a:rPr/>
+              <a:t>Available solutions for R</a:t>
+            </a:r>
+          </a:p>
+        </p:txBody>
+      </p:sp>
+      <p:sp>
+        <p:nvSpPr>
+          <p:cNvPr id="3" name="Content Placeholder 2"/>
+          <p:cNvSpPr>
+            <a:spLocks noGrp="1"/>
+          </p:cNvSpPr>
+          <p:nvPr>
+            <p:ph idx="1"/>
+          </p:nvPr>
+        </p:nvSpPr>
+        <p:spPr/>
+        <p:txBody>
+          <a:bodyPr/>
+          <a:lstStyle/>
+          <a:p>
+            <a:pPr lvl="0"/>
+            <a:r>
+              <a:rPr>
+                <a:latin typeface="Courier"/>
+              </a:rPr>
+              <a:t>{renv}</a:t>
+            </a:r>
+            <a:r>
+              <a:rPr/>
+              <a:t> or </a:t>
+            </a:r>
+            <a:r>
+              <a:rPr>
+                <a:latin typeface="Courier"/>
+              </a:rPr>
+              <a:t>{groundhog}</a:t>
+            </a:r>
+            <a:r>
+              <a:rPr/>
+              <a:t>: simple to use, but:</a:t>
+            </a:r>
+          </a:p>
+          <a:p>
+            <a:pPr lvl="1"/>
+            <a:r>
+              <a:rPr/>
+              <a:t>Doesn’t save the R version</a:t>
+            </a:r>
+          </a:p>
+          <a:p>
+            <a:pPr lvl="1"/>
+            <a:r>
+              <a:rPr/>
+              <a:t>Installing old packages may fail (system dependencies)</a:t>
+            </a:r>
+          </a:p>
+          <a:p>
+            <a:pPr lvl="0"/>
+            <a:r>
+              <a:rPr/>
+              <a:t>Docker goes further:</a:t>
+            </a:r>
+          </a:p>
+          <a:p>
+            <a:pPr lvl="1"/>
+            <a:r>
+              <a:rPr/>
+              <a:t>Manages R </a:t>
+            </a:r>
+            <a:r>
+              <a:rPr i="1"/>
+              <a:t>and</a:t>
+            </a:r>
+            <a:r>
+              <a:rPr/>
+              <a:t> system dependencies</a:t>
+            </a:r>
+          </a:p>
+          <a:p>
+            <a:pPr lvl="1"/>
+            <a:r>
+              <a:rPr/>
+              <a:t>Containers executable anywhere</a:t>
+            </a:r>
+          </a:p>
+          <a:p>
+            <a:pPr lvl="0"/>
+            <a:r>
+              <a:rPr/>
+              <a:t>But:</a:t>
+            </a:r>
+          </a:p>
+          <a:p>
+            <a:pPr lvl="1"/>
+            <a:r>
+              <a:rPr/>
+              <a:t>Not inherently reproducible</a:t>
+            </a:r>
+          </a:p>
+        </p:txBody>
+      </p:sp>
+    </p:spTree>
+  </p:cSld>
+</p:sld>
+</file>
+
+<file path=ppt/slides/slide12.xml><?xml version="1.0" encoding="utf-8"?>
+<p:sld xmlns:a="http://schemas.openxmlformats.org/drawingml/2006/main" xmlns:r="http://schemas.openxmlformats.org/officeDocument/2006/relationships" xmlns:p="http://schemas.openxmlformats.org/presentationml/2006/main">
+  <p:cSld>
+    <p:spTree>
+      <p:nvGrpSpPr>
+        <p:cNvPr id="1" name=""/>
+        <p:cNvGrpSpPr/>
+        <p:nvPr/>
+      </p:nvGrpSpPr>
+      <p:grpSpPr>
+        <a:xfrm>
+          <a:off x="0" y="0"/>
+          <a:ext cx="0" cy="0"/>
+          <a:chOff x="0" y="0"/>
+          <a:chExt cx="0" cy="0"/>
+        </a:xfrm>
+      </p:grpSpPr>
+      <p:sp>
+        <p:nvSpPr>
+          <p:cNvPr id="2" name="Title 1"/>
+          <p:cNvSpPr>
+            <a:spLocks noGrp="1"/>
+          </p:cNvSpPr>
+          <p:nvPr>
+            <p:ph type="title"/>
+          </p:nvPr>
+        </p:nvSpPr>
         <p:spPr>
           <a:xfrm>
             <a:off x="457201" y="204787"/>
@@ -3398,7 +3507,7 @@
             </a:pPr>
             <a:r>
               <a:rPr/>
-              <a:t>The Nix package manager (1/2)</a:t>
+              <a:t>The Nix package manager (1/3)</a:t>
             </a:r>
           </a:p>
         </p:txBody>
@@ -3526,105 +3635,6 @@
 </p:sld>
 </file>
 
-<file path=ppt/slides/slide12.xml><?xml version="1.0" encoding="utf-8"?>
-<p:sld xmlns:a="http://schemas.openxmlformats.org/drawingml/2006/main" xmlns:r="http://schemas.openxmlformats.org/officeDocument/2006/relationships" xmlns:p="http://schemas.openxmlformats.org/presentationml/2006/main">
-  <p:cSld>
-    <p:spTree>
-      <p:nvGrpSpPr>
-        <p:cNvPr id="1" name=""/>
-        <p:cNvGrpSpPr/>
-        <p:nvPr/>
-      </p:nvGrpSpPr>
-      <p:grpSpPr>
-        <a:xfrm>
-          <a:off x="0" y="0"/>
-          <a:ext cx="0" cy="0"/>
-          <a:chOff x="0" y="0"/>
-          <a:chExt cx="0" cy="0"/>
-        </a:xfrm>
-      </p:grpSpPr>
-      <p:sp>
-        <p:nvSpPr>
-          <p:cNvPr id="2" name="Title 1"/>
-          <p:cNvSpPr>
-            <a:spLocks noGrp="1"/>
-          </p:cNvSpPr>
-          <p:nvPr>
-            <p:ph type="title"/>
-          </p:nvPr>
-        </p:nvSpPr>
-        <p:spPr/>
-        <p:txBody>
-          <a:bodyPr/>
-          <a:lstStyle/>
-          <a:p>
-            <a:pPr lvl="0" indent="0" marL="0">
-              <a:buNone/>
-            </a:pPr>
-            <a:r>
-              <a:rPr/>
-              <a:t>The Nix package manager (2/2)</a:t>
-            </a:r>
-          </a:p>
-        </p:txBody>
-      </p:sp>
-      <p:sp>
-        <p:nvSpPr>
-          <p:cNvPr id="3" name="Content Placeholder 2"/>
-          <p:cNvSpPr>
-            <a:spLocks noGrp="1"/>
-          </p:cNvSpPr>
-          <p:nvPr>
-            <p:ph idx="1"/>
-          </p:nvPr>
-        </p:nvSpPr>
-        <p:spPr/>
-        <p:txBody>
-          <a:bodyPr/>
-          <a:lstStyle/>
-          <a:p>
-            <a:pPr lvl="0"/>
-            <a:r>
-              <a:rPr/>
-              <a:t>To ensure reproducibility: R, R packages, and other dependencies must be explicitly managed</a:t>
-            </a:r>
-          </a:p>
-          <a:p>
-            <a:pPr lvl="0"/>
-            <a:r>
-              <a:rPr/>
-              <a:t>Nix is a package manager truly focused on reproducible builds</a:t>
-            </a:r>
-          </a:p>
-          <a:p>
-            <a:pPr lvl="0"/>
-            <a:r>
-              <a:rPr/>
-              <a:t>Nix manages everything using a single text file (called a Nix expression)!</a:t>
-            </a:r>
-          </a:p>
-          <a:p>
-            <a:pPr lvl="0"/>
-            <a:r>
-              <a:rPr/>
-              <a:t>These expressions </a:t>
-            </a:r>
-            <a:r>
-              <a:rPr i="1"/>
-              <a:t>always</a:t>
-            </a:r>
-            <a:r>
-              <a:rPr/>
-              <a:t> produce exactly the same result</a:t>
-            </a:r>
-          </a:p>
-        </p:txBody>
-      </p:sp>
-    </p:spTree>
-  </p:cSld>
-</p:sld>
-</file>
-
 <file path=ppt/slides/slide13.xml><?xml version="1.0" encoding="utf-8"?>
 <p:sld xmlns:a="http://schemas.openxmlformats.org/drawingml/2006/main" xmlns:r="http://schemas.openxmlformats.org/officeDocument/2006/relationships" xmlns:p="http://schemas.openxmlformats.org/presentationml/2006/main">
   <p:cSld>
@@ -3662,7 +3672,7 @@
             </a:pPr>
             <a:r>
               <a:rPr/>
-              <a:t>rix: reproducible development environments with Nix (1/2)</a:t>
+              <a:t>The Nix package manager (2/3)</a:t>
             </a:r>
           </a:p>
         </p:txBody>
@@ -3684,441 +3694,37 @@
           <a:p>
             <a:pPr lvl="0"/>
             <a:r>
-              <a:rPr>
-                <a:latin typeface="Courier"/>
-              </a:rPr>
-              <a:t>{rix}</a:t>
-            </a:r>
-            <a:r>
-              <a:rPr/>
-              <a:t> (</a:t>
-            </a:r>
-            <a:r>
-              <a:rPr>
-                <a:hlinkClick r:id="rId2"/>
-              </a:rPr>
-              <a:t>website</a:t>
-            </a:r>
-            <a:r>
-              <a:rPr/>
-              <a:t>) simplifies writing Nix expressions!</a:t>
-            </a:r>
-          </a:p>
-          <a:p>
-            <a:pPr lvl="0"/>
-            <a:r>
-              <a:rPr/>
-              <a:t>Just use the provided </a:t>
-            </a:r>
-            <a:r>
-              <a:rPr>
-                <a:latin typeface="Courier"/>
-              </a:rPr>
-              <a:t>rix()</a:t>
-            </a:r>
-            <a:r>
-              <a:rPr/>
-              <a:t> function:</a:t>
-            </a:r>
-          </a:p>
-          <a:p>
-            <a:pPr lvl="0" indent="0" marL="0">
-              <a:buNone/>
-            </a:pPr>
-            <a:r>
-              <a:rPr/>
-              <a:t>. . .</a:t>
-            </a:r>
-          </a:p>
-          <a:p>
-            <a:pPr lvl="0" indent="0">
-              <a:buNone/>
-            </a:pPr>
-            <a:r>
-              <a:rPr>
-                <a:solidFill>
-                  <a:srgbClr val="4758AB"/>
-                </a:solidFill>
-                <a:latin typeface="Courier"/>
-              </a:rPr>
-              <a:t>library</a:t>
-            </a:r>
-            <a:r>
-              <a:rPr>
-                <a:solidFill>
-                  <a:srgbClr val="003B4F"/>
-                </a:solidFill>
-                <a:latin typeface="Courier"/>
-              </a:rPr>
-              <a:t>(rix)</a:t>
-            </a:r>
-            <a:br/>
-            <a:br/>
-            <a:r>
-              <a:rPr>
-                <a:solidFill>
-                  <a:srgbClr val="4758AB"/>
-                </a:solidFill>
-                <a:latin typeface="Courier"/>
-              </a:rPr>
-              <a:t>rix</a:t>
-            </a:r>
-            <a:r>
-              <a:rPr>
-                <a:solidFill>
-                  <a:srgbClr val="003B4F"/>
-                </a:solidFill>
-                <a:latin typeface="Courier"/>
-              </a:rPr>
-              <a:t>(</a:t>
-            </a:r>
-            <a:r>
-              <a:rPr>
-                <a:solidFill>
-                  <a:srgbClr val="657422"/>
-                </a:solidFill>
-                <a:latin typeface="Courier"/>
-              </a:rPr>
-              <a:t>date =</a:t>
-            </a:r>
-            <a:r>
-              <a:rPr>
-                <a:solidFill>
-                  <a:srgbClr val="003B4F"/>
-                </a:solidFill>
-                <a:latin typeface="Courier"/>
-              </a:rPr>
-              <a:t> </a:t>
-            </a:r>
-            <a:r>
-              <a:rPr>
-                <a:solidFill>
-                  <a:srgbClr val="20794D"/>
-                </a:solidFill>
-                <a:latin typeface="Courier"/>
-              </a:rPr>
-              <a:t>"2026-09-23"</a:t>
-            </a:r>
-            <a:r>
-              <a:rPr>
-                <a:solidFill>
-                  <a:srgbClr val="003B4F"/>
-                </a:solidFill>
-                <a:latin typeface="Courier"/>
-              </a:rPr>
-              <a:t>,</a:t>
-            </a:r>
-            <a:br/>
-            <a:r>
-              <a:rPr>
-                <a:solidFill>
-                  <a:srgbClr val="003B4F"/>
-                </a:solidFill>
-                <a:latin typeface="Courier"/>
-              </a:rPr>
-              <a:t>    </a:t>
-            </a:r>
-            <a:r>
-              <a:rPr>
-                <a:solidFill>
-                  <a:srgbClr val="657422"/>
-                </a:solidFill>
-                <a:latin typeface="Courier"/>
-              </a:rPr>
-              <a:t>r_pkgs =</a:t>
-            </a:r>
-            <a:r>
-              <a:rPr>
-                <a:solidFill>
-                  <a:srgbClr val="003B4F"/>
-                </a:solidFill>
-                <a:latin typeface="Courier"/>
-              </a:rPr>
-              <a:t> </a:t>
-            </a:r>
-            <a:r>
-              <a:rPr>
-                <a:solidFill>
-                  <a:srgbClr val="4758AB"/>
-                </a:solidFill>
-                <a:latin typeface="Courier"/>
-              </a:rPr>
-              <a:t>c</a:t>
-            </a:r>
-            <a:r>
-              <a:rPr>
-                <a:solidFill>
-                  <a:srgbClr val="003B4F"/>
-                </a:solidFill>
-                <a:latin typeface="Courier"/>
-              </a:rPr>
-              <a:t>(</a:t>
-            </a:r>
-            <a:r>
-              <a:rPr>
-                <a:solidFill>
-                  <a:srgbClr val="20794D"/>
-                </a:solidFill>
-                <a:latin typeface="Courier"/>
-              </a:rPr>
-              <a:t>"dplyr"</a:t>
-            </a:r>
-            <a:r>
-              <a:rPr>
-                <a:solidFill>
-                  <a:srgbClr val="003B4F"/>
-                </a:solidFill>
-                <a:latin typeface="Courier"/>
-              </a:rPr>
-              <a:t>, </a:t>
-            </a:r>
-            <a:r>
-              <a:rPr>
-                <a:solidFill>
-                  <a:srgbClr val="20794D"/>
-                </a:solidFill>
-                <a:latin typeface="Courier"/>
-              </a:rPr>
-              <a:t>"ggplot2"</a:t>
-            </a:r>
-            <a:r>
-              <a:rPr>
-                <a:solidFill>
-                  <a:srgbClr val="003B4F"/>
-                </a:solidFill>
-                <a:latin typeface="Courier"/>
-              </a:rPr>
-              <a:t>),</a:t>
-            </a:r>
-            <a:br/>
-            <a:r>
-              <a:rPr>
-                <a:solidFill>
-                  <a:srgbClr val="003B4F"/>
-                </a:solidFill>
-                <a:latin typeface="Courier"/>
-              </a:rPr>
-              <a:t>    </a:t>
-            </a:r>
-            <a:r>
-              <a:rPr>
-                <a:solidFill>
-                  <a:srgbClr val="657422"/>
-                </a:solidFill>
-                <a:latin typeface="Courier"/>
-              </a:rPr>
-              <a:t>system_pkgs =</a:t>
-            </a:r>
-            <a:r>
-              <a:rPr>
-                <a:solidFill>
-                  <a:srgbClr val="003B4F"/>
-                </a:solidFill>
-                <a:latin typeface="Courier"/>
-              </a:rPr>
-              <a:t> </a:t>
-            </a:r>
-            <a:r>
-              <a:rPr>
-                <a:solidFill>
-                  <a:srgbClr val="8F5902"/>
-                </a:solidFill>
-                <a:latin typeface="Courier"/>
-              </a:rPr>
-              <a:t>NULL</a:t>
-            </a:r>
-            <a:r>
-              <a:rPr>
-                <a:solidFill>
-                  <a:srgbClr val="003B4F"/>
-                </a:solidFill>
-                <a:latin typeface="Courier"/>
-              </a:rPr>
-              <a:t>,</a:t>
-            </a:r>
-            <a:br/>
-            <a:r>
-              <a:rPr>
-                <a:solidFill>
-                  <a:srgbClr val="003B4F"/>
-                </a:solidFill>
-                <a:latin typeface="Courier"/>
-              </a:rPr>
-              <a:t>    </a:t>
-            </a:r>
-            <a:r>
-              <a:rPr>
-                <a:solidFill>
-                  <a:srgbClr val="657422"/>
-                </a:solidFill>
-                <a:latin typeface="Courier"/>
-              </a:rPr>
-              <a:t>git_pkgs =</a:t>
-            </a:r>
-            <a:r>
-              <a:rPr>
-                <a:solidFill>
-                  <a:srgbClr val="003B4F"/>
-                </a:solidFill>
-                <a:latin typeface="Courier"/>
-              </a:rPr>
-              <a:t> </a:t>
-            </a:r>
-            <a:r>
-              <a:rPr>
-                <a:solidFill>
-                  <a:srgbClr val="8F5902"/>
-                </a:solidFill>
-                <a:latin typeface="Courier"/>
-              </a:rPr>
-              <a:t>NULL</a:t>
-            </a:r>
-            <a:r>
-              <a:rPr>
-                <a:solidFill>
-                  <a:srgbClr val="003B4F"/>
-                </a:solidFill>
-                <a:latin typeface="Courier"/>
-              </a:rPr>
-              <a:t>,</a:t>
-            </a:r>
-            <a:br/>
-            <a:r>
-              <a:rPr>
-                <a:solidFill>
-                  <a:srgbClr val="003B4F"/>
-                </a:solidFill>
-                <a:latin typeface="Courier"/>
-              </a:rPr>
-              <a:t>    </a:t>
-            </a:r>
-            <a:r>
-              <a:rPr>
-                <a:solidFill>
-                  <a:srgbClr val="657422"/>
-                </a:solidFill>
-                <a:latin typeface="Courier"/>
-              </a:rPr>
-              <a:t>tex_pkgs =</a:t>
-            </a:r>
-            <a:r>
-              <a:rPr>
-                <a:solidFill>
-                  <a:srgbClr val="003B4F"/>
-                </a:solidFill>
-                <a:latin typeface="Courier"/>
-              </a:rPr>
-              <a:t> </a:t>
-            </a:r>
-            <a:r>
-              <a:rPr>
-                <a:solidFill>
-                  <a:srgbClr val="8F5902"/>
-                </a:solidFill>
-                <a:latin typeface="Courier"/>
-              </a:rPr>
-              <a:t>NULL</a:t>
-            </a:r>
-            <a:r>
-              <a:rPr>
-                <a:solidFill>
-                  <a:srgbClr val="003B4F"/>
-                </a:solidFill>
-                <a:latin typeface="Courier"/>
-              </a:rPr>
-              <a:t>,</a:t>
-            </a:r>
-            <a:br/>
-            <a:r>
-              <a:rPr>
-                <a:solidFill>
-                  <a:srgbClr val="003B4F"/>
-                </a:solidFill>
-                <a:latin typeface="Courier"/>
-              </a:rPr>
-              <a:t>    </a:t>
-            </a:r>
-            <a:r>
-              <a:rPr>
-                <a:solidFill>
-                  <a:srgbClr val="657422"/>
-                </a:solidFill>
-                <a:latin typeface="Courier"/>
-              </a:rPr>
-              <a:t>ide =</a:t>
-            </a:r>
-            <a:r>
-              <a:rPr>
-                <a:solidFill>
-                  <a:srgbClr val="003B4F"/>
-                </a:solidFill>
-                <a:latin typeface="Courier"/>
-              </a:rPr>
-              <a:t> </a:t>
-            </a:r>
-            <a:r>
-              <a:rPr>
-                <a:solidFill>
-                  <a:srgbClr val="20794D"/>
-                </a:solidFill>
-                <a:latin typeface="Courier"/>
-              </a:rPr>
-              <a:t>"rstudio"</a:t>
-            </a:r>
-            <a:r>
-              <a:rPr>
-                <a:solidFill>
-                  <a:srgbClr val="003B4F"/>
-                </a:solidFill>
-                <a:latin typeface="Courier"/>
-              </a:rPr>
-              <a:t>,</a:t>
-            </a:r>
-            <a:br/>
-            <a:r>
-              <a:rPr>
-                <a:solidFill>
-                  <a:srgbClr val="003B4F"/>
-                </a:solidFill>
-                <a:latin typeface="Courier"/>
-              </a:rPr>
-              <a:t>    </a:t>
-            </a:r>
-            <a:r>
-              <a:rPr>
-                <a:solidFill>
-                  <a:srgbClr val="657422"/>
-                </a:solidFill>
-                <a:latin typeface="Courier"/>
-              </a:rPr>
-              <a:t>project_path =</a:t>
-            </a:r>
-            <a:r>
-              <a:rPr>
-                <a:solidFill>
-                  <a:srgbClr val="003B4F"/>
-                </a:solidFill>
-                <a:latin typeface="Courier"/>
-              </a:rPr>
-              <a:t> </a:t>
-            </a:r>
-            <a:r>
-              <a:rPr>
-                <a:solidFill>
-                  <a:srgbClr val="20794D"/>
-                </a:solidFill>
-                <a:latin typeface="Courier"/>
-              </a:rPr>
-              <a:t>"."</a:t>
-            </a:r>
-            <a:r>
-              <a:rPr>
-                <a:solidFill>
-                  <a:srgbClr val="003B4F"/>
-                </a:solidFill>
-                <a:latin typeface="Courier"/>
-              </a:rPr>
-              <a:t>)</a:t>
+              <a:rPr/>
+              <a:t>To ensure reproducibility: R, R packages, and other dependencies must be explicitly managed</a:t>
+            </a:r>
+          </a:p>
+          <a:p>
+            <a:pPr lvl="0"/>
+            <a:r>
+              <a:rPr/>
+              <a:t>Nix is a package manager truly focused on reproducible builds</a:t>
+            </a:r>
+          </a:p>
+          <a:p>
+            <a:pPr lvl="0"/>
+            <a:r>
+              <a:rPr/>
+              <a:t>Nix manages everything using a single text file (called a Nix expression)!</a:t>
+            </a:r>
+          </a:p>
+          <a:p>
+            <a:pPr lvl="0"/>
+            <a:r>
+              <a:rPr/>
+              <a:t>These expressions </a:t>
+            </a:r>
+            <a:r>
+              <a:rPr i="1"/>
+              <a:t>always</a:t>
+            </a:r>
+            <a:r>
+              <a:rPr/>
+              <a:t> produce exactly the same result</a:t>
             </a:r>
           </a:p>
         </p:txBody>
@@ -4165,93 +3771,69 @@
             </a:pPr>
             <a:r>
               <a:rPr/>
-              <a:t>rix: reproducible development environments with Nix (2/2)</a:t>
-            </a:r>
-          </a:p>
-        </p:txBody>
-      </p:sp>
-      <p:sp>
-        <p:nvSpPr>
-          <p:cNvPr id="3" name="Content Placeholder 2"/>
-          <p:cNvSpPr>
-            <a:spLocks noGrp="1"/>
-          </p:cNvSpPr>
+              <a:t>The Nix package manager (3/3)</a:t>
+            </a:r>
+          </a:p>
+        </p:txBody>
+      </p:sp>
+      <p:pic>
+        <p:nvPicPr>
+          <p:cNvPr descr="img/fhs-vs-nix.png" id="0" name="Picture 1"/>
+          <p:cNvPicPr>
+            <a:picLocks noGrp="1" noChangeAspect="1"/>
+          </p:cNvPicPr>
+          <p:nvPr/>
+        </p:nvPicPr>
+        <p:blipFill>
+          <a:blip r:embed="rId2"/>
+          <a:stretch>
+            <a:fillRect/>
+          </a:stretch>
+        </p:blipFill>
+        <p:spPr bwMode="auto">
+          <a:xfrm>
+            <a:off x="2070100" y="1193800"/>
+            <a:ext cx="5003800" cy="2882900"/>
+          </a:xfrm>
+          <a:prstGeom prst="rect">
+            <a:avLst/>
+          </a:prstGeom>
+          <a:noFill/>
+          <a:ln w="9525">
+            <a:noFill/>
+            <a:headEnd/>
+            <a:tailEnd/>
+          </a:ln>
+        </p:spPr>
+      </p:pic>
+      <p:sp>
+        <p:nvSpPr>
+          <p:cNvPr id="1" name="TextBox 3"/>
+          <p:cNvSpPr txBox="1"/>
           <p:nvPr>
             <p:ph idx="1"/>
           </p:nvPr>
         </p:nvSpPr>
-        <p:spPr/>
-        <p:txBody>
-          <a:bodyPr/>
-          <a:lstStyle/>
-          <a:p>
-            <a:pPr lvl="0"/>
-            <a:r>
-              <a:rPr>
-                <a:latin typeface="Courier"/>
-              </a:rPr>
-              <a:t>rix::rix()</a:t>
-            </a:r>
-            <a:r>
-              <a:rPr/>
-              <a:t> generates a </a:t>
-            </a:r>
-            <a:r>
-              <a:rPr>
-                <a:latin typeface="Courier"/>
-              </a:rPr>
-              <a:t>default.nix</a:t>
-            </a:r>
-            <a:r>
-              <a:rPr/>
-              <a:t> file</a:t>
-            </a:r>
-          </a:p>
-          <a:p>
-            <a:pPr lvl="0"/>
-            <a:r>
-              <a:rPr/>
-              <a:t>Build the expressions with </a:t>
-            </a:r>
-            <a:r>
-              <a:rPr>
-                <a:latin typeface="Courier"/>
-              </a:rPr>
-              <a:t>nix-build</a:t>
-            </a:r>
-            <a:r>
-              <a:rPr/>
-              <a:t> (in terminal) or </a:t>
-            </a:r>
-            <a:r>
-              <a:rPr>
-                <a:latin typeface="Courier"/>
-              </a:rPr>
-              <a:t>rix::nix_build()</a:t>
-            </a:r>
-            <a:r>
-              <a:rPr/>
-              <a:t> from R</a:t>
-            </a:r>
-          </a:p>
-          <a:p>
-            <a:pPr lvl="0"/>
-            <a:r>
-              <a:rPr/>
-              <a:t>Access the development environment with </a:t>
-            </a:r>
-            <a:r>
-              <a:rPr>
-                <a:latin typeface="Courier"/>
-              </a:rPr>
-              <a:t>nix-shell</a:t>
-            </a:r>
-          </a:p>
-          <a:p>
-            <a:pPr lvl="0"/>
-            <a:r>
-              <a:rPr/>
-              <a:t>Expressions can be generated even without Nix installed (with some limitations)</a:t>
+        <p:spPr>
+          <a:xfrm>
+            <a:off x="457200" y="4076700"/>
+            <a:ext cx="8229600" cy="508000"/>
+          </a:xfrm>
+          <a:prstGeom prst="rect">
+            <a:avLst/>
+          </a:prstGeom>
+          <a:noFill/>
+        </p:spPr>
+        <p:txBody>
+          <a:bodyPr/>
+          <a:lstStyle/>
+          <a:p>
+            <a:pPr lvl="0" indent="0" marL="0" algn="ctr">
+              <a:buNone/>
+            </a:pPr>
+            <a:r>
+              <a:rPr/>
+              <a:t>fhs vs nix</a:t>
             </a:r>
           </a:p>
         </p:txBody>
@@ -4298,7 +3880,7 @@
             </a:pPr>
             <a:r>
               <a:rPr/>
-              <a:t>Polyglot environments with rix</a:t>
+              <a:t>rix: reproducible development environments with Nix (1/2)</a:t>
             </a:r>
           </a:p>
         </p:txBody>
@@ -4323,11 +3905,38 @@
               <a:rPr>
                 <a:latin typeface="Courier"/>
               </a:rPr>
+              <a:t>{rix}</a:t>
+            </a:r>
+            <a:r>
+              <a:rPr/>
+              <a:t> (</a:t>
+            </a:r>
+            <a:r>
+              <a:rPr>
+                <a:hlinkClick r:id="rId2"/>
+              </a:rPr>
+              <a:t>website</a:t>
+            </a:r>
+            <a:r>
+              <a:rPr/>
+              <a:t>) simplifies writing Nix expressions!</a:t>
+            </a:r>
+          </a:p>
+          <a:p>
+            <a:pPr lvl="0"/>
+            <a:r>
+              <a:rPr/>
+              <a:t>Just use the provided </a:t>
+            </a:r>
+            <a:r>
+              <a:rPr>
+                <a:latin typeface="Courier"/>
+              </a:rPr>
               <a:t>rix()</a:t>
             </a:r>
             <a:r>
               <a:rPr/>
-              <a:t> supports Python and Julia alongside R:</a:t>
+              <a:t> function:</a:t>
             </a:r>
           </a:p>
           <a:p>
@@ -4350,6 +3959,26 @@
                 </a:solidFill>
                 <a:latin typeface="Courier"/>
               </a:rPr>
+              <a:t>library</a:t>
+            </a:r>
+            <a:r>
+              <a:rPr>
+                <a:solidFill>
+                  <a:srgbClr val="003B4F"/>
+                </a:solidFill>
+                <a:latin typeface="Courier"/>
+              </a:rPr>
+              <a:t>(rix)</a:t>
+            </a:r>
+            <a:br/>
+            <a:br/>
+            <a:r>
+              <a:rPr>
+                <a:solidFill>
+                  <a:srgbClr val="4758AB"/>
+                </a:solidFill>
+                <a:latin typeface="Courier"/>
+              </a:rPr>
               <a:t>rix</a:t>
             </a:r>
             <a:r>
@@ -4386,7 +4015,7 @@
                 </a:solidFill>
                 <a:latin typeface="Courier"/>
               </a:rPr>
-              <a:t>"2026-01-14"</a:t>
+              <a:t>"2026-09-23"</a:t>
             </a:r>
             <a:r>
               <a:rPr>
@@ -4450,7 +4079,7 @@
                 </a:solidFill>
                 <a:latin typeface="Courier"/>
               </a:rPr>
-              <a:t>"tidyr"</a:t>
+              <a:t>"dplyr"</a:t>
             </a:r>
             <a:r>
               <a:rPr>
@@ -4468,7 +4097,7 @@
                 </a:solidFill>
                 <a:latin typeface="Courier"/>
               </a:rPr>
-              <a:t>"dplyr"</a:t>
+              <a:t>"ggplot2"</a:t>
             </a:r>
             <a:r>
               <a:rPr>
@@ -4477,7 +4106,173 @@
                 </a:solidFill>
                 <a:latin typeface="Courier"/>
               </a:rPr>
-              <a:t>, </a:t>
+              <a:t>),</a:t>
+            </a:r>
+            <a:br/>
+            <a:r>
+              <a:rPr>
+                <a:solidFill>
+                  <a:srgbClr val="003B4F"/>
+                </a:solidFill>
+                <a:latin typeface="Courier"/>
+              </a:rPr>
+              <a:t>    </a:t>
+            </a:r>
+            <a:r>
+              <a:rPr>
+                <a:solidFill>
+                  <a:srgbClr val="657422"/>
+                </a:solidFill>
+                <a:latin typeface="Courier"/>
+              </a:rPr>
+              <a:t>system_pkgs =</a:t>
+            </a:r>
+            <a:r>
+              <a:rPr>
+                <a:solidFill>
+                  <a:srgbClr val="003B4F"/>
+                </a:solidFill>
+                <a:latin typeface="Courier"/>
+              </a:rPr>
+              <a:t> </a:t>
+            </a:r>
+            <a:r>
+              <a:rPr>
+                <a:solidFill>
+                  <a:srgbClr val="8F5902"/>
+                </a:solidFill>
+                <a:latin typeface="Courier"/>
+              </a:rPr>
+              <a:t>NULL</a:t>
+            </a:r>
+            <a:r>
+              <a:rPr>
+                <a:solidFill>
+                  <a:srgbClr val="003B4F"/>
+                </a:solidFill>
+                <a:latin typeface="Courier"/>
+              </a:rPr>
+              <a:t>,</a:t>
+            </a:r>
+            <a:br/>
+            <a:r>
+              <a:rPr>
+                <a:solidFill>
+                  <a:srgbClr val="003B4F"/>
+                </a:solidFill>
+                <a:latin typeface="Courier"/>
+              </a:rPr>
+              <a:t>    </a:t>
+            </a:r>
+            <a:r>
+              <a:rPr>
+                <a:solidFill>
+                  <a:srgbClr val="657422"/>
+                </a:solidFill>
+                <a:latin typeface="Courier"/>
+              </a:rPr>
+              <a:t>git_pkgs =</a:t>
+            </a:r>
+            <a:r>
+              <a:rPr>
+                <a:solidFill>
+                  <a:srgbClr val="003B4F"/>
+                </a:solidFill>
+                <a:latin typeface="Courier"/>
+              </a:rPr>
+              <a:t> </a:t>
+            </a:r>
+            <a:r>
+              <a:rPr>
+                <a:solidFill>
+                  <a:srgbClr val="8F5902"/>
+                </a:solidFill>
+                <a:latin typeface="Courier"/>
+              </a:rPr>
+              <a:t>NULL</a:t>
+            </a:r>
+            <a:r>
+              <a:rPr>
+                <a:solidFill>
+                  <a:srgbClr val="003B4F"/>
+                </a:solidFill>
+                <a:latin typeface="Courier"/>
+              </a:rPr>
+              <a:t>,</a:t>
+            </a:r>
+            <a:br/>
+            <a:r>
+              <a:rPr>
+                <a:solidFill>
+                  <a:srgbClr val="003B4F"/>
+                </a:solidFill>
+                <a:latin typeface="Courier"/>
+              </a:rPr>
+              <a:t>    </a:t>
+            </a:r>
+            <a:r>
+              <a:rPr>
+                <a:solidFill>
+                  <a:srgbClr val="657422"/>
+                </a:solidFill>
+                <a:latin typeface="Courier"/>
+              </a:rPr>
+              <a:t>tex_pkgs =</a:t>
+            </a:r>
+            <a:r>
+              <a:rPr>
+                <a:solidFill>
+                  <a:srgbClr val="003B4F"/>
+                </a:solidFill>
+                <a:latin typeface="Courier"/>
+              </a:rPr>
+              <a:t> </a:t>
+            </a:r>
+            <a:r>
+              <a:rPr>
+                <a:solidFill>
+                  <a:srgbClr val="8F5902"/>
+                </a:solidFill>
+                <a:latin typeface="Courier"/>
+              </a:rPr>
+              <a:t>NULL</a:t>
+            </a:r>
+            <a:r>
+              <a:rPr>
+                <a:solidFill>
+                  <a:srgbClr val="003B4F"/>
+                </a:solidFill>
+                <a:latin typeface="Courier"/>
+              </a:rPr>
+              <a:t>,</a:t>
+            </a:r>
+            <a:br/>
+            <a:r>
+              <a:rPr>
+                <a:solidFill>
+                  <a:srgbClr val="003B4F"/>
+                </a:solidFill>
+                <a:latin typeface="Courier"/>
+              </a:rPr>
+              <a:t>    </a:t>
+            </a:r>
+            <a:r>
+              <a:rPr>
+                <a:solidFill>
+                  <a:srgbClr val="657422"/>
+                </a:solidFill>
+                <a:latin typeface="Courier"/>
+              </a:rPr>
+              <a:t>ide =</a:t>
+            </a:r>
+            <a:r>
+              <a:rPr>
+                <a:solidFill>
+                  <a:srgbClr val="003B4F"/>
+                </a:solidFill>
+                <a:latin typeface="Courier"/>
+              </a:rPr>
+              <a:t> </a:t>
             </a:r>
             <a:r>
               <a:rPr>
@@ -4486,7 +4281,7 @@
                 </a:solidFill>
                 <a:latin typeface="Courier"/>
               </a:rPr>
-              <a:t>"ggplot2"</a:t>
+              <a:t>"rstudio"</a:t>
             </a:r>
             <a:r>
               <a:rPr>
@@ -4495,7 +4290,35 @@
                 </a:solidFill>
                 <a:latin typeface="Courier"/>
               </a:rPr>
-              <a:t>, </a:t>
+              <a:t>,</a:t>
+            </a:r>
+            <a:br/>
+            <a:r>
+              <a:rPr>
+                <a:solidFill>
+                  <a:srgbClr val="003B4F"/>
+                </a:solidFill>
+                <a:latin typeface="Courier"/>
+              </a:rPr>
+              <a:t>    </a:t>
+            </a:r>
+            <a:r>
+              <a:rPr>
+                <a:solidFill>
+                  <a:srgbClr val="657422"/>
+                </a:solidFill>
+                <a:latin typeface="Courier"/>
+              </a:rPr>
+              <a:t>project_path =</a:t>
+            </a:r>
+            <a:r>
+              <a:rPr>
+                <a:solidFill>
+                  <a:srgbClr val="003B4F"/>
+                </a:solidFill>
+                <a:latin typeface="Courier"/>
+              </a:rPr>
+              <a:t> </a:t>
             </a:r>
             <a:r>
               <a:rPr>
@@ -4504,7 +4327,7 @@
                 </a:solidFill>
                 <a:latin typeface="Courier"/>
               </a:rPr>
-              <a:t>"languageserver"</a:t>
+              <a:t>"."</a:t>
             </a:r>
             <a:r>
               <a:rPr>
@@ -4513,355 +4336,7 @@
                 </a:solidFill>
                 <a:latin typeface="Courier"/>
               </a:rPr>
-              <a:t>),</a:t>
-            </a:r>
-            <a:br/>
-            <a:r>
-              <a:rPr>
-                <a:solidFill>
-                  <a:srgbClr val="003B4F"/>
-                </a:solidFill>
-                <a:latin typeface="Courier"/>
-              </a:rPr>
-              <a:t>    </a:t>
-            </a:r>
-            <a:r>
-              <a:rPr>
-                <a:solidFill>
-                  <a:srgbClr val="657422"/>
-                </a:solidFill>
-                <a:latin typeface="Courier"/>
-              </a:rPr>
-              <a:t>py_conf =</a:t>
-            </a:r>
-            <a:r>
-              <a:rPr>
-                <a:solidFill>
-                  <a:srgbClr val="003B4F"/>
-                </a:solidFill>
-                <a:latin typeface="Courier"/>
-              </a:rPr>
-              <a:t> </a:t>
-            </a:r>
-            <a:r>
-              <a:rPr>
-                <a:solidFill>
-                  <a:srgbClr val="4758AB"/>
-                </a:solidFill>
-                <a:latin typeface="Courier"/>
-              </a:rPr>
-              <a:t>list</a:t>
-            </a:r>
-            <a:r>
-              <a:rPr>
-                <a:solidFill>
-                  <a:srgbClr val="003B4F"/>
-                </a:solidFill>
-                <a:latin typeface="Courier"/>
-              </a:rPr>
-              <a:t>(</a:t>
-            </a:r>
-            <a:br/>
-            <a:r>
-              <a:rPr>
-                <a:solidFill>
-                  <a:srgbClr val="003B4F"/>
-                </a:solidFill>
-                <a:latin typeface="Courier"/>
-              </a:rPr>
-              <a:t>      </a:t>
-            </a:r>
-            <a:r>
-              <a:rPr>
-                <a:solidFill>
-                  <a:srgbClr val="657422"/>
-                </a:solidFill>
-                <a:latin typeface="Courier"/>
-              </a:rPr>
-              <a:t>py_version =</a:t>
-            </a:r>
-            <a:r>
-              <a:rPr>
-                <a:solidFill>
-                  <a:srgbClr val="003B4F"/>
-                </a:solidFill>
-                <a:latin typeface="Courier"/>
-              </a:rPr>
-              <a:t> </a:t>
-            </a:r>
-            <a:r>
-              <a:rPr>
-                <a:solidFill>
-                  <a:srgbClr val="20794D"/>
-                </a:solidFill>
-                <a:latin typeface="Courier"/>
-              </a:rPr>
-              <a:t>"3.13"</a:t>
-            </a:r>
-            <a:r>
-              <a:rPr>
-                <a:solidFill>
-                  <a:srgbClr val="003B4F"/>
-                </a:solidFill>
-                <a:latin typeface="Courier"/>
-              </a:rPr>
-              <a:t>, </a:t>
-            </a:r>
-            <a:br/>
-            <a:r>
-              <a:rPr>
-                <a:solidFill>
-                  <a:srgbClr val="003B4F"/>
-                </a:solidFill>
-                <a:latin typeface="Courier"/>
-              </a:rPr>
-              <a:t>      </a:t>
-            </a:r>
-            <a:r>
-              <a:rPr>
-                <a:solidFill>
-                  <a:srgbClr val="657422"/>
-                </a:solidFill>
-                <a:latin typeface="Courier"/>
-              </a:rPr>
-              <a:t>py_pkgs =</a:t>
-            </a:r>
-            <a:r>
-              <a:rPr>
-                <a:solidFill>
-                  <a:srgbClr val="003B4F"/>
-                </a:solidFill>
-                <a:latin typeface="Courier"/>
-              </a:rPr>
-              <a:t> </a:t>
-            </a:r>
-            <a:r>
-              <a:rPr>
-                <a:solidFill>
-                  <a:srgbClr val="4758AB"/>
-                </a:solidFill>
-                <a:latin typeface="Courier"/>
-              </a:rPr>
-              <a:t>c</a:t>
-            </a:r>
-            <a:r>
-              <a:rPr>
-                <a:solidFill>
-                  <a:srgbClr val="003B4F"/>
-                </a:solidFill>
-                <a:latin typeface="Courier"/>
-              </a:rPr>
-              <a:t>(</a:t>
-            </a:r>
-            <a:r>
-              <a:rPr>
-                <a:solidFill>
-                  <a:srgbClr val="20794D"/>
-                </a:solidFill>
-                <a:latin typeface="Courier"/>
-              </a:rPr>
-              <a:t>"polars"</a:t>
-            </a:r>
-            <a:r>
-              <a:rPr>
-                <a:solidFill>
-                  <a:srgbClr val="003B4F"/>
-                </a:solidFill>
-                <a:latin typeface="Courier"/>
-              </a:rPr>
-              <a:t>, </a:t>
-            </a:r>
-            <a:r>
-              <a:rPr>
-                <a:solidFill>
-                  <a:srgbClr val="20794D"/>
-                </a:solidFill>
-                <a:latin typeface="Courier"/>
-              </a:rPr>
-              <a:t>"scikit-learn"</a:t>
-            </a:r>
-            <a:r>
-              <a:rPr>
-                <a:solidFill>
-                  <a:srgbClr val="003B4F"/>
-                </a:solidFill>
-                <a:latin typeface="Courier"/>
-              </a:rPr>
               <a:t>)</a:t>
-            </a:r>
-            <a:br/>
-            <a:r>
-              <a:rPr>
-                <a:solidFill>
-                  <a:srgbClr val="003B4F"/>
-                </a:solidFill>
-                <a:latin typeface="Courier"/>
-              </a:rPr>
-              <a:t>    ),</a:t>
-            </a:r>
-            <a:br/>
-            <a:r>
-              <a:rPr>
-                <a:solidFill>
-                  <a:srgbClr val="003B4F"/>
-                </a:solidFill>
-                <a:latin typeface="Courier"/>
-              </a:rPr>
-              <a:t>    </a:t>
-            </a:r>
-            <a:r>
-              <a:rPr>
-                <a:solidFill>
-                  <a:srgbClr val="657422"/>
-                </a:solidFill>
-                <a:latin typeface="Courier"/>
-              </a:rPr>
-              <a:t>ide =</a:t>
-            </a:r>
-            <a:r>
-              <a:rPr>
-                <a:solidFill>
-                  <a:srgbClr val="003B4F"/>
-                </a:solidFill>
-                <a:latin typeface="Courier"/>
-              </a:rPr>
-              <a:t> </a:t>
-            </a:r>
-            <a:r>
-              <a:rPr>
-                <a:solidFill>
-                  <a:srgbClr val="20794D"/>
-                </a:solidFill>
-                <a:latin typeface="Courier"/>
-              </a:rPr>
-              <a:t>"none"</a:t>
-            </a:r>
-            <a:r>
-              <a:rPr>
-                <a:solidFill>
-                  <a:srgbClr val="003B4F"/>
-                </a:solidFill>
-                <a:latin typeface="Courier"/>
-              </a:rPr>
-              <a:t>,</a:t>
-            </a:r>
-            <a:br/>
-            <a:r>
-              <a:rPr>
-                <a:solidFill>
-                  <a:srgbClr val="003B4F"/>
-                </a:solidFill>
-                <a:latin typeface="Courier"/>
-              </a:rPr>
-              <a:t>    </a:t>
-            </a:r>
-            <a:r>
-              <a:rPr>
-                <a:solidFill>
-                  <a:srgbClr val="657422"/>
-                </a:solidFill>
-                <a:latin typeface="Courier"/>
-              </a:rPr>
-              <a:t>project_path =</a:t>
-            </a:r>
-            <a:r>
-              <a:rPr>
-                <a:solidFill>
-                  <a:srgbClr val="003B4F"/>
-                </a:solidFill>
-                <a:latin typeface="Courier"/>
-              </a:rPr>
-              <a:t> </a:t>
-            </a:r>
-            <a:r>
-              <a:rPr>
-                <a:solidFill>
-                  <a:srgbClr val="20794D"/>
-                </a:solidFill>
-                <a:latin typeface="Courier"/>
-              </a:rPr>
-              <a:t>"."</a:t>
-            </a:r>
-            <a:r>
-              <a:rPr>
-                <a:solidFill>
-                  <a:srgbClr val="003B4F"/>
-                </a:solidFill>
-                <a:latin typeface="Courier"/>
-              </a:rPr>
-              <a:t>,</a:t>
-            </a:r>
-            <a:br/>
-            <a:r>
-              <a:rPr>
-                <a:solidFill>
-                  <a:srgbClr val="003B4F"/>
-                </a:solidFill>
-                <a:latin typeface="Courier"/>
-              </a:rPr>
-              <a:t>    </a:t>
-            </a:r>
-            <a:r>
-              <a:rPr>
-                <a:solidFill>
-                  <a:srgbClr val="657422"/>
-                </a:solidFill>
-                <a:latin typeface="Courier"/>
-              </a:rPr>
-              <a:t>overwrite =</a:t>
-            </a:r>
-            <a:r>
-              <a:rPr>
-                <a:solidFill>
-                  <a:srgbClr val="003B4F"/>
-                </a:solidFill>
-                <a:latin typeface="Courier"/>
-              </a:rPr>
-              <a:t> </a:t>
-            </a:r>
-            <a:r>
-              <a:rPr>
-                <a:solidFill>
-                  <a:srgbClr val="8F5902"/>
-                </a:solidFill>
-                <a:latin typeface="Courier"/>
-              </a:rPr>
-              <a:t>TRUE</a:t>
-            </a:r>
-            <a:r>
-              <a:rPr>
-                <a:solidFill>
-                  <a:srgbClr val="003B4F"/>
-                </a:solidFill>
-                <a:latin typeface="Courier"/>
-              </a:rPr>
-              <a:t>)</a:t>
-            </a:r>
-          </a:p>
-          <a:p>
-            <a:pPr lvl="0"/>
-            <a:r>
-              <a:rPr/>
-              <a:t>Julia: use </a:t>
-            </a:r>
-            <a:r>
-              <a:rPr>
-                <a:latin typeface="Courier"/>
-              </a:rPr>
-              <a:t>jl_conf = list(jl_version = "1.10", jl_pkgs = c(...))</a:t>
-            </a:r>
-          </a:p>
-          <a:p>
-            <a:pPr lvl="0"/>
-            <a:r>
-              <a:rPr/>
-              <a:t>See: </a:t>
-            </a:r>
-            <a:r>
-              <a:rPr>
-                <a:latin typeface="Courier"/>
-              </a:rPr>
-              <a:t>scripts/nix_expressions/02_native_positron_example/</a:t>
             </a:r>
           </a:p>
         </p:txBody>
@@ -4908,7 +4383,7 @@
             </a:pPr>
             <a:r>
               <a:rPr/>
-              <a:t>Demo</a:t>
+              <a:t>rix: reproducible development environments with Nix (2/2)</a:t>
             </a:r>
           </a:p>
         </p:txBody>
@@ -4930,143 +4405,71 @@
           <a:p>
             <a:pPr lvl="0"/>
             <a:r>
-              <a:rPr/>
-              <a:t>Basics: </a:t>
-            </a:r>
-            <a:r>
-              <a:rPr>
-                <a:latin typeface="Courier"/>
-              </a:rPr>
-              <a:t>scripts/nix_expressions/01_rix_intro/</a:t>
-            </a:r>
-          </a:p>
-          <a:p>
-            <a:pPr lvl="0"/>
-            <a:r>
-              <a:rPr/>
-              <a:t>Native VS Code/Positron on Windows: </a:t>
-            </a:r>
-            <a:r>
-              <a:rPr>
-                <a:latin typeface="Courier"/>
-              </a:rPr>
-              <a:t>scripts/nix_expressions/02_native_positron_example/</a:t>
-            </a:r>
-          </a:p>
-          <a:p>
-            <a:pPr lvl="0"/>
-            <a:r>
-              <a:rPr/>
-              <a:t>Nix and </a:t>
-            </a:r>
-            <a:r>
-              <a:rPr>
-                <a:latin typeface="Courier"/>
-              </a:rPr>
-              <a:t>{targets}</a:t>
-            </a:r>
-            <a:r>
-              <a:rPr/>
-              <a:t>: </a:t>
-            </a:r>
-            <a:r>
-              <a:rPr>
-                <a:latin typeface="Courier"/>
-              </a:rPr>
-              <a:t>scripts/nix_expressions/03_nix_targets_pipeline</a:t>
-            </a:r>
-          </a:p>
-          <a:p>
-            <a:pPr lvl="0"/>
-            <a:r>
-              <a:rPr/>
-              <a:t>Nix and Docker: </a:t>
-            </a:r>
-            <a:r>
-              <a:rPr>
-                <a:latin typeface="Courier"/>
-              </a:rPr>
-              <a:t>scripts/nix_expressions/04_docker/</a:t>
-            </a:r>
-          </a:p>
-          <a:p>
-            <a:pPr lvl="0"/>
-            <a:r>
-              <a:rPr/>
-              <a:t>Nix and </a:t>
-            </a:r>
-            <a:r>
-              <a:rPr>
-                <a:latin typeface="Courier"/>
-              </a:rPr>
-              <a:t>{shiny}</a:t>
-            </a:r>
-            <a:r>
-              <a:rPr/>
-              <a:t>: </a:t>
-            </a:r>
-            <a:r>
-              <a:rPr>
-                <a:latin typeface="Courier"/>
-              </a:rPr>
-              <a:t>scripts/nix_expressions/05_shiny</a:t>
-            </a:r>
-          </a:p>
-          <a:p>
-            <a:pPr lvl="0"/>
-            <a:r>
-              <a:rPr/>
-              <a:t>GitHub Actions: </a:t>
-            </a:r>
-            <a:r>
-              <a:rPr>
-                <a:hlinkClick r:id="rId2"/>
-              </a:rPr>
-              <a:t>see here</a:t>
-            </a:r>
-          </a:p>
-          <a:p>
-            <a:pPr lvl="0"/>
-            <a:r>
-              <a:rPr/>
-              <a:t>Polyglot pipelines with </a:t>
-            </a:r>
-            <a:r>
-              <a:rPr>
-                <a:latin typeface="Courier"/>
-              </a:rPr>
-              <a:t>{rixpress}</a:t>
-            </a:r>
-            <a:r>
-              <a:rPr/>
-              <a:t>: </a:t>
-            </a:r>
-            <a:r>
-              <a:rPr>
-                <a:latin typeface="Courier"/>
-              </a:rPr>
-              <a:t>scripts/rixpress_demo/</a:t>
-            </a:r>
-          </a:p>
-          <a:p>
-            <a:pPr lvl="0"/>
-            <a:r>
-              <a:rPr/>
-              <a:t>Polyglot pipelines with </a:t>
-            </a:r>
-            <a:r>
-              <a:rPr b="1"/>
-              <a:t>T</a:t>
-            </a:r>
-            <a:r>
-              <a:rPr/>
-              <a:t> (bonus): </a:t>
-            </a:r>
-            <a:r>
-              <a:rPr>
-                <a:latin typeface="Courier"/>
-              </a:rPr>
-              <a:t>scripts/t_demo/r_py_xgboost_t/</a:t>
+              <a:rPr>
+                <a:latin typeface="Courier"/>
+              </a:rPr>
+              <a:t>rix::rix()</a:t>
+            </a:r>
+            <a:r>
+              <a:rPr/>
+              <a:t> generates a </a:t>
+            </a:r>
+            <a:r>
+              <a:rPr>
+                <a:latin typeface="Courier"/>
+              </a:rPr>
+              <a:t>default.nix</a:t>
+            </a:r>
+            <a:r>
+              <a:rPr/>
+              <a:t> file</a:t>
+            </a:r>
+          </a:p>
+          <a:p>
+            <a:pPr lvl="0"/>
+            <a:r>
+              <a:rPr/>
+              <a:t>Build the expressions with </a:t>
+            </a:r>
+            <a:r>
+              <a:rPr>
+                <a:latin typeface="Courier"/>
+              </a:rPr>
+              <a:t>nix-build</a:t>
+            </a:r>
+            <a:r>
+              <a:rPr/>
+              <a:t> (in terminal) or </a:t>
+            </a:r>
+            <a:r>
+              <a:rPr>
+                <a:latin typeface="Courier"/>
+              </a:rPr>
+              <a:t>rix::nix_build()</a:t>
+            </a:r>
+            <a:r>
+              <a:rPr/>
+              <a:t> from R</a:t>
+            </a:r>
+          </a:p>
+          <a:p>
+            <a:pPr lvl="0"/>
+            <a:r>
+              <a:rPr/>
+              <a:t>Access the development environment with </a:t>
+            </a:r>
+            <a:r>
+              <a:rPr>
+                <a:latin typeface="Courier"/>
+              </a:rPr>
+              <a:t>nix-shell</a:t>
+            </a:r>
+          </a:p>
+          <a:p>
+            <a:pPr lvl="0"/>
+            <a:r>
+              <a:rPr/>
+              <a:t>Expressions can be generated even without Nix installed (with some limitations)</a:t>
             </a:r>
           </a:p>
         </p:txBody>
@@ -5113,13 +4516,7 @@
             </a:pPr>
             <a:r>
               <a:rPr/>
-              <a:t>Polyglot pipelines with </a:t>
-            </a:r>
-            <a:r>
-              <a:rPr>
-                <a:latin typeface="Courier"/>
-              </a:rPr>
-              <a:t>{rixpress}</a:t>
+              <a:t>Polyglot environments with rix</a:t>
             </a:r>
           </a:p>
         </p:txBody>
@@ -5144,56 +4541,545 @@
               <a:rPr>
                 <a:latin typeface="Courier"/>
               </a:rPr>
-              <a:t>{rixpress}</a:t>
-            </a:r>
-            <a:r>
-              <a:rPr/>
-              <a:t> allows chaining processing steps in R, Python and Julia</a:t>
-            </a:r>
-          </a:p>
-          <a:p>
-            <a:pPr lvl="0"/>
-            <a:r>
-              <a:rPr/>
-              <a:t>Uses </a:t>
-            </a:r>
-            <a:r>
-              <a:rPr>
-                <a:latin typeface="Courier"/>
-              </a:rPr>
-              <a:t>{rix}</a:t>
-            </a:r>
-            <a:r>
-              <a:rPr/>
-              <a:t> to create a reproducible (via Nix) execution environment for the pipeline</a:t>
-            </a:r>
-          </a:p>
-          <a:p>
-            <a:pPr lvl="0"/>
-            <a:r>
-              <a:rPr/>
-              <a:t>Each pipeline step is a </a:t>
-            </a:r>
-            <a:r>
-              <a:rPr b="1"/>
-              <a:t>Nix derivation</a:t>
-            </a:r>
-          </a:p>
-          <a:p>
-            <a:pPr lvl="0"/>
-            <a:r>
-              <a:rPr/>
-              <a:t>Data transfer: automatic via </a:t>
-            </a:r>
-            <a:r>
-              <a:rPr>
-                <a:latin typeface="Courier"/>
-              </a:rPr>
-              <a:t>reticulate</a:t>
-            </a:r>
-            <a:r>
-              <a:rPr/>
-              <a:t> or universal format (JSON)</a:t>
+              <a:t>rix()</a:t>
+            </a:r>
+            <a:r>
+              <a:rPr/>
+              <a:t> supports Python and Julia alongside R:</a:t>
+            </a:r>
+          </a:p>
+          <a:p>
+            <a:pPr lvl="0" indent="0" marL="0">
+              <a:buNone/>
+            </a:pPr>
+            <a:r>
+              <a:rPr/>
+              <a:t>. . .</a:t>
+            </a:r>
+          </a:p>
+          <a:p>
+            <a:pPr lvl="0" indent="0">
+              <a:buNone/>
+            </a:pPr>
+            <a:r>
+              <a:rPr>
+                <a:solidFill>
+                  <a:srgbClr val="4758AB"/>
+                </a:solidFill>
+                <a:latin typeface="Courier"/>
+              </a:rPr>
+              <a:t>rix</a:t>
+            </a:r>
+            <a:r>
+              <a:rPr>
+                <a:solidFill>
+                  <a:srgbClr val="003B4F"/>
+                </a:solidFill>
+                <a:latin typeface="Courier"/>
+              </a:rPr>
+              <a:t>(</a:t>
+            </a:r>
+            <a:r>
+              <a:rPr>
+                <a:solidFill>
+                  <a:srgbClr val="657422"/>
+                </a:solidFill>
+                <a:latin typeface="Courier"/>
+              </a:rPr>
+              <a:t>date =</a:t>
+            </a:r>
+            <a:r>
+              <a:rPr>
+                <a:solidFill>
+                  <a:srgbClr val="003B4F"/>
+                </a:solidFill>
+                <a:latin typeface="Courier"/>
+              </a:rPr>
+              <a:t> </a:t>
+            </a:r>
+            <a:r>
+              <a:rPr>
+                <a:solidFill>
+                  <a:srgbClr val="20794D"/>
+                </a:solidFill>
+                <a:latin typeface="Courier"/>
+              </a:rPr>
+              <a:t>"2026-01-14"</a:t>
+            </a:r>
+            <a:r>
+              <a:rPr>
+                <a:solidFill>
+                  <a:srgbClr val="003B4F"/>
+                </a:solidFill>
+                <a:latin typeface="Courier"/>
+              </a:rPr>
+              <a:t>,</a:t>
+            </a:r>
+            <a:br/>
+            <a:r>
+              <a:rPr>
+                <a:solidFill>
+                  <a:srgbClr val="003B4F"/>
+                </a:solidFill>
+                <a:latin typeface="Courier"/>
+              </a:rPr>
+              <a:t>    </a:t>
+            </a:r>
+            <a:r>
+              <a:rPr>
+                <a:solidFill>
+                  <a:srgbClr val="657422"/>
+                </a:solidFill>
+                <a:latin typeface="Courier"/>
+              </a:rPr>
+              <a:t>r_pkgs =</a:t>
+            </a:r>
+            <a:r>
+              <a:rPr>
+                <a:solidFill>
+                  <a:srgbClr val="003B4F"/>
+                </a:solidFill>
+                <a:latin typeface="Courier"/>
+              </a:rPr>
+              <a:t> </a:t>
+            </a:r>
+            <a:r>
+              <a:rPr>
+                <a:solidFill>
+                  <a:srgbClr val="4758AB"/>
+                </a:solidFill>
+                <a:latin typeface="Courier"/>
+              </a:rPr>
+              <a:t>c</a:t>
+            </a:r>
+            <a:r>
+              <a:rPr>
+                <a:solidFill>
+                  <a:srgbClr val="003B4F"/>
+                </a:solidFill>
+                <a:latin typeface="Courier"/>
+              </a:rPr>
+              <a:t>(</a:t>
+            </a:r>
+            <a:r>
+              <a:rPr>
+                <a:solidFill>
+                  <a:srgbClr val="20794D"/>
+                </a:solidFill>
+                <a:latin typeface="Courier"/>
+              </a:rPr>
+              <a:t>"tidyr"</a:t>
+            </a:r>
+            <a:r>
+              <a:rPr>
+                <a:solidFill>
+                  <a:srgbClr val="003B4F"/>
+                </a:solidFill>
+                <a:latin typeface="Courier"/>
+              </a:rPr>
+              <a:t>, </a:t>
+            </a:r>
+            <a:r>
+              <a:rPr>
+                <a:solidFill>
+                  <a:srgbClr val="20794D"/>
+                </a:solidFill>
+                <a:latin typeface="Courier"/>
+              </a:rPr>
+              <a:t>"dplyr"</a:t>
+            </a:r>
+            <a:r>
+              <a:rPr>
+                <a:solidFill>
+                  <a:srgbClr val="003B4F"/>
+                </a:solidFill>
+                <a:latin typeface="Courier"/>
+              </a:rPr>
+              <a:t>, </a:t>
+            </a:r>
+            <a:r>
+              <a:rPr>
+                <a:solidFill>
+                  <a:srgbClr val="20794D"/>
+                </a:solidFill>
+                <a:latin typeface="Courier"/>
+              </a:rPr>
+              <a:t>"ggplot2"</a:t>
+            </a:r>
+            <a:r>
+              <a:rPr>
+                <a:solidFill>
+                  <a:srgbClr val="003B4F"/>
+                </a:solidFill>
+                <a:latin typeface="Courier"/>
+              </a:rPr>
+              <a:t>, </a:t>
+            </a:r>
+            <a:r>
+              <a:rPr>
+                <a:solidFill>
+                  <a:srgbClr val="20794D"/>
+                </a:solidFill>
+                <a:latin typeface="Courier"/>
+              </a:rPr>
+              <a:t>"languageserver"</a:t>
+            </a:r>
+            <a:r>
+              <a:rPr>
+                <a:solidFill>
+                  <a:srgbClr val="003B4F"/>
+                </a:solidFill>
+                <a:latin typeface="Courier"/>
+              </a:rPr>
+              <a:t>),</a:t>
+            </a:r>
+            <a:br/>
+            <a:r>
+              <a:rPr>
+                <a:solidFill>
+                  <a:srgbClr val="003B4F"/>
+                </a:solidFill>
+                <a:latin typeface="Courier"/>
+              </a:rPr>
+              <a:t>    </a:t>
+            </a:r>
+            <a:r>
+              <a:rPr>
+                <a:solidFill>
+                  <a:srgbClr val="657422"/>
+                </a:solidFill>
+                <a:latin typeface="Courier"/>
+              </a:rPr>
+              <a:t>py_conf =</a:t>
+            </a:r>
+            <a:r>
+              <a:rPr>
+                <a:solidFill>
+                  <a:srgbClr val="003B4F"/>
+                </a:solidFill>
+                <a:latin typeface="Courier"/>
+              </a:rPr>
+              <a:t> </a:t>
+            </a:r>
+            <a:r>
+              <a:rPr>
+                <a:solidFill>
+                  <a:srgbClr val="4758AB"/>
+                </a:solidFill>
+                <a:latin typeface="Courier"/>
+              </a:rPr>
+              <a:t>list</a:t>
+            </a:r>
+            <a:r>
+              <a:rPr>
+                <a:solidFill>
+                  <a:srgbClr val="003B4F"/>
+                </a:solidFill>
+                <a:latin typeface="Courier"/>
+              </a:rPr>
+              <a:t>(</a:t>
+            </a:r>
+            <a:br/>
+            <a:r>
+              <a:rPr>
+                <a:solidFill>
+                  <a:srgbClr val="003B4F"/>
+                </a:solidFill>
+                <a:latin typeface="Courier"/>
+              </a:rPr>
+              <a:t>      </a:t>
+            </a:r>
+            <a:r>
+              <a:rPr>
+                <a:solidFill>
+                  <a:srgbClr val="657422"/>
+                </a:solidFill>
+                <a:latin typeface="Courier"/>
+              </a:rPr>
+              <a:t>py_version =</a:t>
+            </a:r>
+            <a:r>
+              <a:rPr>
+                <a:solidFill>
+                  <a:srgbClr val="003B4F"/>
+                </a:solidFill>
+                <a:latin typeface="Courier"/>
+              </a:rPr>
+              <a:t> </a:t>
+            </a:r>
+            <a:r>
+              <a:rPr>
+                <a:solidFill>
+                  <a:srgbClr val="20794D"/>
+                </a:solidFill>
+                <a:latin typeface="Courier"/>
+              </a:rPr>
+              <a:t>"3.13"</a:t>
+            </a:r>
+            <a:r>
+              <a:rPr>
+                <a:solidFill>
+                  <a:srgbClr val="003B4F"/>
+                </a:solidFill>
+                <a:latin typeface="Courier"/>
+              </a:rPr>
+              <a:t>, </a:t>
+            </a:r>
+            <a:br/>
+            <a:r>
+              <a:rPr>
+                <a:solidFill>
+                  <a:srgbClr val="003B4F"/>
+                </a:solidFill>
+                <a:latin typeface="Courier"/>
+              </a:rPr>
+              <a:t>      </a:t>
+            </a:r>
+            <a:r>
+              <a:rPr>
+                <a:solidFill>
+                  <a:srgbClr val="657422"/>
+                </a:solidFill>
+                <a:latin typeface="Courier"/>
+              </a:rPr>
+              <a:t>py_pkgs =</a:t>
+            </a:r>
+            <a:r>
+              <a:rPr>
+                <a:solidFill>
+                  <a:srgbClr val="003B4F"/>
+                </a:solidFill>
+                <a:latin typeface="Courier"/>
+              </a:rPr>
+              <a:t> </a:t>
+            </a:r>
+            <a:r>
+              <a:rPr>
+                <a:solidFill>
+                  <a:srgbClr val="4758AB"/>
+                </a:solidFill>
+                <a:latin typeface="Courier"/>
+              </a:rPr>
+              <a:t>c</a:t>
+            </a:r>
+            <a:r>
+              <a:rPr>
+                <a:solidFill>
+                  <a:srgbClr val="003B4F"/>
+                </a:solidFill>
+                <a:latin typeface="Courier"/>
+              </a:rPr>
+              <a:t>(</a:t>
+            </a:r>
+            <a:r>
+              <a:rPr>
+                <a:solidFill>
+                  <a:srgbClr val="20794D"/>
+                </a:solidFill>
+                <a:latin typeface="Courier"/>
+              </a:rPr>
+              <a:t>"polars"</a:t>
+            </a:r>
+            <a:r>
+              <a:rPr>
+                <a:solidFill>
+                  <a:srgbClr val="003B4F"/>
+                </a:solidFill>
+                <a:latin typeface="Courier"/>
+              </a:rPr>
+              <a:t>, </a:t>
+            </a:r>
+            <a:r>
+              <a:rPr>
+                <a:solidFill>
+                  <a:srgbClr val="20794D"/>
+                </a:solidFill>
+                <a:latin typeface="Courier"/>
+              </a:rPr>
+              <a:t>"scikit-learn"</a:t>
+            </a:r>
+            <a:r>
+              <a:rPr>
+                <a:solidFill>
+                  <a:srgbClr val="003B4F"/>
+                </a:solidFill>
+                <a:latin typeface="Courier"/>
+              </a:rPr>
+              <a:t>)</a:t>
+            </a:r>
+            <a:br/>
+            <a:r>
+              <a:rPr>
+                <a:solidFill>
+                  <a:srgbClr val="003B4F"/>
+                </a:solidFill>
+                <a:latin typeface="Courier"/>
+              </a:rPr>
+              <a:t>    ),</a:t>
+            </a:r>
+            <a:br/>
+            <a:r>
+              <a:rPr>
+                <a:solidFill>
+                  <a:srgbClr val="003B4F"/>
+                </a:solidFill>
+                <a:latin typeface="Courier"/>
+              </a:rPr>
+              <a:t>    </a:t>
+            </a:r>
+            <a:r>
+              <a:rPr>
+                <a:solidFill>
+                  <a:srgbClr val="657422"/>
+                </a:solidFill>
+                <a:latin typeface="Courier"/>
+              </a:rPr>
+              <a:t>ide =</a:t>
+            </a:r>
+            <a:r>
+              <a:rPr>
+                <a:solidFill>
+                  <a:srgbClr val="003B4F"/>
+                </a:solidFill>
+                <a:latin typeface="Courier"/>
+              </a:rPr>
+              <a:t> </a:t>
+            </a:r>
+            <a:r>
+              <a:rPr>
+                <a:solidFill>
+                  <a:srgbClr val="20794D"/>
+                </a:solidFill>
+                <a:latin typeface="Courier"/>
+              </a:rPr>
+              <a:t>"none"</a:t>
+            </a:r>
+            <a:r>
+              <a:rPr>
+                <a:solidFill>
+                  <a:srgbClr val="003B4F"/>
+                </a:solidFill>
+                <a:latin typeface="Courier"/>
+              </a:rPr>
+              <a:t>,</a:t>
+            </a:r>
+            <a:br/>
+            <a:r>
+              <a:rPr>
+                <a:solidFill>
+                  <a:srgbClr val="003B4F"/>
+                </a:solidFill>
+                <a:latin typeface="Courier"/>
+              </a:rPr>
+              <a:t>    </a:t>
+            </a:r>
+            <a:r>
+              <a:rPr>
+                <a:solidFill>
+                  <a:srgbClr val="657422"/>
+                </a:solidFill>
+                <a:latin typeface="Courier"/>
+              </a:rPr>
+              <a:t>project_path =</a:t>
+            </a:r>
+            <a:r>
+              <a:rPr>
+                <a:solidFill>
+                  <a:srgbClr val="003B4F"/>
+                </a:solidFill>
+                <a:latin typeface="Courier"/>
+              </a:rPr>
+              <a:t> </a:t>
+            </a:r>
+            <a:r>
+              <a:rPr>
+                <a:solidFill>
+                  <a:srgbClr val="20794D"/>
+                </a:solidFill>
+                <a:latin typeface="Courier"/>
+              </a:rPr>
+              <a:t>"."</a:t>
+            </a:r>
+            <a:r>
+              <a:rPr>
+                <a:solidFill>
+                  <a:srgbClr val="003B4F"/>
+                </a:solidFill>
+                <a:latin typeface="Courier"/>
+              </a:rPr>
+              <a:t>,</a:t>
+            </a:r>
+            <a:br/>
+            <a:r>
+              <a:rPr>
+                <a:solidFill>
+                  <a:srgbClr val="003B4F"/>
+                </a:solidFill>
+                <a:latin typeface="Courier"/>
+              </a:rPr>
+              <a:t>    </a:t>
+            </a:r>
+            <a:r>
+              <a:rPr>
+                <a:solidFill>
+                  <a:srgbClr val="657422"/>
+                </a:solidFill>
+                <a:latin typeface="Courier"/>
+              </a:rPr>
+              <a:t>overwrite =</a:t>
+            </a:r>
+            <a:r>
+              <a:rPr>
+                <a:solidFill>
+                  <a:srgbClr val="003B4F"/>
+                </a:solidFill>
+                <a:latin typeface="Courier"/>
+              </a:rPr>
+              <a:t> </a:t>
+            </a:r>
+            <a:r>
+              <a:rPr>
+                <a:solidFill>
+                  <a:srgbClr val="8F5902"/>
+                </a:solidFill>
+                <a:latin typeface="Courier"/>
+              </a:rPr>
+              <a:t>TRUE</a:t>
+            </a:r>
+            <a:r>
+              <a:rPr>
+                <a:solidFill>
+                  <a:srgbClr val="003B4F"/>
+                </a:solidFill>
+                <a:latin typeface="Courier"/>
+              </a:rPr>
+              <a:t>)</a:t>
+            </a:r>
+          </a:p>
+          <a:p>
+            <a:pPr lvl="0"/>
+            <a:r>
+              <a:rPr/>
+              <a:t>Julia: use </a:t>
+            </a:r>
+            <a:r>
+              <a:rPr>
+                <a:latin typeface="Courier"/>
+              </a:rPr>
+              <a:t>jl_conf = list(jl_version = "1.10", jl_pkgs = c(...))</a:t>
+            </a:r>
+          </a:p>
+          <a:p>
+            <a:pPr lvl="0"/>
+            <a:r>
+              <a:rPr/>
+              <a:t>See: </a:t>
+            </a:r>
+            <a:r>
+              <a:rPr>
+                <a:latin typeface="Courier"/>
+              </a:rPr>
+              <a:t>scripts/nix_expressions/02_native_positron_example/</a:t>
             </a:r>
           </a:p>
         </p:txBody>
@@ -5240,7 +5126,7 @@
             </a:pPr>
             <a:r>
               <a:rPr/>
-              <a:t>An example of a polyglot pipeline</a:t>
+              <a:t>Demo</a:t>
             </a:r>
           </a:p>
         </p:txBody>
@@ -5260,422 +5146,145 @@
           <a:bodyPr/>
           <a:lstStyle/>
           <a:p>
-            <a:pPr lvl="0" indent="0">
-              <a:buNone/>
-            </a:pPr>
-            <a:r>
-              <a:rPr>
-                <a:solidFill>
-                  <a:srgbClr val="4758AB"/>
-                </a:solidFill>
-                <a:latin typeface="Courier"/>
-              </a:rPr>
-              <a:t>list</a:t>
-            </a:r>
-            <a:r>
-              <a:rPr>
-                <a:solidFill>
-                  <a:srgbClr val="003B4F"/>
-                </a:solidFill>
-                <a:latin typeface="Courier"/>
-              </a:rPr>
-              <a:t>(</a:t>
-            </a:r>
-            <a:br/>
-            <a:r>
-              <a:rPr>
-                <a:solidFill>
-                  <a:srgbClr val="003B4F"/>
-                </a:solidFill>
-                <a:latin typeface="Courier"/>
-              </a:rPr>
-              <a:t>  </a:t>
-            </a:r>
-            <a:r>
-              <a:rPr>
-                <a:solidFill>
-                  <a:srgbClr val="4758AB"/>
-                </a:solidFill>
-                <a:latin typeface="Courier"/>
-              </a:rPr>
-              <a:t>rxp_py_file</a:t>
-            </a:r>
-            <a:r>
-              <a:rPr>
-                <a:solidFill>
-                  <a:srgbClr val="003B4F"/>
-                </a:solidFill>
-                <a:latin typeface="Courier"/>
-              </a:rPr>
-              <a:t>(…),    </a:t>
-            </a:r>
-            <a:r>
-              <a:rPr>
-                <a:solidFill>
-                  <a:srgbClr val="5E5E5E"/>
-                </a:solidFill>
-                <a:latin typeface="Courier"/>
-              </a:rPr>
-              <a:t># Read a CSV with Python</a:t>
-            </a:r>
-            <a:br/>
-            <a:r>
-              <a:rPr>
-                <a:solidFill>
-                  <a:srgbClr val="003B4F"/>
-                </a:solidFill>
-                <a:latin typeface="Courier"/>
-              </a:rPr>
-              <a:t>  </a:t>
-            </a:r>
-            <a:r>
-              <a:rPr>
-                <a:solidFill>
-                  <a:srgbClr val="4758AB"/>
-                </a:solidFill>
-                <a:latin typeface="Courier"/>
-              </a:rPr>
-              <a:t>rxp_py</a:t>
-            </a:r>
-            <a:r>
-              <a:rPr>
-                <a:solidFill>
-                  <a:srgbClr val="003B4F"/>
-                </a:solidFill>
-                <a:latin typeface="Courier"/>
-              </a:rPr>
-              <a:t>(…),         </a:t>
-            </a:r>
-            <a:r>
-              <a:rPr>
-                <a:solidFill>
-                  <a:srgbClr val="5E5E5E"/>
-                </a:solidFill>
-                <a:latin typeface="Courier"/>
-              </a:rPr>
-              <a:t># Filter with Polars</a:t>
-            </a:r>
-            <a:br/>
-            <a:r>
-              <a:rPr>
-                <a:solidFill>
-                  <a:srgbClr val="003B4F"/>
-                </a:solidFill>
-                <a:latin typeface="Courier"/>
-              </a:rPr>
-              <a:t>  </a:t>
-            </a:r>
-            <a:r>
-              <a:rPr>
-                <a:solidFill>
-                  <a:srgbClr val="4758AB"/>
-                </a:solidFill>
-                <a:latin typeface="Courier"/>
-              </a:rPr>
-              <a:t>rxp_py2r</a:t>
-            </a:r>
-            <a:r>
-              <a:rPr>
-                <a:solidFill>
-                  <a:srgbClr val="003B4F"/>
-                </a:solidFill>
-                <a:latin typeface="Courier"/>
-              </a:rPr>
-              <a:t>(…),       </a:t>
-            </a:r>
-            <a:r>
-              <a:rPr>
-                <a:solidFill>
-                  <a:srgbClr val="5E5E5E"/>
-                </a:solidFill>
-                <a:latin typeface="Courier"/>
-              </a:rPr>
-              <a:t># Python → R transfer</a:t>
-            </a:r>
-            <a:br/>
-            <a:r>
-              <a:rPr>
-                <a:solidFill>
-                  <a:srgbClr val="003B4F"/>
-                </a:solidFill>
-                <a:latin typeface="Courier"/>
-              </a:rPr>
-              <a:t>  </a:t>
-            </a:r>
-            <a:r>
-              <a:rPr>
-                <a:solidFill>
-                  <a:srgbClr val="4758AB"/>
-                </a:solidFill>
-                <a:latin typeface="Courier"/>
-              </a:rPr>
-              <a:t>rxp_r</a:t>
-            </a:r>
-            <a:r>
-              <a:rPr>
-                <a:solidFill>
-                  <a:srgbClr val="003B4F"/>
-                </a:solidFill>
-                <a:latin typeface="Courier"/>
-              </a:rPr>
-              <a:t>(…),          </a:t>
-            </a:r>
-            <a:r>
-              <a:rPr>
-                <a:solidFill>
-                  <a:srgbClr val="5E5E5E"/>
-                </a:solidFill>
-                <a:latin typeface="Courier"/>
-              </a:rPr>
-              <a:t># Transformation in R</a:t>
-            </a:r>
-            <a:br/>
-            <a:r>
-              <a:rPr>
-                <a:solidFill>
-                  <a:srgbClr val="003B4F"/>
-                </a:solidFill>
-                <a:latin typeface="Courier"/>
-              </a:rPr>
-              <a:t>  </a:t>
-            </a:r>
-            <a:r>
-              <a:rPr>
-                <a:solidFill>
-                  <a:srgbClr val="4758AB"/>
-                </a:solidFill>
-                <a:latin typeface="Courier"/>
-              </a:rPr>
-              <a:t>rxp_r2py</a:t>
-            </a:r>
-            <a:r>
-              <a:rPr>
-                <a:solidFill>
-                  <a:srgbClr val="003B4F"/>
-                </a:solidFill>
-                <a:latin typeface="Courier"/>
-              </a:rPr>
-              <a:t>(…),       </a:t>
-            </a:r>
-            <a:r>
-              <a:rPr>
-                <a:solidFill>
-                  <a:srgbClr val="5E5E5E"/>
-                </a:solidFill>
-                <a:latin typeface="Courier"/>
-              </a:rPr>
-              <a:t># R → Python transfer</a:t>
-            </a:r>
-            <a:br/>
-            <a:r>
-              <a:rPr>
-                <a:solidFill>
-                  <a:srgbClr val="003B4F"/>
-                </a:solidFill>
-                <a:latin typeface="Courier"/>
-              </a:rPr>
-              <a:t>  </a:t>
-            </a:r>
-            <a:r>
-              <a:rPr>
-                <a:solidFill>
-                  <a:srgbClr val="4758AB"/>
-                </a:solidFill>
-                <a:latin typeface="Courier"/>
-              </a:rPr>
-              <a:t>rxp_py</a:t>
-            </a:r>
-            <a:r>
-              <a:rPr>
-                <a:solidFill>
-                  <a:srgbClr val="003B4F"/>
-                </a:solidFill>
-                <a:latin typeface="Courier"/>
-              </a:rPr>
-              <a:t>(…),         </a:t>
-            </a:r>
-            <a:r>
-              <a:rPr>
-                <a:solidFill>
-                  <a:srgbClr val="5E5E5E"/>
-                </a:solidFill>
-                <a:latin typeface="Courier"/>
-              </a:rPr>
-              <a:t># Another Python step</a:t>
-            </a:r>
-            <a:br/>
-            <a:r>
-              <a:rPr>
-                <a:solidFill>
-                  <a:srgbClr val="003B4F"/>
-                </a:solidFill>
-                <a:latin typeface="Courier"/>
-              </a:rPr>
-              <a:t>  </a:t>
-            </a:r>
-            <a:r>
-              <a:rPr>
-                <a:solidFill>
-                  <a:srgbClr val="4758AB"/>
-                </a:solidFill>
-                <a:latin typeface="Courier"/>
-              </a:rPr>
-              <a:t>rxp_py2r</a:t>
-            </a:r>
-            <a:r>
-              <a:rPr>
-                <a:solidFill>
-                  <a:srgbClr val="003B4F"/>
-                </a:solidFill>
-                <a:latin typeface="Courier"/>
-              </a:rPr>
-              <a:t>(…),       </a:t>
-            </a:r>
-            <a:r>
-              <a:rPr>
-                <a:solidFill>
-                  <a:srgbClr val="5E5E5E"/>
-                </a:solidFill>
-                <a:latin typeface="Courier"/>
-              </a:rPr>
-              <a:t># Back to R</a:t>
-            </a:r>
-            <a:br/>
-            <a:r>
-              <a:rPr>
-                <a:solidFill>
-                  <a:srgbClr val="003B4F"/>
-                </a:solidFill>
-                <a:latin typeface="Courier"/>
-              </a:rPr>
-              <a:t>  </a:t>
-            </a:r>
-            <a:r>
-              <a:rPr>
-                <a:solidFill>
-                  <a:srgbClr val="4758AB"/>
-                </a:solidFill>
-                <a:latin typeface="Courier"/>
-              </a:rPr>
-              <a:t>rxp_r</a:t>
-            </a:r>
-            <a:r>
-              <a:rPr>
-                <a:solidFill>
-                  <a:srgbClr val="003B4F"/>
-                </a:solidFill>
-                <a:latin typeface="Courier"/>
-              </a:rPr>
-              <a:t>(…)           </a:t>
-            </a:r>
-            <a:r>
-              <a:rPr>
-                <a:solidFill>
-                  <a:srgbClr val="5E5E5E"/>
-                </a:solidFill>
-                <a:latin typeface="Courier"/>
-              </a:rPr>
-              <a:t># Final step</a:t>
-            </a:r>
-            <a:br/>
-            <a:r>
-              <a:rPr>
-                <a:solidFill>
-                  <a:srgbClr val="003B4F"/>
-                </a:solidFill>
-                <a:latin typeface="Courier"/>
-              </a:rPr>
-              <a:t>) </a:t>
-            </a:r>
-            <a:r>
-              <a:rPr>
-                <a:solidFill>
-                  <a:srgbClr val="5E5E5E"/>
-                </a:solidFill>
-                <a:latin typeface="Courier"/>
-              </a:rPr>
-              <a:t>|&gt;</a:t>
-            </a:r>
-            <a:r>
-              <a:rPr>
-                <a:solidFill>
-                  <a:srgbClr val="003B4F"/>
-                </a:solidFill>
-                <a:latin typeface="Courier"/>
-              </a:rPr>
-              <a:t> </a:t>
-            </a:r>
-            <a:r>
-              <a:rPr>
-                <a:solidFill>
-                  <a:srgbClr val="4758AB"/>
-                </a:solidFill>
-                <a:latin typeface="Courier"/>
-              </a:rPr>
-              <a:t>rxp_populate</a:t>
-            </a:r>
-            <a:r>
-              <a:rPr>
-                <a:solidFill>
-                  <a:srgbClr val="003B4F"/>
-                </a:solidFill>
-                <a:latin typeface="Courier"/>
-              </a:rPr>
-              <a:t>()</a:t>
-            </a:r>
-          </a:p>
-          <a:p>
-            <a:pPr lvl="0"/>
-            <a:r>
-              <a:rPr/>
-              <a:t>Each step is named and typed (</a:t>
-            </a:r>
-            <a:r>
-              <a:rPr>
-                <a:latin typeface="Courier"/>
-              </a:rPr>
-              <a:t>py</a:t>
-            </a:r>
-            <a:r>
-              <a:rPr/>
-              <a:t>, </a:t>
-            </a:r>
-            <a:r>
-              <a:rPr>
-                <a:latin typeface="Courier"/>
-              </a:rPr>
-              <a:t>r</a:t>
-            </a:r>
-            <a:r>
-              <a:rPr/>
-              <a:t>, </a:t>
-            </a:r>
-            <a:r>
-              <a:rPr>
-                <a:latin typeface="Courier"/>
-              </a:rPr>
-              <a:t>r2py</a:t>
-            </a:r>
-            <a:r>
-              <a:rPr/>
-              <a:t>, etc.)</a:t>
-            </a:r>
-          </a:p>
-          <a:p>
-            <a:pPr lvl="0"/>
-            <a:r>
-              <a:rPr/>
-              <a:t>Ability to add files (</a:t>
-            </a:r>
-            <a:r>
-              <a:rPr>
-                <a:latin typeface="Courier"/>
-              </a:rPr>
-              <a:t>functions.R</a:t>
-            </a:r>
-            <a:r>
-              <a:rPr/>
-              <a:t>, images…)</a:t>
+            <a:pPr lvl="0"/>
+            <a:r>
+              <a:rPr/>
+              <a:t>Basics: </a:t>
+            </a:r>
+            <a:r>
+              <a:rPr>
+                <a:latin typeface="Courier"/>
+              </a:rPr>
+              <a:t>scripts/nix_expressions/01_rix_intro/</a:t>
+            </a:r>
+          </a:p>
+          <a:p>
+            <a:pPr lvl="0"/>
+            <a:r>
+              <a:rPr/>
+              <a:t>Native VS Code/Positron on Windows: </a:t>
+            </a:r>
+            <a:r>
+              <a:rPr>
+                <a:latin typeface="Courier"/>
+              </a:rPr>
+              <a:t>scripts/nix_expressions/02_native_positron_example/</a:t>
+            </a:r>
+          </a:p>
+          <a:p>
+            <a:pPr lvl="0"/>
+            <a:r>
+              <a:rPr/>
+              <a:t>Nix and </a:t>
+            </a:r>
+            <a:r>
+              <a:rPr>
+                <a:latin typeface="Courier"/>
+              </a:rPr>
+              <a:t>{targets}</a:t>
+            </a:r>
+            <a:r>
+              <a:rPr/>
+              <a:t>: </a:t>
+            </a:r>
+            <a:r>
+              <a:rPr>
+                <a:latin typeface="Courier"/>
+              </a:rPr>
+              <a:t>scripts/nix_expressions/03_nix_targets_pipeline</a:t>
+            </a:r>
+          </a:p>
+          <a:p>
+            <a:pPr lvl="0"/>
+            <a:r>
+              <a:rPr/>
+              <a:t>Nix and Docker: </a:t>
+            </a:r>
+            <a:r>
+              <a:rPr>
+                <a:latin typeface="Courier"/>
+              </a:rPr>
+              <a:t>scripts/nix_expressions/04_docker/</a:t>
+            </a:r>
+          </a:p>
+          <a:p>
+            <a:pPr lvl="0"/>
+            <a:r>
+              <a:rPr/>
+              <a:t>Nix and </a:t>
+            </a:r>
+            <a:r>
+              <a:rPr>
+                <a:latin typeface="Courier"/>
+              </a:rPr>
+              <a:t>{shiny}</a:t>
+            </a:r>
+            <a:r>
+              <a:rPr/>
+              <a:t>: </a:t>
+            </a:r>
+            <a:r>
+              <a:rPr>
+                <a:latin typeface="Courier"/>
+              </a:rPr>
+              <a:t>scripts/nix_expressions/05_shiny</a:t>
+            </a:r>
+          </a:p>
+          <a:p>
+            <a:pPr lvl="0"/>
+            <a:r>
+              <a:rPr/>
+              <a:t>GitHub Actions: </a:t>
+            </a:r>
+            <a:r>
+              <a:rPr>
+                <a:hlinkClick r:id="rId2"/>
+              </a:rPr>
+              <a:t>see here</a:t>
+            </a:r>
+          </a:p>
+          <a:p>
+            <a:pPr lvl="0"/>
+            <a:r>
+              <a:rPr/>
+              <a:t>Polyglot pipelines with </a:t>
+            </a:r>
+            <a:r>
+              <a:rPr>
+                <a:latin typeface="Courier"/>
+              </a:rPr>
+              <a:t>{rixpress}</a:t>
+            </a:r>
+            <a:r>
+              <a:rPr/>
+              <a:t>: </a:t>
+            </a:r>
+            <a:r>
+              <a:rPr>
+                <a:latin typeface="Courier"/>
+              </a:rPr>
+              <a:t>scripts/rixpress_demo/</a:t>
+            </a:r>
+          </a:p>
+          <a:p>
+            <a:pPr lvl="0"/>
+            <a:r>
+              <a:rPr/>
+              <a:t>Polyglot pipelines with </a:t>
+            </a:r>
+            <a:r>
+              <a:rPr b="1"/>
+              <a:t>T</a:t>
+            </a:r>
+            <a:r>
+              <a:rPr/>
+              <a:t> (bonus): </a:t>
+            </a:r>
+            <a:r>
+              <a:rPr>
+                <a:latin typeface="Courier"/>
+              </a:rPr>
+              <a:t>scripts/t_demo/r_py_xgboost_t/</a:t>
             </a:r>
           </a:p>
         </p:txBody>
@@ -5722,7 +5331,13 @@
             </a:pPr>
             <a:r>
               <a:rPr/>
-              <a:t>To learn more about rixpress:</a:t>
+              <a:t>Polyglot pipelines with </a:t>
+            </a:r>
+            <a:r>
+              <a:rPr>
+                <a:latin typeface="Courier"/>
+              </a:rPr>
+              <a:t>{rixpress}</a:t>
             </a:r>
           </a:p>
         </p:txBody>
@@ -5745,40 +5360,58 @@
             <a:pPr lvl="0"/>
             <a:r>
               <a:rPr>
-                <a:hlinkClick r:id="rId2"/>
-              </a:rPr>
-              <a:t>GitHub Repository</a:t>
-            </a:r>
-          </a:p>
-          <a:p>
-            <a:pPr lvl="0"/>
-            <a:r>
-              <a:rPr>
-                <a:hlinkClick r:id="rId3"/>
-              </a:rPr>
-              <a:t>Website</a:t>
-            </a:r>
-          </a:p>
-          <a:p>
-            <a:pPr lvl="0"/>
-            <a:r>
-              <a:rPr>
-                <a:hlinkClick r:id="rId4"/>
-              </a:rPr>
-              <a:t>Repository of demos</a:t>
-            </a:r>
-          </a:p>
-          <a:p>
-            <a:pPr lvl="0"/>
-            <a:r>
-              <a:rPr/>
-              <a:t>Local demo in this repo: </a:t>
-            </a:r>
-            <a:r>
-              <a:rPr>
-                <a:latin typeface="Courier"/>
-              </a:rPr>
-              <a:t>scripts/rixpress_demo/</a:t>
+                <a:latin typeface="Courier"/>
+              </a:rPr>
+              <a:t>{rixpress}</a:t>
+            </a:r>
+            <a:r>
+              <a:rPr/>
+              <a:t> allows chaining processing steps in R, Python and Julia</a:t>
+            </a:r>
+          </a:p>
+          <a:p>
+            <a:pPr lvl="0"/>
+            <a:r>
+              <a:rPr/>
+              <a:t>Uses </a:t>
+            </a:r>
+            <a:r>
+              <a:rPr>
+                <a:latin typeface="Courier"/>
+              </a:rPr>
+              <a:t>{rix}</a:t>
+            </a:r>
+            <a:r>
+              <a:rPr/>
+              <a:t> to create a reproducible (via Nix) execution environment for the pipeline</a:t>
+            </a:r>
+          </a:p>
+          <a:p>
+            <a:pPr lvl="0"/>
+            <a:r>
+              <a:rPr/>
+              <a:t>Each pipeline step is a </a:t>
+            </a:r>
+            <a:r>
+              <a:rPr b="1"/>
+              <a:t>Nix derivation</a:t>
+            </a:r>
+          </a:p>
+          <a:p>
+            <a:pPr lvl="0"/>
+            <a:r>
+              <a:rPr/>
+              <a:t>Data transfer: automatic via </a:t>
+            </a:r>
+            <a:r>
+              <a:rPr>
+                <a:latin typeface="Courier"/>
+              </a:rPr>
+              <a:t>reticulate</a:t>
+            </a:r>
+            <a:r>
+              <a:rPr/>
+              <a:t> or universal format (JSON)</a:t>
             </a:r>
           </a:p>
         </p:txBody>
@@ -5887,12 +5520,7 @@
             <p:ph type="title"/>
           </p:nvPr>
         </p:nvSpPr>
-        <p:spPr>
-          <a:xfrm>
-            <a:off x="722313" y="3305176"/>
-            <a:ext cx="7772400" cy="1021556"/>
-          </a:xfrm>
-        </p:spPr>
+        <p:spPr/>
         <p:txBody>
           <a:bodyPr/>
           <a:lstStyle/>
@@ -5902,7 +5530,442 @@
             </a:pPr>
             <a:r>
               <a:rPr/>
-              <a:t>If time allows…</a:t>
+              <a:t>An example of a polyglot pipeline</a:t>
+            </a:r>
+          </a:p>
+        </p:txBody>
+      </p:sp>
+      <p:sp>
+        <p:nvSpPr>
+          <p:cNvPr id="3" name="Content Placeholder 2"/>
+          <p:cNvSpPr>
+            <a:spLocks noGrp="1"/>
+          </p:cNvSpPr>
+          <p:nvPr>
+            <p:ph idx="1"/>
+          </p:nvPr>
+        </p:nvSpPr>
+        <p:spPr/>
+        <p:txBody>
+          <a:bodyPr/>
+          <a:lstStyle/>
+          <a:p>
+            <a:pPr lvl="0" indent="0">
+              <a:buNone/>
+            </a:pPr>
+            <a:r>
+              <a:rPr>
+                <a:solidFill>
+                  <a:srgbClr val="4758AB"/>
+                </a:solidFill>
+                <a:latin typeface="Courier"/>
+              </a:rPr>
+              <a:t>list</a:t>
+            </a:r>
+            <a:r>
+              <a:rPr>
+                <a:solidFill>
+                  <a:srgbClr val="003B4F"/>
+                </a:solidFill>
+                <a:latin typeface="Courier"/>
+              </a:rPr>
+              <a:t>(</a:t>
+            </a:r>
+            <a:br/>
+            <a:r>
+              <a:rPr>
+                <a:solidFill>
+                  <a:srgbClr val="003B4F"/>
+                </a:solidFill>
+                <a:latin typeface="Courier"/>
+              </a:rPr>
+              <a:t>  </a:t>
+            </a:r>
+            <a:r>
+              <a:rPr>
+                <a:solidFill>
+                  <a:srgbClr val="4758AB"/>
+                </a:solidFill>
+                <a:latin typeface="Courier"/>
+              </a:rPr>
+              <a:t>rxp_py_file</a:t>
+            </a:r>
+            <a:r>
+              <a:rPr>
+                <a:solidFill>
+                  <a:srgbClr val="003B4F"/>
+                </a:solidFill>
+                <a:latin typeface="Courier"/>
+              </a:rPr>
+              <a:t>(…),    </a:t>
+            </a:r>
+            <a:r>
+              <a:rPr>
+                <a:solidFill>
+                  <a:srgbClr val="5E5E5E"/>
+                </a:solidFill>
+                <a:latin typeface="Courier"/>
+              </a:rPr>
+              <a:t># Read a CSV with Python</a:t>
+            </a:r>
+            <a:br/>
+            <a:r>
+              <a:rPr>
+                <a:solidFill>
+                  <a:srgbClr val="003B4F"/>
+                </a:solidFill>
+                <a:latin typeface="Courier"/>
+              </a:rPr>
+              <a:t>  </a:t>
+            </a:r>
+            <a:r>
+              <a:rPr>
+                <a:solidFill>
+                  <a:srgbClr val="4758AB"/>
+                </a:solidFill>
+                <a:latin typeface="Courier"/>
+              </a:rPr>
+              <a:t>rxp_py</a:t>
+            </a:r>
+            <a:r>
+              <a:rPr>
+                <a:solidFill>
+                  <a:srgbClr val="003B4F"/>
+                </a:solidFill>
+                <a:latin typeface="Courier"/>
+              </a:rPr>
+              <a:t>(…),         </a:t>
+            </a:r>
+            <a:r>
+              <a:rPr>
+                <a:solidFill>
+                  <a:srgbClr val="5E5E5E"/>
+                </a:solidFill>
+                <a:latin typeface="Courier"/>
+              </a:rPr>
+              <a:t># Filter with Polars</a:t>
+            </a:r>
+            <a:br/>
+            <a:r>
+              <a:rPr>
+                <a:solidFill>
+                  <a:srgbClr val="003B4F"/>
+                </a:solidFill>
+                <a:latin typeface="Courier"/>
+              </a:rPr>
+              <a:t>  </a:t>
+            </a:r>
+            <a:r>
+              <a:rPr>
+                <a:solidFill>
+                  <a:srgbClr val="4758AB"/>
+                </a:solidFill>
+                <a:latin typeface="Courier"/>
+              </a:rPr>
+              <a:t>rxp_py2r</a:t>
+            </a:r>
+            <a:r>
+              <a:rPr>
+                <a:solidFill>
+                  <a:srgbClr val="003B4F"/>
+                </a:solidFill>
+                <a:latin typeface="Courier"/>
+              </a:rPr>
+              <a:t>(…),       </a:t>
+            </a:r>
+            <a:r>
+              <a:rPr>
+                <a:solidFill>
+                  <a:srgbClr val="5E5E5E"/>
+                </a:solidFill>
+                <a:latin typeface="Courier"/>
+              </a:rPr>
+              <a:t># Python → R transfer</a:t>
+            </a:r>
+            <a:br/>
+            <a:r>
+              <a:rPr>
+                <a:solidFill>
+                  <a:srgbClr val="003B4F"/>
+                </a:solidFill>
+                <a:latin typeface="Courier"/>
+              </a:rPr>
+              <a:t>  </a:t>
+            </a:r>
+            <a:r>
+              <a:rPr>
+                <a:solidFill>
+                  <a:srgbClr val="4758AB"/>
+                </a:solidFill>
+                <a:latin typeface="Courier"/>
+              </a:rPr>
+              <a:t>rxp_r</a:t>
+            </a:r>
+            <a:r>
+              <a:rPr>
+                <a:solidFill>
+                  <a:srgbClr val="003B4F"/>
+                </a:solidFill>
+                <a:latin typeface="Courier"/>
+              </a:rPr>
+              <a:t>(…),          </a:t>
+            </a:r>
+            <a:r>
+              <a:rPr>
+                <a:solidFill>
+                  <a:srgbClr val="5E5E5E"/>
+                </a:solidFill>
+                <a:latin typeface="Courier"/>
+              </a:rPr>
+              <a:t># Transformation in R</a:t>
+            </a:r>
+            <a:br/>
+            <a:r>
+              <a:rPr>
+                <a:solidFill>
+                  <a:srgbClr val="003B4F"/>
+                </a:solidFill>
+                <a:latin typeface="Courier"/>
+              </a:rPr>
+              <a:t>  </a:t>
+            </a:r>
+            <a:r>
+              <a:rPr>
+                <a:solidFill>
+                  <a:srgbClr val="4758AB"/>
+                </a:solidFill>
+                <a:latin typeface="Courier"/>
+              </a:rPr>
+              <a:t>rxp_r2py</a:t>
+            </a:r>
+            <a:r>
+              <a:rPr>
+                <a:solidFill>
+                  <a:srgbClr val="003B4F"/>
+                </a:solidFill>
+                <a:latin typeface="Courier"/>
+              </a:rPr>
+              <a:t>(…),       </a:t>
+            </a:r>
+            <a:r>
+              <a:rPr>
+                <a:solidFill>
+                  <a:srgbClr val="5E5E5E"/>
+                </a:solidFill>
+                <a:latin typeface="Courier"/>
+              </a:rPr>
+              <a:t># R → Python transfer</a:t>
+            </a:r>
+            <a:br/>
+            <a:r>
+              <a:rPr>
+                <a:solidFill>
+                  <a:srgbClr val="003B4F"/>
+                </a:solidFill>
+                <a:latin typeface="Courier"/>
+              </a:rPr>
+              <a:t>  </a:t>
+            </a:r>
+            <a:r>
+              <a:rPr>
+                <a:solidFill>
+                  <a:srgbClr val="4758AB"/>
+                </a:solidFill>
+                <a:latin typeface="Courier"/>
+              </a:rPr>
+              <a:t>rxp_py</a:t>
+            </a:r>
+            <a:r>
+              <a:rPr>
+                <a:solidFill>
+                  <a:srgbClr val="003B4F"/>
+                </a:solidFill>
+                <a:latin typeface="Courier"/>
+              </a:rPr>
+              <a:t>(…),         </a:t>
+            </a:r>
+            <a:r>
+              <a:rPr>
+                <a:solidFill>
+                  <a:srgbClr val="5E5E5E"/>
+                </a:solidFill>
+                <a:latin typeface="Courier"/>
+              </a:rPr>
+              <a:t># Another Python step</a:t>
+            </a:r>
+            <a:br/>
+            <a:r>
+              <a:rPr>
+                <a:solidFill>
+                  <a:srgbClr val="003B4F"/>
+                </a:solidFill>
+                <a:latin typeface="Courier"/>
+              </a:rPr>
+              <a:t>  </a:t>
+            </a:r>
+            <a:r>
+              <a:rPr>
+                <a:solidFill>
+                  <a:srgbClr val="4758AB"/>
+                </a:solidFill>
+                <a:latin typeface="Courier"/>
+              </a:rPr>
+              <a:t>rxp_py2r</a:t>
+            </a:r>
+            <a:r>
+              <a:rPr>
+                <a:solidFill>
+                  <a:srgbClr val="003B4F"/>
+                </a:solidFill>
+                <a:latin typeface="Courier"/>
+              </a:rPr>
+              <a:t>(…),       </a:t>
+            </a:r>
+            <a:r>
+              <a:rPr>
+                <a:solidFill>
+                  <a:srgbClr val="5E5E5E"/>
+                </a:solidFill>
+                <a:latin typeface="Courier"/>
+              </a:rPr>
+              <a:t># Back to R</a:t>
+            </a:r>
+            <a:br/>
+            <a:r>
+              <a:rPr>
+                <a:solidFill>
+                  <a:srgbClr val="003B4F"/>
+                </a:solidFill>
+                <a:latin typeface="Courier"/>
+              </a:rPr>
+              <a:t>  </a:t>
+            </a:r>
+            <a:r>
+              <a:rPr>
+                <a:solidFill>
+                  <a:srgbClr val="4758AB"/>
+                </a:solidFill>
+                <a:latin typeface="Courier"/>
+              </a:rPr>
+              <a:t>rxp_r</a:t>
+            </a:r>
+            <a:r>
+              <a:rPr>
+                <a:solidFill>
+                  <a:srgbClr val="003B4F"/>
+                </a:solidFill>
+                <a:latin typeface="Courier"/>
+              </a:rPr>
+              <a:t>(…)           </a:t>
+            </a:r>
+            <a:r>
+              <a:rPr>
+                <a:solidFill>
+                  <a:srgbClr val="5E5E5E"/>
+                </a:solidFill>
+                <a:latin typeface="Courier"/>
+              </a:rPr>
+              <a:t># Final step</a:t>
+            </a:r>
+            <a:br/>
+            <a:r>
+              <a:rPr>
+                <a:solidFill>
+                  <a:srgbClr val="003B4F"/>
+                </a:solidFill>
+                <a:latin typeface="Courier"/>
+              </a:rPr>
+              <a:t>) </a:t>
+            </a:r>
+            <a:r>
+              <a:rPr>
+                <a:solidFill>
+                  <a:srgbClr val="5E5E5E"/>
+                </a:solidFill>
+                <a:latin typeface="Courier"/>
+              </a:rPr>
+              <a:t>|&gt;</a:t>
+            </a:r>
+            <a:r>
+              <a:rPr>
+                <a:solidFill>
+                  <a:srgbClr val="003B4F"/>
+                </a:solidFill>
+                <a:latin typeface="Courier"/>
+              </a:rPr>
+              <a:t> </a:t>
+            </a:r>
+            <a:r>
+              <a:rPr>
+                <a:solidFill>
+                  <a:srgbClr val="4758AB"/>
+                </a:solidFill>
+                <a:latin typeface="Courier"/>
+              </a:rPr>
+              <a:t>rxp_populate</a:t>
+            </a:r>
+            <a:r>
+              <a:rPr>
+                <a:solidFill>
+                  <a:srgbClr val="003B4F"/>
+                </a:solidFill>
+                <a:latin typeface="Courier"/>
+              </a:rPr>
+              <a:t>()</a:t>
+            </a:r>
+          </a:p>
+          <a:p>
+            <a:pPr lvl="0"/>
+            <a:r>
+              <a:rPr/>
+              <a:t>Each step is named and typed (</a:t>
+            </a:r>
+            <a:r>
+              <a:rPr>
+                <a:latin typeface="Courier"/>
+              </a:rPr>
+              <a:t>py</a:t>
+            </a:r>
+            <a:r>
+              <a:rPr/>
+              <a:t>, </a:t>
+            </a:r>
+            <a:r>
+              <a:rPr>
+                <a:latin typeface="Courier"/>
+              </a:rPr>
+              <a:t>r</a:t>
+            </a:r>
+            <a:r>
+              <a:rPr/>
+              <a:t>, </a:t>
+            </a:r>
+            <a:r>
+              <a:rPr>
+                <a:latin typeface="Courier"/>
+              </a:rPr>
+              <a:t>r2py</a:t>
+            </a:r>
+            <a:r>
+              <a:rPr/>
+              <a:t>, etc.)</a:t>
+            </a:r>
+          </a:p>
+          <a:p>
+            <a:pPr lvl="0"/>
+            <a:r>
+              <a:rPr/>
+              <a:t>Ability to add files (</a:t>
+            </a:r>
+            <a:r>
+              <a:rPr>
+                <a:latin typeface="Courier"/>
+              </a:rPr>
+              <a:t>functions.R</a:t>
+            </a:r>
+            <a:r>
+              <a:rPr/>
+              <a:t>, images…)</a:t>
             </a:r>
           </a:p>
         </p:txBody>
@@ -5949,7 +6012,7 @@
             </a:pPr>
             <a:r>
               <a:rPr/>
-              <a:t>Bonus: T, a new DSL for polyglot data science</a:t>
+              <a:t>To learn more about rixpress:</a:t>
             </a:r>
           </a:p>
         </p:txBody>
@@ -5971,29 +6034,41 @@
           <a:p>
             <a:pPr lvl="0"/>
             <a:r>
-              <a:rPr/>
-              <a:t>Reproducibility is often an afterthought, with ad-hoc tools</a:t>
-            </a:r>
-          </a:p>
-          <a:p>
-            <a:pPr lvl="0"/>
-            <a:r>
-              <a:rPr/>
-              <a:t>Nix eases the pain, but humans have to play ball! (biggest challenge)</a:t>
-            </a:r>
-          </a:p>
-          <a:p>
-            <a:pPr lvl="0"/>
-            <a:r>
-              <a:rPr/>
-              <a:t>What could a “reproducible by design” language look like?</a:t>
-            </a:r>
-          </a:p>
-          <a:p>
-            <a:pPr lvl="0"/>
-            <a:r>
-              <a:rPr/>
-              <a:t>This is T, a language whose package manager is Nix and pipelines are first-class citizens</a:t>
+              <a:rPr>
+                <a:hlinkClick r:id="rId2"/>
+              </a:rPr>
+              <a:t>GitHub Repository</a:t>
+            </a:r>
+          </a:p>
+          <a:p>
+            <a:pPr lvl="0"/>
+            <a:r>
+              <a:rPr>
+                <a:hlinkClick r:id="rId3"/>
+              </a:rPr>
+              <a:t>Website</a:t>
+            </a:r>
+          </a:p>
+          <a:p>
+            <a:pPr lvl="0"/>
+            <a:r>
+              <a:rPr>
+                <a:hlinkClick r:id="rId4"/>
+              </a:rPr>
+              <a:t>Repository of demos</a:t>
+            </a:r>
+          </a:p>
+          <a:p>
+            <a:pPr lvl="0"/>
+            <a:r>
+              <a:rPr/>
+              <a:t>Local demo in this repo: </a:t>
+            </a:r>
+            <a:r>
+              <a:rPr>
+                <a:latin typeface="Courier"/>
+              </a:rPr>
+              <a:t>scripts/rixpress_demo/</a:t>
             </a:r>
           </a:p>
         </p:txBody>
@@ -6030,7 +6105,12 @@
             <p:ph type="title"/>
           </p:nvPr>
         </p:nvSpPr>
-        <p:spPr/>
+        <p:spPr>
+          <a:xfrm>
+            <a:off x="722313" y="3305176"/>
+            <a:ext cx="7772400" cy="1021556"/>
+          </a:xfrm>
+        </p:spPr>
         <p:txBody>
           <a:bodyPr/>
           <a:lstStyle/>
@@ -6040,85 +6120,7 @@
             </a:pPr>
             <a:r>
               <a:rPr/>
-              <a:t>T is reproducible by design</a:t>
-            </a:r>
-          </a:p>
-        </p:txBody>
-      </p:sp>
-      <p:sp>
-        <p:nvSpPr>
-          <p:cNvPr id="3" name="Content Placeholder 2"/>
-          <p:cNvSpPr>
-            <a:spLocks noGrp="1"/>
-          </p:cNvSpPr>
-          <p:nvPr>
-            <p:ph idx="1"/>
-          </p:nvPr>
-        </p:nvSpPr>
-        <p:spPr/>
-        <p:txBody>
-          <a:bodyPr/>
-          <a:lstStyle/>
-          <a:p>
-            <a:pPr lvl="0"/>
-            <a:r>
-              <a:rPr/>
-              <a:t>A new T project is a Nix project:</a:t>
-            </a:r>
-          </a:p>
-          <a:p>
-            <a:pPr lvl="0" indent="0" marL="0">
-              <a:buNone/>
-            </a:pPr>
-            <a:r>
-              <a:rPr/>
-              <a:t>. . .</a:t>
-            </a:r>
-          </a:p>
-          <a:p>
-            <a:pPr lvl="0" indent="0">
-              <a:buNone/>
-            </a:pPr>
-            <a:r>
-              <a:rPr>
-                <a:solidFill>
-                  <a:srgbClr val="003B4F"/>
-                </a:solidFill>
-                <a:latin typeface="Courier"/>
-              </a:rPr>
-              <a:t>nix shell github:b-rodrigues/tlang</a:t>
-            </a:r>
-          </a:p>
-          <a:p>
-            <a:pPr lvl="0" indent="0" marL="0">
-              <a:buNone/>
-            </a:pPr>
-            <a:r>
-              <a:rPr/>
-              <a:t>. . .</a:t>
-            </a:r>
-          </a:p>
-          <a:p>
-            <a:pPr lvl="0" indent="0">
-              <a:buNone/>
-            </a:pPr>
-            <a:r>
-              <a:rPr>
-                <a:solidFill>
-                  <a:srgbClr val="003B4F"/>
-                </a:solidFill>
-                <a:latin typeface="Courier"/>
-              </a:rPr>
-              <a:t>t init </a:t>
-            </a:r>
-            <a:r>
-              <a:rPr>
-                <a:solidFill>
-                  <a:srgbClr val="657422"/>
-                </a:solidFill>
-                <a:latin typeface="Courier"/>
-              </a:rPr>
-              <a:t>--project</a:t>
+              <a:t>If time allows…</a:t>
             </a:r>
           </a:p>
         </p:txBody>
@@ -6165,7 +6167,7 @@
             </a:pPr>
             <a:r>
               <a:rPr/>
-              <a:t>T is reproducible by design</a:t>
+              <a:t>Bonus: T, a new DSL for polyglot data science</a:t>
             </a:r>
           </a:p>
         </p:txBody>
@@ -6185,24 +6187,31 @@
           <a:bodyPr/>
           <a:lstStyle/>
           <a:p>
-            <a:pPr lvl="0" indent="0">
-              <a:buNone/>
-            </a:pPr>
-            <a:r>
-              <a:rPr>
-                <a:latin typeface="Courier"/>
-              </a:rPr>
-              <a:t>my_analysis/
-├── tproject.toml       # Project configuration and dependencies
-├── flake.nix           # Reproducible environment definition
-├── README.md           # Project overview
-├── AGENTS.md           # Onboarding guide for AI Agents
-├── T-LANGUAGE-REFERENCE.md # Tiered language reference for LLMs (git-ignored)
-├── src/
-│   └── pipeline.t      # Your main analysis script
-├── data/               # Place your raw data files here
-├── outputs/            # Output directory for results
-└── tests/              # Unit tests for your analysis</a:t>
+            <a:pPr lvl="0"/>
+            <a:r>
+              <a:rPr/>
+              <a:t>Reproducibility is often an afterthought, with ad-hoc tools</a:t>
+            </a:r>
+          </a:p>
+          <a:p>
+            <a:pPr lvl="0"/>
+            <a:r>
+              <a:rPr/>
+              <a:t>Nix eases the pain, but humans have to play ball! (biggest challenge)</a:t>
+            </a:r>
+          </a:p>
+          <a:p>
+            <a:pPr lvl="0"/>
+            <a:r>
+              <a:rPr/>
+              <a:t>What could a “reproducible by design” language look like?</a:t>
+            </a:r>
+          </a:p>
+          <a:p>
+            <a:pPr lvl="0"/>
+            <a:r>
+              <a:rPr/>
+              <a:t>This is T, a language whose package manager is Nix and pipelines are first-class citizens</a:t>
             </a:r>
           </a:p>
         </p:txBody>
@@ -6272,69 +6281,62 @@
             <a:pPr lvl="0"/>
             <a:r>
               <a:rPr/>
-              <a:t>Add R, Python or Julia dependencies to </a:t>
-            </a:r>
-            <a:r>
-              <a:rPr>
-                <a:latin typeface="Courier"/>
-              </a:rPr>
-              <a:t>tproject.toml</a:t>
-            </a:r>
-          </a:p>
-          <a:p>
-            <a:pPr lvl="0"/>
-            <a:r>
-              <a:rPr/>
-              <a:t>Run </a:t>
-            </a:r>
-            <a:r>
-              <a:rPr>
-                <a:latin typeface="Courier"/>
-              </a:rPr>
-              <a:t>t update</a:t>
-            </a:r>
-          </a:p>
-          <a:p>
-            <a:pPr lvl="0"/>
-            <a:r>
-              <a:rPr/>
-              <a:t>Exit the temporary shell and run </a:t>
-            </a:r>
-            <a:r>
-              <a:rPr>
-                <a:latin typeface="Courier"/>
-              </a:rPr>
-              <a:t>nix develop</a:t>
-            </a:r>
-          </a:p>
-          <a:p>
-            <a:pPr lvl="0"/>
-            <a:r>
-              <a:rPr/>
-              <a:t>Environment is set up, ready to use!</a:t>
-            </a:r>
-          </a:p>
-          <a:p>
-            <a:pPr lvl="0"/>
-            <a:r>
-              <a:rPr/>
-              <a:t>What pipelines look like: </a:t>
-            </a:r>
-            <a:r>
-              <a:rPr>
-                <a:hlinkClick r:id="rId2"/>
-              </a:rPr>
-              <a:t>GitHub repo</a:t>
-            </a:r>
-            <a:r>
-              <a:rPr/>
-              <a:t> or local demo </a:t>
-            </a:r>
-            <a:r>
-              <a:rPr>
-                <a:latin typeface="Courier"/>
-              </a:rPr>
-              <a:t>scripts/t_demo/r_py_xgboost_t/</a:t>
+              <a:t>A new T project is a Nix project:</a:t>
+            </a:r>
+          </a:p>
+          <a:p>
+            <a:pPr lvl="0" indent="0" marL="0">
+              <a:buNone/>
+            </a:pPr>
+            <a:r>
+              <a:rPr/>
+              <a:t>. . .</a:t>
+            </a:r>
+          </a:p>
+          <a:p>
+            <a:pPr lvl="0" indent="0">
+              <a:buNone/>
+            </a:pPr>
+            <a:r>
+              <a:rPr>
+                <a:solidFill>
+                  <a:srgbClr val="003B4F"/>
+                </a:solidFill>
+                <a:latin typeface="Courier"/>
+              </a:rPr>
+              <a:t>nix shell github:b-rodrigues/tlang</a:t>
+            </a:r>
+          </a:p>
+          <a:p>
+            <a:pPr lvl="0" indent="0" marL="0">
+              <a:buNone/>
+            </a:pPr>
+            <a:r>
+              <a:rPr/>
+              <a:t>. . .</a:t>
+            </a:r>
+          </a:p>
+          <a:p>
+            <a:pPr lvl="0" indent="0">
+              <a:buNone/>
+            </a:pPr>
+            <a:r>
+              <a:rPr>
+                <a:solidFill>
+                  <a:srgbClr val="003B4F"/>
+                </a:solidFill>
+                <a:latin typeface="Courier"/>
+              </a:rPr>
+              <a:t>t init </a:t>
+            </a:r>
+            <a:r>
+              <a:rPr>
+                <a:solidFill>
+                  <a:srgbClr val="657422"/>
+                </a:solidFill>
+                <a:latin typeface="Courier"/>
+              </a:rPr>
+              <a:t>--project</a:t>
             </a:r>
           </a:p>
         </p:txBody>
@@ -6381,7 +6383,7 @@
             </a:pPr>
             <a:r>
               <a:rPr/>
-              <a:t>Learning a new language in 2026?!</a:t>
+              <a:t>T is reproducible by design</a:t>
             </a:r>
           </a:p>
         </p:txBody>
@@ -6401,65 +6403,24 @@
           <a:bodyPr/>
           <a:lstStyle/>
           <a:p>
-            <a:pPr lvl="0"/>
-            <a:r>
-              <a:rPr/>
-              <a:t>Learning a new language just for pipelines? Never!!</a:t>
-            </a:r>
-          </a:p>
-          <a:p>
-            <a:pPr lvl="0"/>
-            <a:r>
-              <a:rPr/>
-              <a:t>T is built to be </a:t>
-            </a:r>
-            <a:r>
-              <a:rPr i="1"/>
-              <a:t>llm-friendly</a:t>
-            </a:r>
-          </a:p>
-          <a:p>
-            <a:pPr lvl="0"/>
-            <a:r>
-              <a:rPr/>
-              <a:t>Projects ship </a:t>
-            </a:r>
-            <a:r>
-              <a:rPr>
-                <a:latin typeface="Courier"/>
-              </a:rPr>
-              <a:t>AGENTS.md</a:t>
-            </a:r>
-            <a:r>
-              <a:rPr/>
-              <a:t>, </a:t>
-            </a:r>
-            <a:r>
-              <a:rPr>
-                <a:latin typeface="Courier"/>
-              </a:rPr>
-              <a:t>T-LANGUAGE-REFERENCE.md</a:t>
-            </a:r>
-            <a:r>
-              <a:rPr/>
-              <a:t> and </a:t>
-            </a:r>
-            <a:r>
-              <a:rPr>
-                <a:latin typeface="Courier"/>
-              </a:rPr>
-              <a:t>src/pipeline.t</a:t>
-            </a:r>
-            <a:r>
-              <a:rPr/>
-              <a:t> itself is a cheatsheet</a:t>
-            </a:r>
-          </a:p>
-          <a:p>
-            <a:pPr lvl="0"/>
-            <a:r>
-              <a:rPr/>
-              <a:t>LLMs should be able to wire your project using T without much issue!</a:t>
+            <a:pPr lvl="0" indent="0">
+              <a:buNone/>
+            </a:pPr>
+            <a:r>
+              <a:rPr>
+                <a:latin typeface="Courier"/>
+              </a:rPr>
+              <a:t>my_analysis/
+├── tproject.toml       # Project configuration and dependencies
+├── flake.nix           # Reproducible environment definition
+├── README.md           # Project overview
+├── AGENTS.md           # Onboarding guide for AI Agents
+├── T-LANGUAGE-REFERENCE.md # Tiered language reference for LLMs (git-ignored)
+├── src/
+│   └── pipeline.t      # Your main analysis script
+├── data/               # Place your raw data files here
+├── outputs/            # Output directory for results
+└── tests/              # Unit tests for your analysis</a:t>
             </a:r>
           </a:p>
         </p:txBody>
@@ -6506,7 +6467,7 @@
             </a:pPr>
             <a:r>
               <a:rPr/>
-              <a:t>Caveat Emptor</a:t>
+              <a:t>T is reproducible by design</a:t>
             </a:r>
           </a:p>
         </p:txBody>
@@ -6529,28 +6490,69 @@
             <a:pPr lvl="0"/>
             <a:r>
               <a:rPr/>
-              <a:t>This is a 100% vibe-coded side-project by yours truly…</a:t>
-            </a:r>
-          </a:p>
-          <a:p>
-            <a:pPr lvl="0"/>
-            <a:r>
-              <a:rPr/>
-              <a:t>…but thoroughly tested (6000+ unit tests and 80+ end-to-end tests)</a:t>
-            </a:r>
-          </a:p>
-          <a:p>
-            <a:pPr lvl="0"/>
-            <a:r>
-              <a:rPr/>
-              <a:t>I wanted to stress-test the idea of a “reproducible by design” language</a:t>
-            </a:r>
-          </a:p>
-          <a:p>
-            <a:pPr lvl="0"/>
-            <a:r>
-              <a:rPr/>
-              <a:t>Challenges: input/output between languages</a:t>
+              <a:t>Add R, Python or Julia dependencies to </a:t>
+            </a:r>
+            <a:r>
+              <a:rPr>
+                <a:latin typeface="Courier"/>
+              </a:rPr>
+              <a:t>tproject.toml</a:t>
+            </a:r>
+          </a:p>
+          <a:p>
+            <a:pPr lvl="0"/>
+            <a:r>
+              <a:rPr/>
+              <a:t>Run </a:t>
+            </a:r>
+            <a:r>
+              <a:rPr>
+                <a:latin typeface="Courier"/>
+              </a:rPr>
+              <a:t>t update</a:t>
+            </a:r>
+          </a:p>
+          <a:p>
+            <a:pPr lvl="0"/>
+            <a:r>
+              <a:rPr/>
+              <a:t>Exit the temporary shell and run </a:t>
+            </a:r>
+            <a:r>
+              <a:rPr>
+                <a:latin typeface="Courier"/>
+              </a:rPr>
+              <a:t>nix develop</a:t>
+            </a:r>
+          </a:p>
+          <a:p>
+            <a:pPr lvl="0"/>
+            <a:r>
+              <a:rPr/>
+              <a:t>Environment is set up, ready to use!</a:t>
+            </a:r>
+          </a:p>
+          <a:p>
+            <a:pPr lvl="0"/>
+            <a:r>
+              <a:rPr/>
+              <a:t>What pipelines look like: </a:t>
+            </a:r>
+            <a:r>
+              <a:rPr>
+                <a:hlinkClick r:id="rId2"/>
+              </a:rPr>
+              <a:t>GitHub repo</a:t>
+            </a:r>
+            <a:r>
+              <a:rPr/>
+              <a:t> or local demo </a:t>
+            </a:r>
+            <a:r>
+              <a:rPr>
+                <a:latin typeface="Courier"/>
+              </a:rPr>
+              <a:t>scripts/t_demo/r_py_xgboost_t/</a:t>
             </a:r>
           </a:p>
         </p:txBody>
@@ -6597,7 +6599,7 @@
             </a:pPr>
             <a:r>
               <a:rPr/>
-              <a:t>How did I build T?</a:t>
+              <a:t>Learning a new language in 2026?!</a:t>
             </a:r>
           </a:p>
         </p:txBody>
@@ -6620,49 +6622,62 @@
             <a:pPr lvl="0"/>
             <a:r>
               <a:rPr/>
-              <a:t>100% LLM generated Ocaml code</a:t>
-            </a:r>
-          </a:p>
-          <a:p>
-            <a:pPr lvl="0"/>
-            <a:r>
-              <a:rPr/>
-              <a:t>Start with a specification doc</a:t>
-            </a:r>
-          </a:p>
-          <a:p>
-            <a:pPr lvl="0"/>
-            <a:r>
-              <a:rPr/>
-              <a:t>Keep brainstorming, refining…</a:t>
-            </a:r>
-          </a:p>
-          <a:p>
-            <a:pPr lvl="0"/>
-            <a:r>
-              <a:rPr/>
-              <a:t>Give the doc to an LLM</a:t>
-            </a:r>
-          </a:p>
-          <a:p>
-            <a:pPr lvl="0"/>
-            <a:r>
-              <a:rPr/>
-              <a:t>Let another LLM review the work</a:t>
-            </a:r>
-          </a:p>
-          <a:p>
-            <a:pPr lvl="0"/>
-            <a:r>
-              <a:rPr/>
-              <a:t>Implement and review tests</a:t>
-            </a:r>
-          </a:p>
-          <a:p>
-            <a:pPr lvl="0"/>
-            <a:r>
-              <a:rPr/>
-              <a:t>Repeat!</a:t>
+              <a:t>Learning a new language just for pipelines? Never!!</a:t>
+            </a:r>
+          </a:p>
+          <a:p>
+            <a:pPr lvl="0"/>
+            <a:r>
+              <a:rPr/>
+              <a:t>T is built to be </a:t>
+            </a:r>
+            <a:r>
+              <a:rPr i="1"/>
+              <a:t>llm-friendly</a:t>
+            </a:r>
+          </a:p>
+          <a:p>
+            <a:pPr lvl="0"/>
+            <a:r>
+              <a:rPr/>
+              <a:t>Projects ship </a:t>
+            </a:r>
+            <a:r>
+              <a:rPr>
+                <a:latin typeface="Courier"/>
+              </a:rPr>
+              <a:t>AGENTS.md</a:t>
+            </a:r>
+            <a:r>
+              <a:rPr/>
+              <a:t>, </a:t>
+            </a:r>
+            <a:r>
+              <a:rPr>
+                <a:latin typeface="Courier"/>
+              </a:rPr>
+              <a:t>T-LANGUAGE-REFERENCE.md</a:t>
+            </a:r>
+            <a:r>
+              <a:rPr/>
+              <a:t> and </a:t>
+            </a:r>
+            <a:r>
+              <a:rPr>
+                <a:latin typeface="Courier"/>
+              </a:rPr>
+              <a:t>src/pipeline.t</a:t>
+            </a:r>
+            <a:r>
+              <a:rPr/>
+              <a:t> itself is a cheatsheet</a:t>
+            </a:r>
+          </a:p>
+          <a:p>
+            <a:pPr lvl="0"/>
+            <a:r>
+              <a:rPr/>
+              <a:t>LLMs should be able to wire your project using T without much issue!</a:t>
             </a:r>
           </a:p>
         </p:txBody>
@@ -6709,7 +6724,7 @@
             </a:pPr>
             <a:r>
               <a:rPr/>
-              <a:t>Fin</a:t>
+              <a:t>Caveat Emptor</a:t>
             </a:r>
           </a:p>
         </p:txBody>
@@ -6729,123 +6744,143 @@
           <a:bodyPr/>
           <a:lstStyle/>
           <a:p>
+            <a:pPr lvl="0"/>
+            <a:r>
+              <a:rPr/>
+              <a:t>This is a 100% vibe-coded side-project by yours truly…</a:t>
+            </a:r>
+          </a:p>
+          <a:p>
+            <a:pPr lvl="0"/>
+            <a:r>
+              <a:rPr/>
+              <a:t>…but thoroughly tested (6000+ unit tests and 80+ end-to-end tests)</a:t>
+            </a:r>
+          </a:p>
+          <a:p>
+            <a:pPr lvl="0"/>
+            <a:r>
+              <a:rPr/>
+              <a:t>I wanted to stress-test the idea of a “reproducible by design” language</a:t>
+            </a:r>
+          </a:p>
+          <a:p>
+            <a:pPr lvl="0"/>
+            <a:r>
+              <a:rPr/>
+              <a:t>Challenges: input/output between languages</a:t>
+            </a:r>
+          </a:p>
+        </p:txBody>
+      </p:sp>
+    </p:spTree>
+  </p:cSld>
+</p:sld>
+</file>
+
+<file path=ppt/slides/slide29.xml><?xml version="1.0" encoding="utf-8"?>
+<p:sld xmlns:a="http://schemas.openxmlformats.org/drawingml/2006/main" xmlns:r="http://schemas.openxmlformats.org/officeDocument/2006/relationships" xmlns:p="http://schemas.openxmlformats.org/presentationml/2006/main">
+  <p:cSld>
+    <p:spTree>
+      <p:nvGrpSpPr>
+        <p:cNvPr id="1" name=""/>
+        <p:cNvGrpSpPr/>
+        <p:nvPr/>
+      </p:nvGrpSpPr>
+      <p:grpSpPr>
+        <a:xfrm>
+          <a:off x="0" y="0"/>
+          <a:ext cx="0" cy="0"/>
+          <a:chOff x="0" y="0"/>
+          <a:chExt cx="0" cy="0"/>
+        </a:xfrm>
+      </p:grpSpPr>
+      <p:sp>
+        <p:nvSpPr>
+          <p:cNvPr id="2" name="Title 1"/>
+          <p:cNvSpPr>
+            <a:spLocks noGrp="1"/>
+          </p:cNvSpPr>
+          <p:nvPr>
+            <p:ph type="title"/>
+          </p:nvPr>
+        </p:nvSpPr>
+        <p:spPr/>
+        <p:txBody>
+          <a:bodyPr/>
+          <a:lstStyle/>
+          <a:p>
             <a:pPr lvl="0" indent="0" marL="0">
               <a:buNone/>
             </a:pPr>
             <a:r>
               <a:rPr/>
-              <a:t>Contact me if you have questions:</a:t>
-            </a:r>
-          </a:p>
-          <a:p>
-            <a:pPr lvl="0"/>
-            <a:r>
-              <a:rPr/>
-              <a:t>bruno@brodrigues.co</a:t>
-            </a:r>
-          </a:p>
-          <a:p>
-            <a:pPr lvl="0"/>
-            <a:r>
-              <a:rPr/>
-              <a:t>Twitter: </a:t>
-            </a:r>
-            <a:r>
-              <a:rPr>
-                <a:hlinkClick r:id="rId2"/>
-              </a:rPr>
-              <a:t>@brodriguesco</a:t>
-            </a:r>
-          </a:p>
-          <a:p>
-            <a:pPr lvl="0"/>
-            <a:r>
-              <a:rPr/>
-              <a:t>Mastodon: </a:t>
-            </a:r>
-            <a:r>
-              <a:rPr>
-                <a:hlinkClick r:id="rId3"/>
-              </a:rPr>
-              <a:t>@brodriguesco@fosstodon.org</a:t>
-            </a:r>
-          </a:p>
-          <a:p>
-            <a:pPr lvl="0"/>
-            <a:r>
-              <a:rPr/>
-              <a:t>Blog: </a:t>
-            </a:r>
-            <a:r>
-              <a:rPr>
-                <a:hlinkClick r:id="rId4"/>
-              </a:rPr>
-              <a:t>www.brodrigues.co</a:t>
-            </a:r>
-          </a:p>
-          <a:p>
-            <a:pPr lvl="0"/>
-            <a:r>
-              <a:rPr/>
-              <a:t>Book: </a:t>
-            </a:r>
-            <a:r>
-              <a:rPr>
-                <a:hlinkClick r:id="rId5"/>
-              </a:rPr>
-              <a:t>www.raps-with-r.dev</a:t>
-            </a:r>
-          </a:p>
-          <a:p>
-            <a:pPr lvl="0"/>
-            <a:r>
-              <a:rPr/>
-              <a:t>rix: </a:t>
-            </a:r>
-            <a:r>
-              <a:rPr>
-                <a:hlinkClick r:id="rId6"/>
-              </a:rPr>
-              <a:t>https://docs.ropensci.org/rix</a:t>
-            </a:r>
-          </a:p>
-          <a:p>
-            <a:pPr lvl="0"/>
-            <a:r>
-              <a:rPr/>
-              <a:t>rixpress: </a:t>
-            </a:r>
-            <a:r>
-              <a:rPr>
-                <a:hlinkClick r:id="rId7"/>
-              </a:rPr>
-              <a:t>https://b-rodrigues.github.io/rixpress/</a:t>
-            </a:r>
-          </a:p>
-          <a:p>
-            <a:pPr lvl="0"/>
-            <a:r>
-              <a:rPr/>
-              <a:t>T: </a:t>
-            </a:r>
-            <a:r>
-              <a:rPr>
-                <a:hlinkClick r:id="rId8"/>
-              </a:rPr>
-              <a:t>https://tstats-project.org/</a:t>
-            </a:r>
-            <a:r>
-              <a:rPr/>
-              <a:t> . . .</a:t>
-            </a:r>
-          </a:p>
-          <a:p>
-            <a:pPr lvl="0" indent="0" marL="0">
-              <a:buNone/>
-            </a:pPr>
-            <a:r>
-              <a:rPr/>
-              <a:t>Thanks!</a:t>
+              <a:t>How did I build T?</a:t>
+            </a:r>
+          </a:p>
+        </p:txBody>
+      </p:sp>
+      <p:sp>
+        <p:nvSpPr>
+          <p:cNvPr id="3" name="Content Placeholder 2"/>
+          <p:cNvSpPr>
+            <a:spLocks noGrp="1"/>
+          </p:cNvSpPr>
+          <p:nvPr>
+            <p:ph idx="1"/>
+          </p:nvPr>
+        </p:nvSpPr>
+        <p:spPr/>
+        <p:txBody>
+          <a:bodyPr/>
+          <a:lstStyle/>
+          <a:p>
+            <a:pPr lvl="0"/>
+            <a:r>
+              <a:rPr/>
+              <a:t>100% LLM generated Ocaml code</a:t>
+            </a:r>
+          </a:p>
+          <a:p>
+            <a:pPr lvl="0"/>
+            <a:r>
+              <a:rPr/>
+              <a:t>Start with a specification doc</a:t>
+            </a:r>
+          </a:p>
+          <a:p>
+            <a:pPr lvl="0"/>
+            <a:r>
+              <a:rPr/>
+              <a:t>Keep brainstorming, refining…</a:t>
+            </a:r>
+          </a:p>
+          <a:p>
+            <a:pPr lvl="0"/>
+            <a:r>
+              <a:rPr/>
+              <a:t>Give the doc to an LLM</a:t>
+            </a:r>
+          </a:p>
+          <a:p>
+            <a:pPr lvl="0"/>
+            <a:r>
+              <a:rPr/>
+              <a:t>Let another LLM review the work</a:t>
+            </a:r>
+          </a:p>
+          <a:p>
+            <a:pPr lvl="0"/>
+            <a:r>
+              <a:rPr/>
+              <a:t>Implement and review tests</a:t>
+            </a:r>
+          </a:p>
+          <a:p>
+            <a:pPr lvl="0"/>
+            <a:r>
+              <a:rPr/>
+              <a:t>Repeat!</a:t>
             </a:r>
           </a:p>
         </p:txBody>
@@ -6927,6 +6962,189 @@
           </a:ln>
         </p:spPr>
       </p:pic>
+    </p:spTree>
+  </p:cSld>
+</p:sld>
+</file>
+
+<file path=ppt/slides/slide30.xml><?xml version="1.0" encoding="utf-8"?>
+<p:sld xmlns:a="http://schemas.openxmlformats.org/drawingml/2006/main" xmlns:r="http://schemas.openxmlformats.org/officeDocument/2006/relationships" xmlns:p="http://schemas.openxmlformats.org/presentationml/2006/main">
+  <p:cSld>
+    <p:spTree>
+      <p:nvGrpSpPr>
+        <p:cNvPr id="1" name=""/>
+        <p:cNvGrpSpPr/>
+        <p:nvPr/>
+      </p:nvGrpSpPr>
+      <p:grpSpPr>
+        <a:xfrm>
+          <a:off x="0" y="0"/>
+          <a:ext cx="0" cy="0"/>
+          <a:chOff x="0" y="0"/>
+          <a:chExt cx="0" cy="0"/>
+        </a:xfrm>
+      </p:grpSpPr>
+      <p:sp>
+        <p:nvSpPr>
+          <p:cNvPr id="2" name="Title 1"/>
+          <p:cNvSpPr>
+            <a:spLocks noGrp="1"/>
+          </p:cNvSpPr>
+          <p:nvPr>
+            <p:ph type="title"/>
+          </p:nvPr>
+        </p:nvSpPr>
+        <p:spPr/>
+        <p:txBody>
+          <a:bodyPr/>
+          <a:lstStyle/>
+          <a:p>
+            <a:pPr lvl="0" indent="0" marL="0">
+              <a:buNone/>
+            </a:pPr>
+            <a:r>
+              <a:rPr/>
+              <a:t>Fin</a:t>
+            </a:r>
+          </a:p>
+        </p:txBody>
+      </p:sp>
+      <p:sp>
+        <p:nvSpPr>
+          <p:cNvPr id="3" name="Content Placeholder 2"/>
+          <p:cNvSpPr>
+            <a:spLocks noGrp="1"/>
+          </p:cNvSpPr>
+          <p:nvPr>
+            <p:ph idx="1"/>
+          </p:nvPr>
+        </p:nvSpPr>
+        <p:spPr/>
+        <p:txBody>
+          <a:bodyPr/>
+          <a:lstStyle/>
+          <a:p>
+            <a:pPr lvl="0" indent="0" marL="0">
+              <a:buNone/>
+            </a:pPr>
+            <a:r>
+              <a:rPr/>
+              <a:t>Contact me if you have questions:</a:t>
+            </a:r>
+          </a:p>
+          <a:p>
+            <a:pPr lvl="0"/>
+            <a:r>
+              <a:rPr/>
+              <a:t>bruno@brodrigues.co</a:t>
+            </a:r>
+          </a:p>
+          <a:p>
+            <a:pPr lvl="0"/>
+            <a:r>
+              <a:rPr/>
+              <a:t>Twitter: </a:t>
+            </a:r>
+            <a:r>
+              <a:rPr>
+                <a:hlinkClick r:id="rId2"/>
+              </a:rPr>
+              <a:t>@brodriguesco</a:t>
+            </a:r>
+          </a:p>
+          <a:p>
+            <a:pPr lvl="0"/>
+            <a:r>
+              <a:rPr/>
+              <a:t>Mastodon: </a:t>
+            </a:r>
+            <a:r>
+              <a:rPr>
+                <a:hlinkClick r:id="rId3"/>
+              </a:rPr>
+              <a:t>@brodriguesco@fosstodon.org</a:t>
+            </a:r>
+          </a:p>
+          <a:p>
+            <a:pPr lvl="0"/>
+            <a:r>
+              <a:rPr/>
+              <a:t>Blog: </a:t>
+            </a:r>
+            <a:r>
+              <a:rPr>
+                <a:hlinkClick r:id="rId4"/>
+              </a:rPr>
+              <a:t>www.brodrigues.co</a:t>
+            </a:r>
+          </a:p>
+          <a:p>
+            <a:pPr lvl="0"/>
+            <a:r>
+              <a:rPr/>
+              <a:t>Book: </a:t>
+            </a:r>
+            <a:r>
+              <a:rPr>
+                <a:hlinkClick r:id="rId5"/>
+              </a:rPr>
+              <a:t>www.raps-with-r.dev</a:t>
+            </a:r>
+          </a:p>
+          <a:p>
+            <a:pPr lvl="0"/>
+            <a:r>
+              <a:rPr/>
+              <a:t>rix: </a:t>
+            </a:r>
+            <a:r>
+              <a:rPr>
+                <a:hlinkClick r:id="rId6"/>
+              </a:rPr>
+              <a:t>https://docs.ropensci.org/rix</a:t>
+            </a:r>
+          </a:p>
+          <a:p>
+            <a:pPr lvl="0"/>
+            <a:r>
+              <a:rPr/>
+              <a:t>rixpress: </a:t>
+            </a:r>
+            <a:r>
+              <a:rPr>
+                <a:hlinkClick r:id="rId7"/>
+              </a:rPr>
+              <a:t>https://b-rodrigues.github.io/rixpress/</a:t>
+            </a:r>
+          </a:p>
+          <a:p>
+            <a:pPr lvl="0"/>
+            <a:r>
+              <a:rPr/>
+              <a:t>T: </a:t>
+            </a:r>
+            <a:r>
+              <a:rPr>
+                <a:hlinkClick r:id="rId8"/>
+              </a:rPr>
+              <a:t>https://tstats-project.org/</a:t>
+            </a:r>
+            <a:r>
+              <a:rPr/>
+              <a:t> . . .</a:t>
+            </a:r>
+          </a:p>
+          <a:p>
+            <a:pPr lvl="0" indent="0" marL="0">
+              <a:buNone/>
+            </a:pPr>
+            <a:r>
+              <a:rPr/>
+              <a:t>Thanks!</a:t>
+            </a:r>
+          </a:p>
+        </p:txBody>
+      </p:sp>
     </p:spTree>
   </p:cSld>
 </p:sld>
@@ -7472,7 +7690,12 @@
             <p:ph type="title"/>
           </p:nvPr>
         </p:nvSpPr>
-        <p:spPr/>
+        <p:spPr>
+          <a:xfrm>
+            <a:off x="457201" y="204787"/>
+            <a:ext cx="3008313" cy="871538"/>
+          </a:xfrm>
+        </p:spPr>
         <p:txBody>
           <a:bodyPr/>
           <a:lstStyle/>
@@ -7489,120 +7712,59 @@
       </p:sp>
       <p:sp>
         <p:nvSpPr>
-          <p:cNvPr id="3" name="Content Placeholder 2"/>
-          <p:cNvSpPr>
-            <a:spLocks noGrp="1"/>
-          </p:cNvSpPr>
-          <p:nvPr>
-            <p:ph idx="1"/>
-          </p:nvPr>
-        </p:nvSpPr>
-        <p:spPr/>
-        <p:txBody>
-          <a:bodyPr/>
-          <a:lstStyle/>
-          <a:p>
-            <a:pPr lvl="0"/>
-            <a:r>
-              <a:rPr/>
-              <a:t>The reproducibility challenge in R (and limits of </a:t>
-            </a:r>
-            <a:r>
-              <a:rPr>
-                <a:latin typeface="Courier"/>
-              </a:rPr>
-              <a:t>{renv}</a:t>
-            </a:r>
-            <a:r>
-              <a:rPr/>
-              <a:t> &amp; Docker)</a:t>
-            </a:r>
-          </a:p>
-          <a:p>
-            <a:pPr lvl="0"/>
-            <a:r>
-              <a:rPr/>
-              <a:t>Introduction to the Nix package manager</a:t>
-            </a:r>
-          </a:p>
-          <a:p>
-            <a:pPr lvl="0"/>
-            <a:r>
-              <a:rPr>
-                <a:latin typeface="Courier"/>
-              </a:rPr>
-              <a:t>{rix}</a:t>
-            </a:r>
-            <a:r>
-              <a:rPr/>
-              <a:t>: generating declarative, reproducible R environments</a:t>
-            </a:r>
-          </a:p>
-          <a:p>
-            <a:pPr lvl="0"/>
-            <a:r>
-              <a:rPr/>
-              <a:t>Interactive workflows (RStudio, Positron, VS Code)</a:t>
-            </a:r>
-          </a:p>
-          <a:p>
-            <a:pPr lvl="0"/>
-            <a:r>
-              <a:rPr/>
-              <a:t>Production pipelines with </a:t>
-            </a:r>
-            <a:r>
-              <a:rPr>
-                <a:latin typeface="Courier"/>
-              </a:rPr>
-              <a:t>{targets}</a:t>
-            </a:r>
-            <a:r>
-              <a:rPr/>
-              <a:t> and Nix</a:t>
-            </a:r>
-          </a:p>
-          <a:p>
-            <a:pPr lvl="0"/>
-            <a:r>
-              <a:rPr/>
-              <a:t>Nix in production: Docker, Shiny, and GitHub Actions</a:t>
-            </a:r>
-          </a:p>
-          <a:p>
-            <a:pPr lvl="0"/>
-            <a:r>
-              <a:rPr/>
-              <a:t>Polyglot pipelines with </a:t>
-            </a:r>
-            <a:r>
-              <a:rPr>
-                <a:latin typeface="Courier"/>
-              </a:rPr>
-              <a:t>{rixpress}</a:t>
-            </a:r>
-          </a:p>
-          <a:p>
-            <a:pPr lvl="0"/>
-            <a:r>
-              <a:rPr b="1"/>
-              <a:t>Bonus (if time allows)</a:t>
-            </a:r>
-            <a:r>
-              <a:rPr/>
-              <a:t>: A peek at </a:t>
-            </a:r>
-            <a:r>
-              <a:rPr b="1"/>
-              <a:t>T</a:t>
-            </a:r>
-            <a:r>
-              <a:rPr/>
-              <a:t>, a language reproducible by design</a:t>
-            </a:r>
-          </a:p>
-        </p:txBody>
-      </p:sp>
+          <p:cNvPr id="4" name="Text Placeholder 3"/>
+          <p:cNvSpPr>
+            <a:spLocks noGrp="1"/>
+          </p:cNvSpPr>
+          <p:nvPr>
+            <p:ph idx="2" sz="half" type="body"/>
+          </p:nvPr>
+        </p:nvSpPr>
+        <p:spPr/>
+        <p:txBody>
+          <a:bodyPr/>
+          <a:lstStyle/>
+          <a:p>
+            <a:pPr lvl="0" indent="0" marL="0">
+              <a:buNone/>
+            </a:pPr>
+            <a:r>
+              <a:rPr/>
+              <a:t>The puzzle you know:</a:t>
+            </a:r>
+          </a:p>
+        </p:txBody>
+      </p:sp>
+      <p:pic>
+        <p:nvPicPr>
+          <p:cNvPr descr="img/repro_puzzle.png" id="0" name="Picture 1"/>
+          <p:cNvPicPr>
+            <a:picLocks noGrp="1" noChangeAspect="1"/>
+          </p:cNvPicPr>
+          <p:nvPr/>
+        </p:nvPicPr>
+        <p:blipFill>
+          <a:blip r:embed="rId2"/>
+          <a:stretch>
+            <a:fillRect/>
+          </a:stretch>
+        </p:blipFill>
+        <p:spPr bwMode="auto">
+          <a:xfrm>
+            <a:off x="3924300" y="203200"/>
+            <a:ext cx="4394200" cy="4381500"/>
+          </a:xfrm>
+          <a:prstGeom prst="rect">
+            <a:avLst/>
+          </a:prstGeom>
+          <a:noFill/>
+          <a:ln w="9525">
+            <a:noFill/>
+            <a:headEnd/>
+            <a:tailEnd/>
+          </a:ln>
+        </p:spPr>
+      </p:pic>
     </p:spTree>
   </p:cSld>
 </p:sld>

--- a/docs/index.pptx
+++ b/docs/index.pptx
@@ -3303,8 +3303,8 @@
         </p:blipFill>
         <p:spPr bwMode="auto">
           <a:xfrm>
-            <a:off x="3924300" y="203200"/>
-            <a:ext cx="4394200" cy="4381500"/>
+            <a:off x="3568700" y="571500"/>
+            <a:ext cx="5105400" cy="3657600"/>
           </a:xfrm>
           <a:prstGeom prst="rect">
             <a:avLst/>
@@ -7751,8 +7751,8 @@
         </p:blipFill>
         <p:spPr bwMode="auto">
           <a:xfrm>
-            <a:off x="3924300" y="203200"/>
-            <a:ext cx="4394200" cy="4381500"/>
+            <a:off x="3568700" y="571500"/>
+            <a:ext cx="5105400" cy="3657600"/>
           </a:xfrm>
           <a:prstGeom prst="rect">
             <a:avLst/>

--- a/docs/index.pptx
+++ b/docs/index.pptx
@@ -3833,7 +3833,7 @@
             </a:pPr>
             <a:r>
               <a:rPr/>
-              <a:t>fhs vs nix</a:t>
+              <a:t>To ensure reproducibility, Nix installs the whole universe onto your computer</a:t>
             </a:r>
           </a:p>
         </p:txBody>

--- a/docs/index.pptx
+++ b/docs/index.pptx
@@ -35,6 +35,7 @@
     <p:sldId id="283" r:id="rId29"/>
     <p:sldId id="284" r:id="rId30"/>
     <p:sldId id="285" r:id="rId31"/>
+    <p:sldId id="286" r:id="rId32"/>
   </p:sldIdLst>
   <p:sldSz cx="9144000" cy="5143500" type="screen16x9"/>
   <p:notesSz cx="6858000" cy="9144000"/>
@@ -3282,14 +3283,14 @@
             </a:pPr>
             <a:r>
               <a:rPr/>
-              <a:t>The puzzle with Nix:</a:t>
+              <a:t>The puzzle you know:</a:t>
             </a:r>
           </a:p>
         </p:txBody>
       </p:sp>
       <p:pic>
         <p:nvPicPr>
-          <p:cNvPr descr="img/repro_puzzle_nix.png" id="0" name="Picture 1"/>
+          <p:cNvPr descr="img/repro_puzzle.png" id="0" name="Picture 1"/>
           <p:cNvPicPr>
             <a:picLocks noGrp="1" noChangeAspect="1"/>
           </p:cNvPicPr>
@@ -3349,7 +3350,12 @@
             <p:ph type="title"/>
           </p:nvPr>
         </p:nvSpPr>
-        <p:spPr/>
+        <p:spPr>
+          <a:xfrm>
+            <a:off x="457201" y="204787"/>
+            <a:ext cx="3008313" cy="871538"/>
+          </a:xfrm>
+        </p:spPr>
         <p:txBody>
           <a:bodyPr/>
           <a:lstStyle/>
@@ -3359,113 +3365,215 @@
             </a:pPr>
             <a:r>
               <a:rPr/>
-              <a:t>Available solutions for R</a:t>
-            </a:r>
-          </a:p>
-        </p:txBody>
-      </p:sp>
-      <p:sp>
-        <p:nvSpPr>
-          <p:cNvPr id="3" name="Content Placeholder 2"/>
-          <p:cNvSpPr>
-            <a:spLocks noGrp="1"/>
-          </p:cNvSpPr>
-          <p:nvPr>
-            <p:ph idx="1"/>
-          </p:nvPr>
-        </p:nvSpPr>
-        <p:spPr/>
-        <p:txBody>
-          <a:bodyPr/>
-          <a:lstStyle/>
-          <a:p>
-            <a:pPr lvl="0"/>
-            <a:r>
-              <a:rPr>
-                <a:latin typeface="Courier"/>
-              </a:rPr>
-              <a:t>{renv}</a:t>
-            </a:r>
-            <a:r>
-              <a:rPr/>
-              <a:t> or </a:t>
-            </a:r>
-            <a:r>
-              <a:rPr>
-                <a:latin typeface="Courier"/>
-              </a:rPr>
-              <a:t>{groundhog}</a:t>
-            </a:r>
-            <a:r>
-              <a:rPr/>
-              <a:t>: simple to use, but:</a:t>
-            </a:r>
-          </a:p>
-          <a:p>
-            <a:pPr lvl="1"/>
-            <a:r>
-              <a:rPr/>
-              <a:t>Doesn’t save the R version</a:t>
-            </a:r>
-          </a:p>
-          <a:p>
-            <a:pPr lvl="1"/>
-            <a:r>
-              <a:rPr/>
-              <a:t>Installing old packages may fail (system dependencies)</a:t>
-            </a:r>
-          </a:p>
-          <a:p>
-            <a:pPr lvl="0"/>
-            <a:r>
-              <a:rPr/>
-              <a:t>Docker goes further:</a:t>
-            </a:r>
-          </a:p>
-          <a:p>
-            <a:pPr lvl="1"/>
-            <a:r>
-              <a:rPr/>
-              <a:t>Manages R </a:t>
-            </a:r>
-            <a:r>
-              <a:rPr i="1"/>
-              <a:t>and</a:t>
-            </a:r>
-            <a:r>
-              <a:rPr/>
-              <a:t> system dependencies</a:t>
-            </a:r>
-          </a:p>
-          <a:p>
-            <a:pPr lvl="1"/>
-            <a:r>
-              <a:rPr/>
-              <a:t>Containers executable anywhere</a:t>
-            </a:r>
-          </a:p>
-          <a:p>
-            <a:pPr lvl="0"/>
-            <a:r>
-              <a:rPr/>
-              <a:t>But:</a:t>
-            </a:r>
-          </a:p>
-          <a:p>
-            <a:pPr lvl="1"/>
-            <a:r>
-              <a:rPr/>
-              <a:t>Not inherently reproducible</a:t>
-            </a:r>
-          </a:p>
-        </p:txBody>
-      </p:sp>
+              <a:t>What I’ll be talking about</a:t>
+            </a:r>
+          </a:p>
+        </p:txBody>
+      </p:sp>
+      <p:sp>
+        <p:nvSpPr>
+          <p:cNvPr id="4" name="Text Placeholder 3"/>
+          <p:cNvSpPr>
+            <a:spLocks noGrp="1"/>
+          </p:cNvSpPr>
+          <p:nvPr>
+            <p:ph idx="2" sz="half" type="body"/>
+          </p:nvPr>
+        </p:nvSpPr>
+        <p:spPr/>
+        <p:txBody>
+          <a:bodyPr/>
+          <a:lstStyle/>
+          <a:p>
+            <a:pPr lvl="0" indent="0" marL="0">
+              <a:buNone/>
+            </a:pPr>
+            <a:r>
+              <a:rPr/>
+              <a:t>The puzzle with Nix:</a:t>
+            </a:r>
+          </a:p>
+        </p:txBody>
+      </p:sp>
+      <p:pic>
+        <p:nvPicPr>
+          <p:cNvPr descr="img/repro_puzzle_nix.png" id="0" name="Picture 1"/>
+          <p:cNvPicPr>
+            <a:picLocks noGrp="1" noChangeAspect="1"/>
+          </p:cNvPicPr>
+          <p:nvPr/>
+        </p:nvPicPr>
+        <p:blipFill>
+          <a:blip r:embed="rId2"/>
+          <a:stretch>
+            <a:fillRect/>
+          </a:stretch>
+        </p:blipFill>
+        <p:spPr bwMode="auto">
+          <a:xfrm>
+            <a:off x="3568700" y="571500"/>
+            <a:ext cx="5105400" cy="3657600"/>
+          </a:xfrm>
+          <a:prstGeom prst="rect">
+            <a:avLst/>
+          </a:prstGeom>
+          <a:noFill/>
+          <a:ln w="9525">
+            <a:noFill/>
+            <a:headEnd/>
+            <a:tailEnd/>
+          </a:ln>
+        </p:spPr>
+      </p:pic>
     </p:spTree>
   </p:cSld>
 </p:sld>
 </file>
 
 <file path=ppt/slides/slide12.xml><?xml version="1.0" encoding="utf-8"?>
+<p:sld xmlns:a="http://schemas.openxmlformats.org/drawingml/2006/main" xmlns:r="http://schemas.openxmlformats.org/officeDocument/2006/relationships" xmlns:p="http://schemas.openxmlformats.org/presentationml/2006/main">
+  <p:cSld>
+    <p:spTree>
+      <p:nvGrpSpPr>
+        <p:cNvPr id="1" name=""/>
+        <p:cNvGrpSpPr/>
+        <p:nvPr/>
+      </p:nvGrpSpPr>
+      <p:grpSpPr>
+        <a:xfrm>
+          <a:off x="0" y="0"/>
+          <a:ext cx="0" cy="0"/>
+          <a:chOff x="0" y="0"/>
+          <a:chExt cx="0" cy="0"/>
+        </a:xfrm>
+      </p:grpSpPr>
+      <p:sp>
+        <p:nvSpPr>
+          <p:cNvPr id="2" name="Title 1"/>
+          <p:cNvSpPr>
+            <a:spLocks noGrp="1"/>
+          </p:cNvSpPr>
+          <p:nvPr>
+            <p:ph type="title"/>
+          </p:nvPr>
+        </p:nvSpPr>
+        <p:spPr/>
+        <p:txBody>
+          <a:bodyPr/>
+          <a:lstStyle/>
+          <a:p>
+            <a:pPr lvl="0" indent="0" marL="0">
+              <a:buNone/>
+            </a:pPr>
+            <a:r>
+              <a:rPr/>
+              <a:t>Available solutions for R</a:t>
+            </a:r>
+          </a:p>
+        </p:txBody>
+      </p:sp>
+      <p:sp>
+        <p:nvSpPr>
+          <p:cNvPr id="3" name="Content Placeholder 2"/>
+          <p:cNvSpPr>
+            <a:spLocks noGrp="1"/>
+          </p:cNvSpPr>
+          <p:nvPr>
+            <p:ph idx="1"/>
+          </p:nvPr>
+        </p:nvSpPr>
+        <p:spPr/>
+        <p:txBody>
+          <a:bodyPr/>
+          <a:lstStyle/>
+          <a:p>
+            <a:pPr lvl="0"/>
+            <a:r>
+              <a:rPr>
+                <a:latin typeface="Courier"/>
+              </a:rPr>
+              <a:t>{renv}</a:t>
+            </a:r>
+            <a:r>
+              <a:rPr/>
+              <a:t> or </a:t>
+            </a:r>
+            <a:r>
+              <a:rPr>
+                <a:latin typeface="Courier"/>
+              </a:rPr>
+              <a:t>{groundhog}</a:t>
+            </a:r>
+            <a:r>
+              <a:rPr/>
+              <a:t>: simple to use, but:</a:t>
+            </a:r>
+          </a:p>
+          <a:p>
+            <a:pPr lvl="1"/>
+            <a:r>
+              <a:rPr/>
+              <a:t>Doesn’t save the R version</a:t>
+            </a:r>
+          </a:p>
+          <a:p>
+            <a:pPr lvl="1"/>
+            <a:r>
+              <a:rPr/>
+              <a:t>Installing old packages may fail (system dependencies)</a:t>
+            </a:r>
+          </a:p>
+          <a:p>
+            <a:pPr lvl="0"/>
+            <a:r>
+              <a:rPr/>
+              <a:t>Docker goes further:</a:t>
+            </a:r>
+          </a:p>
+          <a:p>
+            <a:pPr lvl="1"/>
+            <a:r>
+              <a:rPr/>
+              <a:t>Manages R </a:t>
+            </a:r>
+            <a:r>
+              <a:rPr i="1"/>
+              <a:t>and</a:t>
+            </a:r>
+            <a:r>
+              <a:rPr/>
+              <a:t> system dependencies</a:t>
+            </a:r>
+          </a:p>
+          <a:p>
+            <a:pPr lvl="1"/>
+            <a:r>
+              <a:rPr/>
+              <a:t>Containers executable anywhere</a:t>
+            </a:r>
+          </a:p>
+          <a:p>
+            <a:pPr lvl="0"/>
+            <a:r>
+              <a:rPr/>
+              <a:t>But:</a:t>
+            </a:r>
+          </a:p>
+          <a:p>
+            <a:pPr lvl="1"/>
+            <a:r>
+              <a:rPr/>
+              <a:t>Not inherently reproducible</a:t>
+            </a:r>
+          </a:p>
+        </p:txBody>
+      </p:sp>
+    </p:spTree>
+  </p:cSld>
+</p:sld>
+</file>
+
+<file path=ppt/slides/slide13.xml><?xml version="1.0" encoding="utf-8"?>
 <p:sld xmlns:a="http://schemas.openxmlformats.org/drawingml/2006/main" xmlns:r="http://schemas.openxmlformats.org/officeDocument/2006/relationships" xmlns:p="http://schemas.openxmlformats.org/presentationml/2006/main">
   <p:cSld>
     <p:spTree>
@@ -3635,7 +3743,7 @@
 </p:sld>
 </file>
 
-<file path=ppt/slides/slide13.xml><?xml version="1.0" encoding="utf-8"?>
+<file path=ppt/slides/slide14.xml><?xml version="1.0" encoding="utf-8"?>
 <p:sld xmlns:a="http://schemas.openxmlformats.org/drawingml/2006/main" xmlns:r="http://schemas.openxmlformats.org/officeDocument/2006/relationships" xmlns:p="http://schemas.openxmlformats.org/presentationml/2006/main">
   <p:cSld>
     <p:spTree>
@@ -3734,7 +3842,7 @@
 </p:sld>
 </file>
 
-<file path=ppt/slides/slide14.xml><?xml version="1.0" encoding="utf-8"?>
+<file path=ppt/slides/slide15.xml><?xml version="1.0" encoding="utf-8"?>
 <p:sld xmlns:a="http://schemas.openxmlformats.org/drawingml/2006/main" xmlns:r="http://schemas.openxmlformats.org/officeDocument/2006/relationships" xmlns:p="http://schemas.openxmlformats.org/presentationml/2006/main">
   <p:cSld>
     <p:spTree>
@@ -3843,509 +3951,6 @@
 </p:sld>
 </file>
 
-<file path=ppt/slides/slide15.xml><?xml version="1.0" encoding="utf-8"?>
-<p:sld xmlns:a="http://schemas.openxmlformats.org/drawingml/2006/main" xmlns:r="http://schemas.openxmlformats.org/officeDocument/2006/relationships" xmlns:p="http://schemas.openxmlformats.org/presentationml/2006/main">
-  <p:cSld>
-    <p:spTree>
-      <p:nvGrpSpPr>
-        <p:cNvPr id="1" name=""/>
-        <p:cNvGrpSpPr/>
-        <p:nvPr/>
-      </p:nvGrpSpPr>
-      <p:grpSpPr>
-        <a:xfrm>
-          <a:off x="0" y="0"/>
-          <a:ext cx="0" cy="0"/>
-          <a:chOff x="0" y="0"/>
-          <a:chExt cx="0" cy="0"/>
-        </a:xfrm>
-      </p:grpSpPr>
-      <p:sp>
-        <p:nvSpPr>
-          <p:cNvPr id="2" name="Title 1"/>
-          <p:cNvSpPr>
-            <a:spLocks noGrp="1"/>
-          </p:cNvSpPr>
-          <p:nvPr>
-            <p:ph type="title"/>
-          </p:nvPr>
-        </p:nvSpPr>
-        <p:spPr/>
-        <p:txBody>
-          <a:bodyPr/>
-          <a:lstStyle/>
-          <a:p>
-            <a:pPr lvl="0" indent="0" marL="0">
-              <a:buNone/>
-            </a:pPr>
-            <a:r>
-              <a:rPr/>
-              <a:t>rix: reproducible development environments with Nix (1/2)</a:t>
-            </a:r>
-          </a:p>
-        </p:txBody>
-      </p:sp>
-      <p:sp>
-        <p:nvSpPr>
-          <p:cNvPr id="3" name="Content Placeholder 2"/>
-          <p:cNvSpPr>
-            <a:spLocks noGrp="1"/>
-          </p:cNvSpPr>
-          <p:nvPr>
-            <p:ph idx="1"/>
-          </p:nvPr>
-        </p:nvSpPr>
-        <p:spPr/>
-        <p:txBody>
-          <a:bodyPr/>
-          <a:lstStyle/>
-          <a:p>
-            <a:pPr lvl="0"/>
-            <a:r>
-              <a:rPr>
-                <a:latin typeface="Courier"/>
-              </a:rPr>
-              <a:t>{rix}</a:t>
-            </a:r>
-            <a:r>
-              <a:rPr/>
-              <a:t> (</a:t>
-            </a:r>
-            <a:r>
-              <a:rPr>
-                <a:hlinkClick r:id="rId2"/>
-              </a:rPr>
-              <a:t>website</a:t>
-            </a:r>
-            <a:r>
-              <a:rPr/>
-              <a:t>) simplifies writing Nix expressions!</a:t>
-            </a:r>
-          </a:p>
-          <a:p>
-            <a:pPr lvl="0"/>
-            <a:r>
-              <a:rPr/>
-              <a:t>Just use the provided </a:t>
-            </a:r>
-            <a:r>
-              <a:rPr>
-                <a:latin typeface="Courier"/>
-              </a:rPr>
-              <a:t>rix()</a:t>
-            </a:r>
-            <a:r>
-              <a:rPr/>
-              <a:t> function:</a:t>
-            </a:r>
-          </a:p>
-          <a:p>
-            <a:pPr lvl="0" indent="0" marL="0">
-              <a:buNone/>
-            </a:pPr>
-            <a:r>
-              <a:rPr/>
-              <a:t>. . .</a:t>
-            </a:r>
-          </a:p>
-          <a:p>
-            <a:pPr lvl="0" indent="0">
-              <a:buNone/>
-            </a:pPr>
-            <a:r>
-              <a:rPr>
-                <a:solidFill>
-                  <a:srgbClr val="4758AB"/>
-                </a:solidFill>
-                <a:latin typeface="Courier"/>
-              </a:rPr>
-              <a:t>library</a:t>
-            </a:r>
-            <a:r>
-              <a:rPr>
-                <a:solidFill>
-                  <a:srgbClr val="003B4F"/>
-                </a:solidFill>
-                <a:latin typeface="Courier"/>
-              </a:rPr>
-              <a:t>(rix)</a:t>
-            </a:r>
-            <a:br/>
-            <a:br/>
-            <a:r>
-              <a:rPr>
-                <a:solidFill>
-                  <a:srgbClr val="4758AB"/>
-                </a:solidFill>
-                <a:latin typeface="Courier"/>
-              </a:rPr>
-              <a:t>rix</a:t>
-            </a:r>
-            <a:r>
-              <a:rPr>
-                <a:solidFill>
-                  <a:srgbClr val="003B4F"/>
-                </a:solidFill>
-                <a:latin typeface="Courier"/>
-              </a:rPr>
-              <a:t>(</a:t>
-            </a:r>
-            <a:r>
-              <a:rPr>
-                <a:solidFill>
-                  <a:srgbClr val="657422"/>
-                </a:solidFill>
-                <a:latin typeface="Courier"/>
-              </a:rPr>
-              <a:t>date =</a:t>
-            </a:r>
-            <a:r>
-              <a:rPr>
-                <a:solidFill>
-                  <a:srgbClr val="003B4F"/>
-                </a:solidFill>
-                <a:latin typeface="Courier"/>
-              </a:rPr>
-              <a:t> </a:t>
-            </a:r>
-            <a:r>
-              <a:rPr>
-                <a:solidFill>
-                  <a:srgbClr val="20794D"/>
-                </a:solidFill>
-                <a:latin typeface="Courier"/>
-              </a:rPr>
-              <a:t>"2026-09-23"</a:t>
-            </a:r>
-            <a:r>
-              <a:rPr>
-                <a:solidFill>
-                  <a:srgbClr val="003B4F"/>
-                </a:solidFill>
-                <a:latin typeface="Courier"/>
-              </a:rPr>
-              <a:t>,</a:t>
-            </a:r>
-            <a:br/>
-            <a:r>
-              <a:rPr>
-                <a:solidFill>
-                  <a:srgbClr val="003B4F"/>
-                </a:solidFill>
-                <a:latin typeface="Courier"/>
-              </a:rPr>
-              <a:t>    </a:t>
-            </a:r>
-            <a:r>
-              <a:rPr>
-                <a:solidFill>
-                  <a:srgbClr val="657422"/>
-                </a:solidFill>
-                <a:latin typeface="Courier"/>
-              </a:rPr>
-              <a:t>r_pkgs =</a:t>
-            </a:r>
-            <a:r>
-              <a:rPr>
-                <a:solidFill>
-                  <a:srgbClr val="003B4F"/>
-                </a:solidFill>
-                <a:latin typeface="Courier"/>
-              </a:rPr>
-              <a:t> </a:t>
-            </a:r>
-            <a:r>
-              <a:rPr>
-                <a:solidFill>
-                  <a:srgbClr val="4758AB"/>
-                </a:solidFill>
-                <a:latin typeface="Courier"/>
-              </a:rPr>
-              <a:t>c</a:t>
-            </a:r>
-            <a:r>
-              <a:rPr>
-                <a:solidFill>
-                  <a:srgbClr val="003B4F"/>
-                </a:solidFill>
-                <a:latin typeface="Courier"/>
-              </a:rPr>
-              <a:t>(</a:t>
-            </a:r>
-            <a:r>
-              <a:rPr>
-                <a:solidFill>
-                  <a:srgbClr val="20794D"/>
-                </a:solidFill>
-                <a:latin typeface="Courier"/>
-              </a:rPr>
-              <a:t>"dplyr"</a:t>
-            </a:r>
-            <a:r>
-              <a:rPr>
-                <a:solidFill>
-                  <a:srgbClr val="003B4F"/>
-                </a:solidFill>
-                <a:latin typeface="Courier"/>
-              </a:rPr>
-              <a:t>, </a:t>
-            </a:r>
-            <a:r>
-              <a:rPr>
-                <a:solidFill>
-                  <a:srgbClr val="20794D"/>
-                </a:solidFill>
-                <a:latin typeface="Courier"/>
-              </a:rPr>
-              <a:t>"ggplot2"</a:t>
-            </a:r>
-            <a:r>
-              <a:rPr>
-                <a:solidFill>
-                  <a:srgbClr val="003B4F"/>
-                </a:solidFill>
-                <a:latin typeface="Courier"/>
-              </a:rPr>
-              <a:t>),</a:t>
-            </a:r>
-            <a:br/>
-            <a:r>
-              <a:rPr>
-                <a:solidFill>
-                  <a:srgbClr val="003B4F"/>
-                </a:solidFill>
-                <a:latin typeface="Courier"/>
-              </a:rPr>
-              <a:t>    </a:t>
-            </a:r>
-            <a:r>
-              <a:rPr>
-                <a:solidFill>
-                  <a:srgbClr val="657422"/>
-                </a:solidFill>
-                <a:latin typeface="Courier"/>
-              </a:rPr>
-              <a:t>system_pkgs =</a:t>
-            </a:r>
-            <a:r>
-              <a:rPr>
-                <a:solidFill>
-                  <a:srgbClr val="003B4F"/>
-                </a:solidFill>
-                <a:latin typeface="Courier"/>
-              </a:rPr>
-              <a:t> </a:t>
-            </a:r>
-            <a:r>
-              <a:rPr>
-                <a:solidFill>
-                  <a:srgbClr val="8F5902"/>
-                </a:solidFill>
-                <a:latin typeface="Courier"/>
-              </a:rPr>
-              <a:t>NULL</a:t>
-            </a:r>
-            <a:r>
-              <a:rPr>
-                <a:solidFill>
-                  <a:srgbClr val="003B4F"/>
-                </a:solidFill>
-                <a:latin typeface="Courier"/>
-              </a:rPr>
-              <a:t>,</a:t>
-            </a:r>
-            <a:br/>
-            <a:r>
-              <a:rPr>
-                <a:solidFill>
-                  <a:srgbClr val="003B4F"/>
-                </a:solidFill>
-                <a:latin typeface="Courier"/>
-              </a:rPr>
-              <a:t>    </a:t>
-            </a:r>
-            <a:r>
-              <a:rPr>
-                <a:solidFill>
-                  <a:srgbClr val="657422"/>
-                </a:solidFill>
-                <a:latin typeface="Courier"/>
-              </a:rPr>
-              <a:t>git_pkgs =</a:t>
-            </a:r>
-            <a:r>
-              <a:rPr>
-                <a:solidFill>
-                  <a:srgbClr val="003B4F"/>
-                </a:solidFill>
-                <a:latin typeface="Courier"/>
-              </a:rPr>
-              <a:t> </a:t>
-            </a:r>
-            <a:r>
-              <a:rPr>
-                <a:solidFill>
-                  <a:srgbClr val="8F5902"/>
-                </a:solidFill>
-                <a:latin typeface="Courier"/>
-              </a:rPr>
-              <a:t>NULL</a:t>
-            </a:r>
-            <a:r>
-              <a:rPr>
-                <a:solidFill>
-                  <a:srgbClr val="003B4F"/>
-                </a:solidFill>
-                <a:latin typeface="Courier"/>
-              </a:rPr>
-              <a:t>,</a:t>
-            </a:r>
-            <a:br/>
-            <a:r>
-              <a:rPr>
-                <a:solidFill>
-                  <a:srgbClr val="003B4F"/>
-                </a:solidFill>
-                <a:latin typeface="Courier"/>
-              </a:rPr>
-              <a:t>    </a:t>
-            </a:r>
-            <a:r>
-              <a:rPr>
-                <a:solidFill>
-                  <a:srgbClr val="657422"/>
-                </a:solidFill>
-                <a:latin typeface="Courier"/>
-              </a:rPr>
-              <a:t>tex_pkgs =</a:t>
-            </a:r>
-            <a:r>
-              <a:rPr>
-                <a:solidFill>
-                  <a:srgbClr val="003B4F"/>
-                </a:solidFill>
-                <a:latin typeface="Courier"/>
-              </a:rPr>
-              <a:t> </a:t>
-            </a:r>
-            <a:r>
-              <a:rPr>
-                <a:solidFill>
-                  <a:srgbClr val="8F5902"/>
-                </a:solidFill>
-                <a:latin typeface="Courier"/>
-              </a:rPr>
-              <a:t>NULL</a:t>
-            </a:r>
-            <a:r>
-              <a:rPr>
-                <a:solidFill>
-                  <a:srgbClr val="003B4F"/>
-                </a:solidFill>
-                <a:latin typeface="Courier"/>
-              </a:rPr>
-              <a:t>,</a:t>
-            </a:r>
-            <a:br/>
-            <a:r>
-              <a:rPr>
-                <a:solidFill>
-                  <a:srgbClr val="003B4F"/>
-                </a:solidFill>
-                <a:latin typeface="Courier"/>
-              </a:rPr>
-              <a:t>    </a:t>
-            </a:r>
-            <a:r>
-              <a:rPr>
-                <a:solidFill>
-                  <a:srgbClr val="657422"/>
-                </a:solidFill>
-                <a:latin typeface="Courier"/>
-              </a:rPr>
-              <a:t>ide =</a:t>
-            </a:r>
-            <a:r>
-              <a:rPr>
-                <a:solidFill>
-                  <a:srgbClr val="003B4F"/>
-                </a:solidFill>
-                <a:latin typeface="Courier"/>
-              </a:rPr>
-              <a:t> </a:t>
-            </a:r>
-            <a:r>
-              <a:rPr>
-                <a:solidFill>
-                  <a:srgbClr val="20794D"/>
-                </a:solidFill>
-                <a:latin typeface="Courier"/>
-              </a:rPr>
-              <a:t>"rstudio"</a:t>
-            </a:r>
-            <a:r>
-              <a:rPr>
-                <a:solidFill>
-                  <a:srgbClr val="003B4F"/>
-                </a:solidFill>
-                <a:latin typeface="Courier"/>
-              </a:rPr>
-              <a:t>,</a:t>
-            </a:r>
-            <a:br/>
-            <a:r>
-              <a:rPr>
-                <a:solidFill>
-                  <a:srgbClr val="003B4F"/>
-                </a:solidFill>
-                <a:latin typeface="Courier"/>
-              </a:rPr>
-              <a:t>    </a:t>
-            </a:r>
-            <a:r>
-              <a:rPr>
-                <a:solidFill>
-                  <a:srgbClr val="657422"/>
-                </a:solidFill>
-                <a:latin typeface="Courier"/>
-              </a:rPr>
-              <a:t>project_path =</a:t>
-            </a:r>
-            <a:r>
-              <a:rPr>
-                <a:solidFill>
-                  <a:srgbClr val="003B4F"/>
-                </a:solidFill>
-                <a:latin typeface="Courier"/>
-              </a:rPr>
-              <a:t> </a:t>
-            </a:r>
-            <a:r>
-              <a:rPr>
-                <a:solidFill>
-                  <a:srgbClr val="20794D"/>
-                </a:solidFill>
-                <a:latin typeface="Courier"/>
-              </a:rPr>
-              <a:t>"."</a:t>
-            </a:r>
-            <a:r>
-              <a:rPr>
-                <a:solidFill>
-                  <a:srgbClr val="003B4F"/>
-                </a:solidFill>
-                <a:latin typeface="Courier"/>
-              </a:rPr>
-              <a:t>)</a:t>
-            </a:r>
-          </a:p>
-        </p:txBody>
-      </p:sp>
-    </p:spTree>
-  </p:cSld>
-</p:sld>
-</file>
-
 <file path=ppt/slides/slide16.xml><?xml version="1.0" encoding="utf-8"?>
 <p:sld xmlns:a="http://schemas.openxmlformats.org/drawingml/2006/main" xmlns:r="http://schemas.openxmlformats.org/officeDocument/2006/relationships" xmlns:p="http://schemas.openxmlformats.org/presentationml/2006/main">
   <p:cSld>
@@ -4383,7 +3988,7 @@
             </a:pPr>
             <a:r>
               <a:rPr/>
-              <a:t>rix: reproducible development environments with Nix (2/2)</a:t>
+              <a:t>rix: reproducible development environments with Nix (1/2)</a:t>
             </a:r>
           </a:p>
         </p:txBody>
@@ -4408,68 +4013,438 @@
               <a:rPr>
                 <a:latin typeface="Courier"/>
               </a:rPr>
-              <a:t>rix::rix()</a:t>
-            </a:r>
-            <a:r>
-              <a:rPr/>
-              <a:t> generates a </a:t>
-            </a:r>
-            <a:r>
-              <a:rPr>
-                <a:latin typeface="Courier"/>
-              </a:rPr>
-              <a:t>default.nix</a:t>
-            </a:r>
-            <a:r>
-              <a:rPr/>
-              <a:t> file</a:t>
-            </a:r>
-          </a:p>
-          <a:p>
-            <a:pPr lvl="0"/>
-            <a:r>
-              <a:rPr/>
-              <a:t>Build the expressions with </a:t>
-            </a:r>
-            <a:r>
-              <a:rPr>
-                <a:latin typeface="Courier"/>
-              </a:rPr>
-              <a:t>nix-build</a:t>
-            </a:r>
-            <a:r>
-              <a:rPr/>
-              <a:t> (in terminal) or </a:t>
-            </a:r>
-            <a:r>
-              <a:rPr>
-                <a:latin typeface="Courier"/>
-              </a:rPr>
-              <a:t>rix::nix_build()</a:t>
-            </a:r>
-            <a:r>
-              <a:rPr/>
-              <a:t> from R</a:t>
-            </a:r>
-          </a:p>
-          <a:p>
-            <a:pPr lvl="0"/>
-            <a:r>
-              <a:rPr/>
-              <a:t>Access the development environment with </a:t>
-            </a:r>
-            <a:r>
-              <a:rPr>
-                <a:latin typeface="Courier"/>
-              </a:rPr>
-              <a:t>nix-shell</a:t>
-            </a:r>
-          </a:p>
-          <a:p>
-            <a:pPr lvl="0"/>
-            <a:r>
-              <a:rPr/>
-              <a:t>Expressions can be generated even without Nix installed (with some limitations)</a:t>
+              <a:t>{rix}</a:t>
+            </a:r>
+            <a:r>
+              <a:rPr/>
+              <a:t> (</a:t>
+            </a:r>
+            <a:r>
+              <a:rPr>
+                <a:hlinkClick r:id="rId2"/>
+              </a:rPr>
+              <a:t>website</a:t>
+            </a:r>
+            <a:r>
+              <a:rPr/>
+              <a:t>) simplifies writing Nix expressions!</a:t>
+            </a:r>
+          </a:p>
+          <a:p>
+            <a:pPr lvl="0"/>
+            <a:r>
+              <a:rPr/>
+              <a:t>Just use the provided </a:t>
+            </a:r>
+            <a:r>
+              <a:rPr>
+                <a:latin typeface="Courier"/>
+              </a:rPr>
+              <a:t>rix()</a:t>
+            </a:r>
+            <a:r>
+              <a:rPr/>
+              <a:t> function:</a:t>
+            </a:r>
+          </a:p>
+          <a:p>
+            <a:pPr lvl="0" indent="0" marL="0">
+              <a:buNone/>
+            </a:pPr>
+            <a:r>
+              <a:rPr/>
+              <a:t>. . .</a:t>
+            </a:r>
+          </a:p>
+          <a:p>
+            <a:pPr lvl="0" indent="0">
+              <a:buNone/>
+            </a:pPr>
+            <a:r>
+              <a:rPr>
+                <a:solidFill>
+                  <a:srgbClr val="4758AB"/>
+                </a:solidFill>
+                <a:latin typeface="Courier"/>
+              </a:rPr>
+              <a:t>library</a:t>
+            </a:r>
+            <a:r>
+              <a:rPr>
+                <a:solidFill>
+                  <a:srgbClr val="003B4F"/>
+                </a:solidFill>
+                <a:latin typeface="Courier"/>
+              </a:rPr>
+              <a:t>(rix)</a:t>
+            </a:r>
+            <a:br/>
+            <a:br/>
+            <a:r>
+              <a:rPr>
+                <a:solidFill>
+                  <a:srgbClr val="4758AB"/>
+                </a:solidFill>
+                <a:latin typeface="Courier"/>
+              </a:rPr>
+              <a:t>rix</a:t>
+            </a:r>
+            <a:r>
+              <a:rPr>
+                <a:solidFill>
+                  <a:srgbClr val="003B4F"/>
+                </a:solidFill>
+                <a:latin typeface="Courier"/>
+              </a:rPr>
+              <a:t>(</a:t>
+            </a:r>
+            <a:r>
+              <a:rPr>
+                <a:solidFill>
+                  <a:srgbClr val="657422"/>
+                </a:solidFill>
+                <a:latin typeface="Courier"/>
+              </a:rPr>
+              <a:t>date =</a:t>
+            </a:r>
+            <a:r>
+              <a:rPr>
+                <a:solidFill>
+                  <a:srgbClr val="003B4F"/>
+                </a:solidFill>
+                <a:latin typeface="Courier"/>
+              </a:rPr>
+              <a:t> </a:t>
+            </a:r>
+            <a:r>
+              <a:rPr>
+                <a:solidFill>
+                  <a:srgbClr val="20794D"/>
+                </a:solidFill>
+                <a:latin typeface="Courier"/>
+              </a:rPr>
+              <a:t>"2026-09-23"</a:t>
+            </a:r>
+            <a:r>
+              <a:rPr>
+                <a:solidFill>
+                  <a:srgbClr val="003B4F"/>
+                </a:solidFill>
+                <a:latin typeface="Courier"/>
+              </a:rPr>
+              <a:t>,</a:t>
+            </a:r>
+            <a:br/>
+            <a:r>
+              <a:rPr>
+                <a:solidFill>
+                  <a:srgbClr val="003B4F"/>
+                </a:solidFill>
+                <a:latin typeface="Courier"/>
+              </a:rPr>
+              <a:t>    </a:t>
+            </a:r>
+            <a:r>
+              <a:rPr>
+                <a:solidFill>
+                  <a:srgbClr val="657422"/>
+                </a:solidFill>
+                <a:latin typeface="Courier"/>
+              </a:rPr>
+              <a:t>r_pkgs =</a:t>
+            </a:r>
+            <a:r>
+              <a:rPr>
+                <a:solidFill>
+                  <a:srgbClr val="003B4F"/>
+                </a:solidFill>
+                <a:latin typeface="Courier"/>
+              </a:rPr>
+              <a:t> </a:t>
+            </a:r>
+            <a:r>
+              <a:rPr>
+                <a:solidFill>
+                  <a:srgbClr val="4758AB"/>
+                </a:solidFill>
+                <a:latin typeface="Courier"/>
+              </a:rPr>
+              <a:t>c</a:t>
+            </a:r>
+            <a:r>
+              <a:rPr>
+                <a:solidFill>
+                  <a:srgbClr val="003B4F"/>
+                </a:solidFill>
+                <a:latin typeface="Courier"/>
+              </a:rPr>
+              <a:t>(</a:t>
+            </a:r>
+            <a:r>
+              <a:rPr>
+                <a:solidFill>
+                  <a:srgbClr val="20794D"/>
+                </a:solidFill>
+                <a:latin typeface="Courier"/>
+              </a:rPr>
+              <a:t>"dplyr"</a:t>
+            </a:r>
+            <a:r>
+              <a:rPr>
+                <a:solidFill>
+                  <a:srgbClr val="003B4F"/>
+                </a:solidFill>
+                <a:latin typeface="Courier"/>
+              </a:rPr>
+              <a:t>, </a:t>
+            </a:r>
+            <a:r>
+              <a:rPr>
+                <a:solidFill>
+                  <a:srgbClr val="20794D"/>
+                </a:solidFill>
+                <a:latin typeface="Courier"/>
+              </a:rPr>
+              <a:t>"ggplot2"</a:t>
+            </a:r>
+            <a:r>
+              <a:rPr>
+                <a:solidFill>
+                  <a:srgbClr val="003B4F"/>
+                </a:solidFill>
+                <a:latin typeface="Courier"/>
+              </a:rPr>
+              <a:t>),</a:t>
+            </a:r>
+            <a:br/>
+            <a:r>
+              <a:rPr>
+                <a:solidFill>
+                  <a:srgbClr val="003B4F"/>
+                </a:solidFill>
+                <a:latin typeface="Courier"/>
+              </a:rPr>
+              <a:t>    </a:t>
+            </a:r>
+            <a:r>
+              <a:rPr>
+                <a:solidFill>
+                  <a:srgbClr val="657422"/>
+                </a:solidFill>
+                <a:latin typeface="Courier"/>
+              </a:rPr>
+              <a:t>system_pkgs =</a:t>
+            </a:r>
+            <a:r>
+              <a:rPr>
+                <a:solidFill>
+                  <a:srgbClr val="003B4F"/>
+                </a:solidFill>
+                <a:latin typeface="Courier"/>
+              </a:rPr>
+              <a:t> </a:t>
+            </a:r>
+            <a:r>
+              <a:rPr>
+                <a:solidFill>
+                  <a:srgbClr val="8F5902"/>
+                </a:solidFill>
+                <a:latin typeface="Courier"/>
+              </a:rPr>
+              <a:t>NULL</a:t>
+            </a:r>
+            <a:r>
+              <a:rPr>
+                <a:solidFill>
+                  <a:srgbClr val="003B4F"/>
+                </a:solidFill>
+                <a:latin typeface="Courier"/>
+              </a:rPr>
+              <a:t>,</a:t>
+            </a:r>
+            <a:br/>
+            <a:r>
+              <a:rPr>
+                <a:solidFill>
+                  <a:srgbClr val="003B4F"/>
+                </a:solidFill>
+                <a:latin typeface="Courier"/>
+              </a:rPr>
+              <a:t>    </a:t>
+            </a:r>
+            <a:r>
+              <a:rPr>
+                <a:solidFill>
+                  <a:srgbClr val="657422"/>
+                </a:solidFill>
+                <a:latin typeface="Courier"/>
+              </a:rPr>
+              <a:t>git_pkgs =</a:t>
+            </a:r>
+            <a:r>
+              <a:rPr>
+                <a:solidFill>
+                  <a:srgbClr val="003B4F"/>
+                </a:solidFill>
+                <a:latin typeface="Courier"/>
+              </a:rPr>
+              <a:t> </a:t>
+            </a:r>
+            <a:r>
+              <a:rPr>
+                <a:solidFill>
+                  <a:srgbClr val="8F5902"/>
+                </a:solidFill>
+                <a:latin typeface="Courier"/>
+              </a:rPr>
+              <a:t>NULL</a:t>
+            </a:r>
+            <a:r>
+              <a:rPr>
+                <a:solidFill>
+                  <a:srgbClr val="003B4F"/>
+                </a:solidFill>
+                <a:latin typeface="Courier"/>
+              </a:rPr>
+              <a:t>,</a:t>
+            </a:r>
+            <a:br/>
+            <a:r>
+              <a:rPr>
+                <a:solidFill>
+                  <a:srgbClr val="003B4F"/>
+                </a:solidFill>
+                <a:latin typeface="Courier"/>
+              </a:rPr>
+              <a:t>    </a:t>
+            </a:r>
+            <a:r>
+              <a:rPr>
+                <a:solidFill>
+                  <a:srgbClr val="657422"/>
+                </a:solidFill>
+                <a:latin typeface="Courier"/>
+              </a:rPr>
+              <a:t>tex_pkgs =</a:t>
+            </a:r>
+            <a:r>
+              <a:rPr>
+                <a:solidFill>
+                  <a:srgbClr val="003B4F"/>
+                </a:solidFill>
+                <a:latin typeface="Courier"/>
+              </a:rPr>
+              <a:t> </a:t>
+            </a:r>
+            <a:r>
+              <a:rPr>
+                <a:solidFill>
+                  <a:srgbClr val="8F5902"/>
+                </a:solidFill>
+                <a:latin typeface="Courier"/>
+              </a:rPr>
+              <a:t>NULL</a:t>
+            </a:r>
+            <a:r>
+              <a:rPr>
+                <a:solidFill>
+                  <a:srgbClr val="003B4F"/>
+                </a:solidFill>
+                <a:latin typeface="Courier"/>
+              </a:rPr>
+              <a:t>,</a:t>
+            </a:r>
+            <a:br/>
+            <a:r>
+              <a:rPr>
+                <a:solidFill>
+                  <a:srgbClr val="003B4F"/>
+                </a:solidFill>
+                <a:latin typeface="Courier"/>
+              </a:rPr>
+              <a:t>    </a:t>
+            </a:r>
+            <a:r>
+              <a:rPr>
+                <a:solidFill>
+                  <a:srgbClr val="657422"/>
+                </a:solidFill>
+                <a:latin typeface="Courier"/>
+              </a:rPr>
+              <a:t>ide =</a:t>
+            </a:r>
+            <a:r>
+              <a:rPr>
+                <a:solidFill>
+                  <a:srgbClr val="003B4F"/>
+                </a:solidFill>
+                <a:latin typeface="Courier"/>
+              </a:rPr>
+              <a:t> </a:t>
+            </a:r>
+            <a:r>
+              <a:rPr>
+                <a:solidFill>
+                  <a:srgbClr val="20794D"/>
+                </a:solidFill>
+                <a:latin typeface="Courier"/>
+              </a:rPr>
+              <a:t>"rstudio"</a:t>
+            </a:r>
+            <a:r>
+              <a:rPr>
+                <a:solidFill>
+                  <a:srgbClr val="003B4F"/>
+                </a:solidFill>
+                <a:latin typeface="Courier"/>
+              </a:rPr>
+              <a:t>,</a:t>
+            </a:r>
+            <a:br/>
+            <a:r>
+              <a:rPr>
+                <a:solidFill>
+                  <a:srgbClr val="003B4F"/>
+                </a:solidFill>
+                <a:latin typeface="Courier"/>
+              </a:rPr>
+              <a:t>    </a:t>
+            </a:r>
+            <a:r>
+              <a:rPr>
+                <a:solidFill>
+                  <a:srgbClr val="657422"/>
+                </a:solidFill>
+                <a:latin typeface="Courier"/>
+              </a:rPr>
+              <a:t>project_path =</a:t>
+            </a:r>
+            <a:r>
+              <a:rPr>
+                <a:solidFill>
+                  <a:srgbClr val="003B4F"/>
+                </a:solidFill>
+                <a:latin typeface="Courier"/>
+              </a:rPr>
+              <a:t> </a:t>
+            </a:r>
+            <a:r>
+              <a:rPr>
+                <a:solidFill>
+                  <a:srgbClr val="20794D"/>
+                </a:solidFill>
+                <a:latin typeface="Courier"/>
+              </a:rPr>
+              <a:t>"."</a:t>
+            </a:r>
+            <a:r>
+              <a:rPr>
+                <a:solidFill>
+                  <a:srgbClr val="003B4F"/>
+                </a:solidFill>
+                <a:latin typeface="Courier"/>
+              </a:rPr>
+              <a:t>)</a:t>
             </a:r>
           </a:p>
         </p:txBody>
@@ -4516,7 +4491,7 @@
             </a:pPr>
             <a:r>
               <a:rPr/>
-              <a:t>Polyglot environments with rix</a:t>
+              <a:t>rix: reproducible development environments with Nix (2/2)</a:t>
             </a:r>
           </a:p>
         </p:txBody>
@@ -4541,545 +4516,68 @@
               <a:rPr>
                 <a:latin typeface="Courier"/>
               </a:rPr>
-              <a:t>rix()</a:t>
-            </a:r>
-            <a:r>
-              <a:rPr/>
-              <a:t> supports Python and Julia alongside R:</a:t>
-            </a:r>
-          </a:p>
-          <a:p>
-            <a:pPr lvl="0" indent="0" marL="0">
-              <a:buNone/>
-            </a:pPr>
-            <a:r>
-              <a:rPr/>
-              <a:t>. . .</a:t>
-            </a:r>
-          </a:p>
-          <a:p>
-            <a:pPr lvl="0" indent="0">
-              <a:buNone/>
-            </a:pPr>
-            <a:r>
-              <a:rPr>
-                <a:solidFill>
-                  <a:srgbClr val="4758AB"/>
-                </a:solidFill>
-                <a:latin typeface="Courier"/>
-              </a:rPr>
-              <a:t>rix</a:t>
-            </a:r>
-            <a:r>
-              <a:rPr>
-                <a:solidFill>
-                  <a:srgbClr val="003B4F"/>
-                </a:solidFill>
-                <a:latin typeface="Courier"/>
-              </a:rPr>
-              <a:t>(</a:t>
-            </a:r>
-            <a:r>
-              <a:rPr>
-                <a:solidFill>
-                  <a:srgbClr val="657422"/>
-                </a:solidFill>
-                <a:latin typeface="Courier"/>
-              </a:rPr>
-              <a:t>date =</a:t>
-            </a:r>
-            <a:r>
-              <a:rPr>
-                <a:solidFill>
-                  <a:srgbClr val="003B4F"/>
-                </a:solidFill>
-                <a:latin typeface="Courier"/>
-              </a:rPr>
-              <a:t> </a:t>
-            </a:r>
-            <a:r>
-              <a:rPr>
-                <a:solidFill>
-                  <a:srgbClr val="20794D"/>
-                </a:solidFill>
-                <a:latin typeface="Courier"/>
-              </a:rPr>
-              <a:t>"2026-01-14"</a:t>
-            </a:r>
-            <a:r>
-              <a:rPr>
-                <a:solidFill>
-                  <a:srgbClr val="003B4F"/>
-                </a:solidFill>
-                <a:latin typeface="Courier"/>
-              </a:rPr>
-              <a:t>,</a:t>
-            </a:r>
-            <a:br/>
-            <a:r>
-              <a:rPr>
-                <a:solidFill>
-                  <a:srgbClr val="003B4F"/>
-                </a:solidFill>
-                <a:latin typeface="Courier"/>
-              </a:rPr>
-              <a:t>    </a:t>
-            </a:r>
-            <a:r>
-              <a:rPr>
-                <a:solidFill>
-                  <a:srgbClr val="657422"/>
-                </a:solidFill>
-                <a:latin typeface="Courier"/>
-              </a:rPr>
-              <a:t>r_pkgs =</a:t>
-            </a:r>
-            <a:r>
-              <a:rPr>
-                <a:solidFill>
-                  <a:srgbClr val="003B4F"/>
-                </a:solidFill>
-                <a:latin typeface="Courier"/>
-              </a:rPr>
-              <a:t> </a:t>
-            </a:r>
-            <a:r>
-              <a:rPr>
-                <a:solidFill>
-                  <a:srgbClr val="4758AB"/>
-                </a:solidFill>
-                <a:latin typeface="Courier"/>
-              </a:rPr>
-              <a:t>c</a:t>
-            </a:r>
-            <a:r>
-              <a:rPr>
-                <a:solidFill>
-                  <a:srgbClr val="003B4F"/>
-                </a:solidFill>
-                <a:latin typeface="Courier"/>
-              </a:rPr>
-              <a:t>(</a:t>
-            </a:r>
-            <a:r>
-              <a:rPr>
-                <a:solidFill>
-                  <a:srgbClr val="20794D"/>
-                </a:solidFill>
-                <a:latin typeface="Courier"/>
-              </a:rPr>
-              <a:t>"tidyr"</a:t>
-            </a:r>
-            <a:r>
-              <a:rPr>
-                <a:solidFill>
-                  <a:srgbClr val="003B4F"/>
-                </a:solidFill>
-                <a:latin typeface="Courier"/>
-              </a:rPr>
-              <a:t>, </a:t>
-            </a:r>
-            <a:r>
-              <a:rPr>
-                <a:solidFill>
-                  <a:srgbClr val="20794D"/>
-                </a:solidFill>
-                <a:latin typeface="Courier"/>
-              </a:rPr>
-              <a:t>"dplyr"</a:t>
-            </a:r>
-            <a:r>
-              <a:rPr>
-                <a:solidFill>
-                  <a:srgbClr val="003B4F"/>
-                </a:solidFill>
-                <a:latin typeface="Courier"/>
-              </a:rPr>
-              <a:t>, </a:t>
-            </a:r>
-            <a:r>
-              <a:rPr>
-                <a:solidFill>
-                  <a:srgbClr val="20794D"/>
-                </a:solidFill>
-                <a:latin typeface="Courier"/>
-              </a:rPr>
-              <a:t>"ggplot2"</a:t>
-            </a:r>
-            <a:r>
-              <a:rPr>
-                <a:solidFill>
-                  <a:srgbClr val="003B4F"/>
-                </a:solidFill>
-                <a:latin typeface="Courier"/>
-              </a:rPr>
-              <a:t>, </a:t>
-            </a:r>
-            <a:r>
-              <a:rPr>
-                <a:solidFill>
-                  <a:srgbClr val="20794D"/>
-                </a:solidFill>
-                <a:latin typeface="Courier"/>
-              </a:rPr>
-              <a:t>"languageserver"</a:t>
-            </a:r>
-            <a:r>
-              <a:rPr>
-                <a:solidFill>
-                  <a:srgbClr val="003B4F"/>
-                </a:solidFill>
-                <a:latin typeface="Courier"/>
-              </a:rPr>
-              <a:t>),</a:t>
-            </a:r>
-            <a:br/>
-            <a:r>
-              <a:rPr>
-                <a:solidFill>
-                  <a:srgbClr val="003B4F"/>
-                </a:solidFill>
-                <a:latin typeface="Courier"/>
-              </a:rPr>
-              <a:t>    </a:t>
-            </a:r>
-            <a:r>
-              <a:rPr>
-                <a:solidFill>
-                  <a:srgbClr val="657422"/>
-                </a:solidFill>
-                <a:latin typeface="Courier"/>
-              </a:rPr>
-              <a:t>py_conf =</a:t>
-            </a:r>
-            <a:r>
-              <a:rPr>
-                <a:solidFill>
-                  <a:srgbClr val="003B4F"/>
-                </a:solidFill>
-                <a:latin typeface="Courier"/>
-              </a:rPr>
-              <a:t> </a:t>
-            </a:r>
-            <a:r>
-              <a:rPr>
-                <a:solidFill>
-                  <a:srgbClr val="4758AB"/>
-                </a:solidFill>
-                <a:latin typeface="Courier"/>
-              </a:rPr>
-              <a:t>list</a:t>
-            </a:r>
-            <a:r>
-              <a:rPr>
-                <a:solidFill>
-                  <a:srgbClr val="003B4F"/>
-                </a:solidFill>
-                <a:latin typeface="Courier"/>
-              </a:rPr>
-              <a:t>(</a:t>
-            </a:r>
-            <a:br/>
-            <a:r>
-              <a:rPr>
-                <a:solidFill>
-                  <a:srgbClr val="003B4F"/>
-                </a:solidFill>
-                <a:latin typeface="Courier"/>
-              </a:rPr>
-              <a:t>      </a:t>
-            </a:r>
-            <a:r>
-              <a:rPr>
-                <a:solidFill>
-                  <a:srgbClr val="657422"/>
-                </a:solidFill>
-                <a:latin typeface="Courier"/>
-              </a:rPr>
-              <a:t>py_version =</a:t>
-            </a:r>
-            <a:r>
-              <a:rPr>
-                <a:solidFill>
-                  <a:srgbClr val="003B4F"/>
-                </a:solidFill>
-                <a:latin typeface="Courier"/>
-              </a:rPr>
-              <a:t> </a:t>
-            </a:r>
-            <a:r>
-              <a:rPr>
-                <a:solidFill>
-                  <a:srgbClr val="20794D"/>
-                </a:solidFill>
-                <a:latin typeface="Courier"/>
-              </a:rPr>
-              <a:t>"3.13"</a:t>
-            </a:r>
-            <a:r>
-              <a:rPr>
-                <a:solidFill>
-                  <a:srgbClr val="003B4F"/>
-                </a:solidFill>
-                <a:latin typeface="Courier"/>
-              </a:rPr>
-              <a:t>, </a:t>
-            </a:r>
-            <a:br/>
-            <a:r>
-              <a:rPr>
-                <a:solidFill>
-                  <a:srgbClr val="003B4F"/>
-                </a:solidFill>
-                <a:latin typeface="Courier"/>
-              </a:rPr>
-              <a:t>      </a:t>
-            </a:r>
-            <a:r>
-              <a:rPr>
-                <a:solidFill>
-                  <a:srgbClr val="657422"/>
-                </a:solidFill>
-                <a:latin typeface="Courier"/>
-              </a:rPr>
-              <a:t>py_pkgs =</a:t>
-            </a:r>
-            <a:r>
-              <a:rPr>
-                <a:solidFill>
-                  <a:srgbClr val="003B4F"/>
-                </a:solidFill>
-                <a:latin typeface="Courier"/>
-              </a:rPr>
-              <a:t> </a:t>
-            </a:r>
-            <a:r>
-              <a:rPr>
-                <a:solidFill>
-                  <a:srgbClr val="4758AB"/>
-                </a:solidFill>
-                <a:latin typeface="Courier"/>
-              </a:rPr>
-              <a:t>c</a:t>
-            </a:r>
-            <a:r>
-              <a:rPr>
-                <a:solidFill>
-                  <a:srgbClr val="003B4F"/>
-                </a:solidFill>
-                <a:latin typeface="Courier"/>
-              </a:rPr>
-              <a:t>(</a:t>
-            </a:r>
-            <a:r>
-              <a:rPr>
-                <a:solidFill>
-                  <a:srgbClr val="20794D"/>
-                </a:solidFill>
-                <a:latin typeface="Courier"/>
-              </a:rPr>
-              <a:t>"polars"</a:t>
-            </a:r>
-            <a:r>
-              <a:rPr>
-                <a:solidFill>
-                  <a:srgbClr val="003B4F"/>
-                </a:solidFill>
-                <a:latin typeface="Courier"/>
-              </a:rPr>
-              <a:t>, </a:t>
-            </a:r>
-            <a:r>
-              <a:rPr>
-                <a:solidFill>
-                  <a:srgbClr val="20794D"/>
-                </a:solidFill>
-                <a:latin typeface="Courier"/>
-              </a:rPr>
-              <a:t>"scikit-learn"</a:t>
-            </a:r>
-            <a:r>
-              <a:rPr>
-                <a:solidFill>
-                  <a:srgbClr val="003B4F"/>
-                </a:solidFill>
-                <a:latin typeface="Courier"/>
-              </a:rPr>
-              <a:t>)</a:t>
-            </a:r>
-            <a:br/>
-            <a:r>
-              <a:rPr>
-                <a:solidFill>
-                  <a:srgbClr val="003B4F"/>
-                </a:solidFill>
-                <a:latin typeface="Courier"/>
-              </a:rPr>
-              <a:t>    ),</a:t>
-            </a:r>
-            <a:br/>
-            <a:r>
-              <a:rPr>
-                <a:solidFill>
-                  <a:srgbClr val="003B4F"/>
-                </a:solidFill>
-                <a:latin typeface="Courier"/>
-              </a:rPr>
-              <a:t>    </a:t>
-            </a:r>
-            <a:r>
-              <a:rPr>
-                <a:solidFill>
-                  <a:srgbClr val="657422"/>
-                </a:solidFill>
-                <a:latin typeface="Courier"/>
-              </a:rPr>
-              <a:t>ide =</a:t>
-            </a:r>
-            <a:r>
-              <a:rPr>
-                <a:solidFill>
-                  <a:srgbClr val="003B4F"/>
-                </a:solidFill>
-                <a:latin typeface="Courier"/>
-              </a:rPr>
-              <a:t> </a:t>
-            </a:r>
-            <a:r>
-              <a:rPr>
-                <a:solidFill>
-                  <a:srgbClr val="20794D"/>
-                </a:solidFill>
-                <a:latin typeface="Courier"/>
-              </a:rPr>
-              <a:t>"none"</a:t>
-            </a:r>
-            <a:r>
-              <a:rPr>
-                <a:solidFill>
-                  <a:srgbClr val="003B4F"/>
-                </a:solidFill>
-                <a:latin typeface="Courier"/>
-              </a:rPr>
-              <a:t>,</a:t>
-            </a:r>
-            <a:br/>
-            <a:r>
-              <a:rPr>
-                <a:solidFill>
-                  <a:srgbClr val="003B4F"/>
-                </a:solidFill>
-                <a:latin typeface="Courier"/>
-              </a:rPr>
-              <a:t>    </a:t>
-            </a:r>
-            <a:r>
-              <a:rPr>
-                <a:solidFill>
-                  <a:srgbClr val="657422"/>
-                </a:solidFill>
-                <a:latin typeface="Courier"/>
-              </a:rPr>
-              <a:t>project_path =</a:t>
-            </a:r>
-            <a:r>
-              <a:rPr>
-                <a:solidFill>
-                  <a:srgbClr val="003B4F"/>
-                </a:solidFill>
-                <a:latin typeface="Courier"/>
-              </a:rPr>
-              <a:t> </a:t>
-            </a:r>
-            <a:r>
-              <a:rPr>
-                <a:solidFill>
-                  <a:srgbClr val="20794D"/>
-                </a:solidFill>
-                <a:latin typeface="Courier"/>
-              </a:rPr>
-              <a:t>"."</a:t>
-            </a:r>
-            <a:r>
-              <a:rPr>
-                <a:solidFill>
-                  <a:srgbClr val="003B4F"/>
-                </a:solidFill>
-                <a:latin typeface="Courier"/>
-              </a:rPr>
-              <a:t>,</a:t>
-            </a:r>
-            <a:br/>
-            <a:r>
-              <a:rPr>
-                <a:solidFill>
-                  <a:srgbClr val="003B4F"/>
-                </a:solidFill>
-                <a:latin typeface="Courier"/>
-              </a:rPr>
-              <a:t>    </a:t>
-            </a:r>
-            <a:r>
-              <a:rPr>
-                <a:solidFill>
-                  <a:srgbClr val="657422"/>
-                </a:solidFill>
-                <a:latin typeface="Courier"/>
-              </a:rPr>
-              <a:t>overwrite =</a:t>
-            </a:r>
-            <a:r>
-              <a:rPr>
-                <a:solidFill>
-                  <a:srgbClr val="003B4F"/>
-                </a:solidFill>
-                <a:latin typeface="Courier"/>
-              </a:rPr>
-              <a:t> </a:t>
-            </a:r>
-            <a:r>
-              <a:rPr>
-                <a:solidFill>
-                  <a:srgbClr val="8F5902"/>
-                </a:solidFill>
-                <a:latin typeface="Courier"/>
-              </a:rPr>
-              <a:t>TRUE</a:t>
-            </a:r>
-            <a:r>
-              <a:rPr>
-                <a:solidFill>
-                  <a:srgbClr val="003B4F"/>
-                </a:solidFill>
-                <a:latin typeface="Courier"/>
-              </a:rPr>
-              <a:t>)</a:t>
-            </a:r>
-          </a:p>
-          <a:p>
-            <a:pPr lvl="0"/>
-            <a:r>
-              <a:rPr/>
-              <a:t>Julia: use </a:t>
-            </a:r>
-            <a:r>
-              <a:rPr>
-                <a:latin typeface="Courier"/>
-              </a:rPr>
-              <a:t>jl_conf = list(jl_version = "1.10", jl_pkgs = c(...))</a:t>
-            </a:r>
-          </a:p>
-          <a:p>
-            <a:pPr lvl="0"/>
-            <a:r>
-              <a:rPr/>
-              <a:t>See: </a:t>
-            </a:r>
-            <a:r>
-              <a:rPr>
-                <a:latin typeface="Courier"/>
-              </a:rPr>
-              <a:t>scripts/nix_expressions/02_native_positron_example/</a:t>
+              <a:t>rix::rix()</a:t>
+            </a:r>
+            <a:r>
+              <a:rPr/>
+              <a:t> generates a </a:t>
+            </a:r>
+            <a:r>
+              <a:rPr>
+                <a:latin typeface="Courier"/>
+              </a:rPr>
+              <a:t>default.nix</a:t>
+            </a:r>
+            <a:r>
+              <a:rPr/>
+              <a:t> file</a:t>
+            </a:r>
+          </a:p>
+          <a:p>
+            <a:pPr lvl="0"/>
+            <a:r>
+              <a:rPr/>
+              <a:t>Build the expressions with </a:t>
+            </a:r>
+            <a:r>
+              <a:rPr>
+                <a:latin typeface="Courier"/>
+              </a:rPr>
+              <a:t>nix-build</a:t>
+            </a:r>
+            <a:r>
+              <a:rPr/>
+              <a:t> (in terminal) or </a:t>
+            </a:r>
+            <a:r>
+              <a:rPr>
+                <a:latin typeface="Courier"/>
+              </a:rPr>
+              <a:t>rix::nix_build()</a:t>
+            </a:r>
+            <a:r>
+              <a:rPr/>
+              <a:t> from R</a:t>
+            </a:r>
+          </a:p>
+          <a:p>
+            <a:pPr lvl="0"/>
+            <a:r>
+              <a:rPr/>
+              <a:t>Access the development environment with </a:t>
+            </a:r>
+            <a:r>
+              <a:rPr>
+                <a:latin typeface="Courier"/>
+              </a:rPr>
+              <a:t>nix-shell</a:t>
+            </a:r>
+          </a:p>
+          <a:p>
+            <a:pPr lvl="0"/>
+            <a:r>
+              <a:rPr/>
+              <a:t>Expressions can be generated even without Nix installed (with some limitations)</a:t>
             </a:r>
           </a:p>
         </p:txBody>
@@ -5126,7 +4624,7 @@
             </a:pPr>
             <a:r>
               <a:rPr/>
-              <a:t>Demo</a:t>
+              <a:t>Polyglot environments with rix</a:t>
             </a:r>
           </a:p>
         </p:txBody>
@@ -5148,143 +4646,548 @@
           <a:p>
             <a:pPr lvl="0"/>
             <a:r>
-              <a:rPr/>
-              <a:t>Basics: </a:t>
-            </a:r>
-            <a:r>
-              <a:rPr>
-                <a:latin typeface="Courier"/>
-              </a:rPr>
-              <a:t>scripts/nix_expressions/01_rix_intro/</a:t>
-            </a:r>
-          </a:p>
-          <a:p>
-            <a:pPr lvl="0"/>
-            <a:r>
-              <a:rPr/>
-              <a:t>Native VS Code/Positron on Windows: </a:t>
+              <a:rPr>
+                <a:latin typeface="Courier"/>
+              </a:rPr>
+              <a:t>rix()</a:t>
+            </a:r>
+            <a:r>
+              <a:rPr/>
+              <a:t> supports Python and Julia alongside R:</a:t>
+            </a:r>
+          </a:p>
+          <a:p>
+            <a:pPr lvl="0" indent="0" marL="0">
+              <a:buNone/>
+            </a:pPr>
+            <a:r>
+              <a:rPr/>
+              <a:t>. . .</a:t>
+            </a:r>
+          </a:p>
+          <a:p>
+            <a:pPr lvl="0" indent="0">
+              <a:buNone/>
+            </a:pPr>
+            <a:r>
+              <a:rPr>
+                <a:solidFill>
+                  <a:srgbClr val="4758AB"/>
+                </a:solidFill>
+                <a:latin typeface="Courier"/>
+              </a:rPr>
+              <a:t>rix</a:t>
+            </a:r>
+            <a:r>
+              <a:rPr>
+                <a:solidFill>
+                  <a:srgbClr val="003B4F"/>
+                </a:solidFill>
+                <a:latin typeface="Courier"/>
+              </a:rPr>
+              <a:t>(</a:t>
+            </a:r>
+            <a:r>
+              <a:rPr>
+                <a:solidFill>
+                  <a:srgbClr val="657422"/>
+                </a:solidFill>
+                <a:latin typeface="Courier"/>
+              </a:rPr>
+              <a:t>date =</a:t>
+            </a:r>
+            <a:r>
+              <a:rPr>
+                <a:solidFill>
+                  <a:srgbClr val="003B4F"/>
+                </a:solidFill>
+                <a:latin typeface="Courier"/>
+              </a:rPr>
+              <a:t> </a:t>
+            </a:r>
+            <a:r>
+              <a:rPr>
+                <a:solidFill>
+                  <a:srgbClr val="20794D"/>
+                </a:solidFill>
+                <a:latin typeface="Courier"/>
+              </a:rPr>
+              <a:t>"2026-01-14"</a:t>
+            </a:r>
+            <a:r>
+              <a:rPr>
+                <a:solidFill>
+                  <a:srgbClr val="003B4F"/>
+                </a:solidFill>
+                <a:latin typeface="Courier"/>
+              </a:rPr>
+              <a:t>,</a:t>
+            </a:r>
+            <a:br/>
+            <a:r>
+              <a:rPr>
+                <a:solidFill>
+                  <a:srgbClr val="003B4F"/>
+                </a:solidFill>
+                <a:latin typeface="Courier"/>
+              </a:rPr>
+              <a:t>    </a:t>
+            </a:r>
+            <a:r>
+              <a:rPr>
+                <a:solidFill>
+                  <a:srgbClr val="657422"/>
+                </a:solidFill>
+                <a:latin typeface="Courier"/>
+              </a:rPr>
+              <a:t>r_pkgs =</a:t>
+            </a:r>
+            <a:r>
+              <a:rPr>
+                <a:solidFill>
+                  <a:srgbClr val="003B4F"/>
+                </a:solidFill>
+                <a:latin typeface="Courier"/>
+              </a:rPr>
+              <a:t> </a:t>
+            </a:r>
+            <a:r>
+              <a:rPr>
+                <a:solidFill>
+                  <a:srgbClr val="4758AB"/>
+                </a:solidFill>
+                <a:latin typeface="Courier"/>
+              </a:rPr>
+              <a:t>c</a:t>
+            </a:r>
+            <a:r>
+              <a:rPr>
+                <a:solidFill>
+                  <a:srgbClr val="003B4F"/>
+                </a:solidFill>
+                <a:latin typeface="Courier"/>
+              </a:rPr>
+              <a:t>(</a:t>
+            </a:r>
+            <a:r>
+              <a:rPr>
+                <a:solidFill>
+                  <a:srgbClr val="20794D"/>
+                </a:solidFill>
+                <a:latin typeface="Courier"/>
+              </a:rPr>
+              <a:t>"tidyr"</a:t>
+            </a:r>
+            <a:r>
+              <a:rPr>
+                <a:solidFill>
+                  <a:srgbClr val="003B4F"/>
+                </a:solidFill>
+                <a:latin typeface="Courier"/>
+              </a:rPr>
+              <a:t>, </a:t>
+            </a:r>
+            <a:r>
+              <a:rPr>
+                <a:solidFill>
+                  <a:srgbClr val="20794D"/>
+                </a:solidFill>
+                <a:latin typeface="Courier"/>
+              </a:rPr>
+              <a:t>"dplyr"</a:t>
+            </a:r>
+            <a:r>
+              <a:rPr>
+                <a:solidFill>
+                  <a:srgbClr val="003B4F"/>
+                </a:solidFill>
+                <a:latin typeface="Courier"/>
+              </a:rPr>
+              <a:t>, </a:t>
+            </a:r>
+            <a:r>
+              <a:rPr>
+                <a:solidFill>
+                  <a:srgbClr val="20794D"/>
+                </a:solidFill>
+                <a:latin typeface="Courier"/>
+              </a:rPr>
+              <a:t>"ggplot2"</a:t>
+            </a:r>
+            <a:r>
+              <a:rPr>
+                <a:solidFill>
+                  <a:srgbClr val="003B4F"/>
+                </a:solidFill>
+                <a:latin typeface="Courier"/>
+              </a:rPr>
+              <a:t>, </a:t>
+            </a:r>
+            <a:r>
+              <a:rPr>
+                <a:solidFill>
+                  <a:srgbClr val="20794D"/>
+                </a:solidFill>
+                <a:latin typeface="Courier"/>
+              </a:rPr>
+              <a:t>"languageserver"</a:t>
+            </a:r>
+            <a:r>
+              <a:rPr>
+                <a:solidFill>
+                  <a:srgbClr val="003B4F"/>
+                </a:solidFill>
+                <a:latin typeface="Courier"/>
+              </a:rPr>
+              <a:t>),</a:t>
+            </a:r>
+            <a:br/>
+            <a:r>
+              <a:rPr>
+                <a:solidFill>
+                  <a:srgbClr val="003B4F"/>
+                </a:solidFill>
+                <a:latin typeface="Courier"/>
+              </a:rPr>
+              <a:t>    </a:t>
+            </a:r>
+            <a:r>
+              <a:rPr>
+                <a:solidFill>
+                  <a:srgbClr val="657422"/>
+                </a:solidFill>
+                <a:latin typeface="Courier"/>
+              </a:rPr>
+              <a:t>py_conf =</a:t>
+            </a:r>
+            <a:r>
+              <a:rPr>
+                <a:solidFill>
+                  <a:srgbClr val="003B4F"/>
+                </a:solidFill>
+                <a:latin typeface="Courier"/>
+              </a:rPr>
+              <a:t> </a:t>
+            </a:r>
+            <a:r>
+              <a:rPr>
+                <a:solidFill>
+                  <a:srgbClr val="4758AB"/>
+                </a:solidFill>
+                <a:latin typeface="Courier"/>
+              </a:rPr>
+              <a:t>list</a:t>
+            </a:r>
+            <a:r>
+              <a:rPr>
+                <a:solidFill>
+                  <a:srgbClr val="003B4F"/>
+                </a:solidFill>
+                <a:latin typeface="Courier"/>
+              </a:rPr>
+              <a:t>(</a:t>
+            </a:r>
+            <a:br/>
+            <a:r>
+              <a:rPr>
+                <a:solidFill>
+                  <a:srgbClr val="003B4F"/>
+                </a:solidFill>
+                <a:latin typeface="Courier"/>
+              </a:rPr>
+              <a:t>      </a:t>
+            </a:r>
+            <a:r>
+              <a:rPr>
+                <a:solidFill>
+                  <a:srgbClr val="657422"/>
+                </a:solidFill>
+                <a:latin typeface="Courier"/>
+              </a:rPr>
+              <a:t>py_version =</a:t>
+            </a:r>
+            <a:r>
+              <a:rPr>
+                <a:solidFill>
+                  <a:srgbClr val="003B4F"/>
+                </a:solidFill>
+                <a:latin typeface="Courier"/>
+              </a:rPr>
+              <a:t> </a:t>
+            </a:r>
+            <a:r>
+              <a:rPr>
+                <a:solidFill>
+                  <a:srgbClr val="20794D"/>
+                </a:solidFill>
+                <a:latin typeface="Courier"/>
+              </a:rPr>
+              <a:t>"3.13"</a:t>
+            </a:r>
+            <a:r>
+              <a:rPr>
+                <a:solidFill>
+                  <a:srgbClr val="003B4F"/>
+                </a:solidFill>
+                <a:latin typeface="Courier"/>
+              </a:rPr>
+              <a:t>, </a:t>
+            </a:r>
+            <a:br/>
+            <a:r>
+              <a:rPr>
+                <a:solidFill>
+                  <a:srgbClr val="003B4F"/>
+                </a:solidFill>
+                <a:latin typeface="Courier"/>
+              </a:rPr>
+              <a:t>      </a:t>
+            </a:r>
+            <a:r>
+              <a:rPr>
+                <a:solidFill>
+                  <a:srgbClr val="657422"/>
+                </a:solidFill>
+                <a:latin typeface="Courier"/>
+              </a:rPr>
+              <a:t>py_pkgs =</a:t>
+            </a:r>
+            <a:r>
+              <a:rPr>
+                <a:solidFill>
+                  <a:srgbClr val="003B4F"/>
+                </a:solidFill>
+                <a:latin typeface="Courier"/>
+              </a:rPr>
+              <a:t> </a:t>
+            </a:r>
+            <a:r>
+              <a:rPr>
+                <a:solidFill>
+                  <a:srgbClr val="4758AB"/>
+                </a:solidFill>
+                <a:latin typeface="Courier"/>
+              </a:rPr>
+              <a:t>c</a:t>
+            </a:r>
+            <a:r>
+              <a:rPr>
+                <a:solidFill>
+                  <a:srgbClr val="003B4F"/>
+                </a:solidFill>
+                <a:latin typeface="Courier"/>
+              </a:rPr>
+              <a:t>(</a:t>
+            </a:r>
+            <a:r>
+              <a:rPr>
+                <a:solidFill>
+                  <a:srgbClr val="20794D"/>
+                </a:solidFill>
+                <a:latin typeface="Courier"/>
+              </a:rPr>
+              <a:t>"polars"</a:t>
+            </a:r>
+            <a:r>
+              <a:rPr>
+                <a:solidFill>
+                  <a:srgbClr val="003B4F"/>
+                </a:solidFill>
+                <a:latin typeface="Courier"/>
+              </a:rPr>
+              <a:t>, </a:t>
+            </a:r>
+            <a:r>
+              <a:rPr>
+                <a:solidFill>
+                  <a:srgbClr val="20794D"/>
+                </a:solidFill>
+                <a:latin typeface="Courier"/>
+              </a:rPr>
+              <a:t>"scikit-learn"</a:t>
+            </a:r>
+            <a:r>
+              <a:rPr>
+                <a:solidFill>
+                  <a:srgbClr val="003B4F"/>
+                </a:solidFill>
+                <a:latin typeface="Courier"/>
+              </a:rPr>
+              <a:t>)</a:t>
+            </a:r>
+            <a:br/>
+            <a:r>
+              <a:rPr>
+                <a:solidFill>
+                  <a:srgbClr val="003B4F"/>
+                </a:solidFill>
+                <a:latin typeface="Courier"/>
+              </a:rPr>
+              <a:t>    ),</a:t>
+            </a:r>
+            <a:br/>
+            <a:r>
+              <a:rPr>
+                <a:solidFill>
+                  <a:srgbClr val="003B4F"/>
+                </a:solidFill>
+                <a:latin typeface="Courier"/>
+              </a:rPr>
+              <a:t>    </a:t>
+            </a:r>
+            <a:r>
+              <a:rPr>
+                <a:solidFill>
+                  <a:srgbClr val="657422"/>
+                </a:solidFill>
+                <a:latin typeface="Courier"/>
+              </a:rPr>
+              <a:t>ide =</a:t>
+            </a:r>
+            <a:r>
+              <a:rPr>
+                <a:solidFill>
+                  <a:srgbClr val="003B4F"/>
+                </a:solidFill>
+                <a:latin typeface="Courier"/>
+              </a:rPr>
+              <a:t> </a:t>
+            </a:r>
+            <a:r>
+              <a:rPr>
+                <a:solidFill>
+                  <a:srgbClr val="20794D"/>
+                </a:solidFill>
+                <a:latin typeface="Courier"/>
+              </a:rPr>
+              <a:t>"none"</a:t>
+            </a:r>
+            <a:r>
+              <a:rPr>
+                <a:solidFill>
+                  <a:srgbClr val="003B4F"/>
+                </a:solidFill>
+                <a:latin typeface="Courier"/>
+              </a:rPr>
+              <a:t>,</a:t>
+            </a:r>
+            <a:br/>
+            <a:r>
+              <a:rPr>
+                <a:solidFill>
+                  <a:srgbClr val="003B4F"/>
+                </a:solidFill>
+                <a:latin typeface="Courier"/>
+              </a:rPr>
+              <a:t>    </a:t>
+            </a:r>
+            <a:r>
+              <a:rPr>
+                <a:solidFill>
+                  <a:srgbClr val="657422"/>
+                </a:solidFill>
+                <a:latin typeface="Courier"/>
+              </a:rPr>
+              <a:t>project_path =</a:t>
+            </a:r>
+            <a:r>
+              <a:rPr>
+                <a:solidFill>
+                  <a:srgbClr val="003B4F"/>
+                </a:solidFill>
+                <a:latin typeface="Courier"/>
+              </a:rPr>
+              <a:t> </a:t>
+            </a:r>
+            <a:r>
+              <a:rPr>
+                <a:solidFill>
+                  <a:srgbClr val="20794D"/>
+                </a:solidFill>
+                <a:latin typeface="Courier"/>
+              </a:rPr>
+              <a:t>"."</a:t>
+            </a:r>
+            <a:r>
+              <a:rPr>
+                <a:solidFill>
+                  <a:srgbClr val="003B4F"/>
+                </a:solidFill>
+                <a:latin typeface="Courier"/>
+              </a:rPr>
+              <a:t>,</a:t>
+            </a:r>
+            <a:br/>
+            <a:r>
+              <a:rPr>
+                <a:solidFill>
+                  <a:srgbClr val="003B4F"/>
+                </a:solidFill>
+                <a:latin typeface="Courier"/>
+              </a:rPr>
+              <a:t>    </a:t>
+            </a:r>
+            <a:r>
+              <a:rPr>
+                <a:solidFill>
+                  <a:srgbClr val="657422"/>
+                </a:solidFill>
+                <a:latin typeface="Courier"/>
+              </a:rPr>
+              <a:t>overwrite =</a:t>
+            </a:r>
+            <a:r>
+              <a:rPr>
+                <a:solidFill>
+                  <a:srgbClr val="003B4F"/>
+                </a:solidFill>
+                <a:latin typeface="Courier"/>
+              </a:rPr>
+              <a:t> </a:t>
+            </a:r>
+            <a:r>
+              <a:rPr>
+                <a:solidFill>
+                  <a:srgbClr val="8F5902"/>
+                </a:solidFill>
+                <a:latin typeface="Courier"/>
+              </a:rPr>
+              <a:t>TRUE</a:t>
+            </a:r>
+            <a:r>
+              <a:rPr>
+                <a:solidFill>
+                  <a:srgbClr val="003B4F"/>
+                </a:solidFill>
+                <a:latin typeface="Courier"/>
+              </a:rPr>
+              <a:t>)</a:t>
+            </a:r>
+          </a:p>
+          <a:p>
+            <a:pPr lvl="0"/>
+            <a:r>
+              <a:rPr/>
+              <a:t>Julia: use </a:t>
+            </a:r>
+            <a:r>
+              <a:rPr>
+                <a:latin typeface="Courier"/>
+              </a:rPr>
+              <a:t>jl_conf = list(jl_version = "1.10", jl_pkgs = c(...))</a:t>
+            </a:r>
+          </a:p>
+          <a:p>
+            <a:pPr lvl="0"/>
+            <a:r>
+              <a:rPr/>
+              <a:t>See: </a:t>
             </a:r>
             <a:r>
               <a:rPr>
                 <a:latin typeface="Courier"/>
               </a:rPr>
               <a:t>scripts/nix_expressions/02_native_positron_example/</a:t>
-            </a:r>
-          </a:p>
-          <a:p>
-            <a:pPr lvl="0"/>
-            <a:r>
-              <a:rPr/>
-              <a:t>Nix and </a:t>
-            </a:r>
-            <a:r>
-              <a:rPr>
-                <a:latin typeface="Courier"/>
-              </a:rPr>
-              <a:t>{targets}</a:t>
-            </a:r>
-            <a:r>
-              <a:rPr/>
-              <a:t>: </a:t>
-            </a:r>
-            <a:r>
-              <a:rPr>
-                <a:latin typeface="Courier"/>
-              </a:rPr>
-              <a:t>scripts/nix_expressions/03_nix_targets_pipeline</a:t>
-            </a:r>
-          </a:p>
-          <a:p>
-            <a:pPr lvl="0"/>
-            <a:r>
-              <a:rPr/>
-              <a:t>Nix and Docker: </a:t>
-            </a:r>
-            <a:r>
-              <a:rPr>
-                <a:latin typeface="Courier"/>
-              </a:rPr>
-              <a:t>scripts/nix_expressions/04_docker/</a:t>
-            </a:r>
-          </a:p>
-          <a:p>
-            <a:pPr lvl="0"/>
-            <a:r>
-              <a:rPr/>
-              <a:t>Nix and </a:t>
-            </a:r>
-            <a:r>
-              <a:rPr>
-                <a:latin typeface="Courier"/>
-              </a:rPr>
-              <a:t>{shiny}</a:t>
-            </a:r>
-            <a:r>
-              <a:rPr/>
-              <a:t>: </a:t>
-            </a:r>
-            <a:r>
-              <a:rPr>
-                <a:latin typeface="Courier"/>
-              </a:rPr>
-              <a:t>scripts/nix_expressions/05_shiny</a:t>
-            </a:r>
-          </a:p>
-          <a:p>
-            <a:pPr lvl="0"/>
-            <a:r>
-              <a:rPr/>
-              <a:t>GitHub Actions: </a:t>
-            </a:r>
-            <a:r>
-              <a:rPr>
-                <a:hlinkClick r:id="rId2"/>
-              </a:rPr>
-              <a:t>see here</a:t>
-            </a:r>
-          </a:p>
-          <a:p>
-            <a:pPr lvl="0"/>
-            <a:r>
-              <a:rPr/>
-              <a:t>Polyglot pipelines with </a:t>
-            </a:r>
-            <a:r>
-              <a:rPr>
-                <a:latin typeface="Courier"/>
-              </a:rPr>
-              <a:t>{rixpress}</a:t>
-            </a:r>
-            <a:r>
-              <a:rPr/>
-              <a:t>: </a:t>
-            </a:r>
-            <a:r>
-              <a:rPr>
-                <a:latin typeface="Courier"/>
-              </a:rPr>
-              <a:t>scripts/rixpress_demo/</a:t>
-            </a:r>
-          </a:p>
-          <a:p>
-            <a:pPr lvl="0"/>
-            <a:r>
-              <a:rPr/>
-              <a:t>Polyglot pipelines with </a:t>
-            </a:r>
-            <a:r>
-              <a:rPr b="1"/>
-              <a:t>T</a:t>
-            </a:r>
-            <a:r>
-              <a:rPr/>
-              <a:t> (bonus): </a:t>
-            </a:r>
-            <a:r>
-              <a:rPr>
-                <a:latin typeface="Courier"/>
-              </a:rPr>
-              <a:t>scripts/t_demo/r_py_xgboost_t/</a:t>
             </a:r>
           </a:p>
         </p:txBody>
@@ -5331,6 +5234,127 @@
             </a:pPr>
             <a:r>
               <a:rPr/>
+              <a:t>Demo</a:t>
+            </a:r>
+          </a:p>
+        </p:txBody>
+      </p:sp>
+      <p:sp>
+        <p:nvSpPr>
+          <p:cNvPr id="3" name="Content Placeholder 2"/>
+          <p:cNvSpPr>
+            <a:spLocks noGrp="1"/>
+          </p:cNvSpPr>
+          <p:nvPr>
+            <p:ph idx="1"/>
+          </p:nvPr>
+        </p:nvSpPr>
+        <p:spPr/>
+        <p:txBody>
+          <a:bodyPr/>
+          <a:lstStyle/>
+          <a:p>
+            <a:pPr lvl="0"/>
+            <a:r>
+              <a:rPr/>
+              <a:t>Basics: </a:t>
+            </a:r>
+            <a:r>
+              <a:rPr>
+                <a:latin typeface="Courier"/>
+              </a:rPr>
+              <a:t>scripts/nix_expressions/01_rix_intro/</a:t>
+            </a:r>
+          </a:p>
+          <a:p>
+            <a:pPr lvl="0"/>
+            <a:r>
+              <a:rPr/>
+              <a:t>Native VS Code/Positron on Windows: </a:t>
+            </a:r>
+            <a:r>
+              <a:rPr>
+                <a:latin typeface="Courier"/>
+              </a:rPr>
+              <a:t>scripts/nix_expressions/02_native_positron_example/</a:t>
+            </a:r>
+          </a:p>
+          <a:p>
+            <a:pPr lvl="0"/>
+            <a:r>
+              <a:rPr/>
+              <a:t>Nix and </a:t>
+            </a:r>
+            <a:r>
+              <a:rPr>
+                <a:latin typeface="Courier"/>
+              </a:rPr>
+              <a:t>{targets}</a:t>
+            </a:r>
+            <a:r>
+              <a:rPr/>
+              <a:t>: </a:t>
+            </a:r>
+            <a:r>
+              <a:rPr>
+                <a:latin typeface="Courier"/>
+              </a:rPr>
+              <a:t>scripts/nix_expressions/03_nix_targets_pipeline</a:t>
+            </a:r>
+          </a:p>
+          <a:p>
+            <a:pPr lvl="0"/>
+            <a:r>
+              <a:rPr/>
+              <a:t>Nix and Docker: </a:t>
+            </a:r>
+            <a:r>
+              <a:rPr>
+                <a:latin typeface="Courier"/>
+              </a:rPr>
+              <a:t>scripts/nix_expressions/04_docker/</a:t>
+            </a:r>
+          </a:p>
+          <a:p>
+            <a:pPr lvl="0"/>
+            <a:r>
+              <a:rPr/>
+              <a:t>Nix and </a:t>
+            </a:r>
+            <a:r>
+              <a:rPr>
+                <a:latin typeface="Courier"/>
+              </a:rPr>
+              <a:t>{shiny}</a:t>
+            </a:r>
+            <a:r>
+              <a:rPr/>
+              <a:t>: </a:t>
+            </a:r>
+            <a:r>
+              <a:rPr>
+                <a:latin typeface="Courier"/>
+              </a:rPr>
+              <a:t>scripts/nix_expressions/05_shiny</a:t>
+            </a:r>
+          </a:p>
+          <a:p>
+            <a:pPr lvl="0"/>
+            <a:r>
+              <a:rPr/>
+              <a:t>GitHub Actions: </a:t>
+            </a:r>
+            <a:r>
+              <a:rPr>
+                <a:hlinkClick r:id="rId2"/>
+              </a:rPr>
+              <a:t>see here</a:t>
+            </a:r>
+          </a:p>
+          <a:p>
+            <a:pPr lvl="0"/>
+            <a:r>
+              <a:rPr/>
               <a:t>Polyglot pipelines with </a:t>
             </a:r>
             <a:r>
@@ -5339,79 +5363,36 @@
               </a:rPr>
               <a:t>{rixpress}</a:t>
             </a:r>
-          </a:p>
-        </p:txBody>
-      </p:sp>
-      <p:sp>
-        <p:nvSpPr>
-          <p:cNvPr id="3" name="Content Placeholder 2"/>
-          <p:cNvSpPr>
-            <a:spLocks noGrp="1"/>
-          </p:cNvSpPr>
-          <p:nvPr>
-            <p:ph idx="1"/>
-          </p:nvPr>
-        </p:nvSpPr>
-        <p:spPr/>
-        <p:txBody>
-          <a:bodyPr/>
-          <a:lstStyle/>
-          <a:p>
-            <a:pPr lvl="0"/>
-            <a:r>
-              <a:rPr>
-                <a:latin typeface="Courier"/>
-              </a:rPr>
-              <a:t>{rixpress}</a:t>
-            </a:r>
-            <a:r>
-              <a:rPr/>
-              <a:t> allows chaining processing steps in R, Python and Julia</a:t>
-            </a:r>
-          </a:p>
-          <a:p>
-            <a:pPr lvl="0"/>
-            <a:r>
-              <a:rPr/>
-              <a:t>Uses </a:t>
-            </a:r>
-            <a:r>
-              <a:rPr>
-                <a:latin typeface="Courier"/>
-              </a:rPr>
-              <a:t>{rix}</a:t>
-            </a:r>
-            <a:r>
-              <a:rPr/>
-              <a:t> to create a reproducible (via Nix) execution environment for the pipeline</a:t>
-            </a:r>
-          </a:p>
-          <a:p>
-            <a:pPr lvl="0"/>
-            <a:r>
-              <a:rPr/>
-              <a:t>Each pipeline step is a </a:t>
+            <a:r>
+              <a:rPr/>
+              <a:t>: </a:t>
+            </a:r>
+            <a:r>
+              <a:rPr>
+                <a:latin typeface="Courier"/>
+              </a:rPr>
+              <a:t>scripts/rixpress_demo/</a:t>
+            </a:r>
+          </a:p>
+          <a:p>
+            <a:pPr lvl="0"/>
+            <a:r>
+              <a:rPr/>
+              <a:t>Polyglot pipelines with </a:t>
             </a:r>
             <a:r>
               <a:rPr b="1"/>
-              <a:t>Nix derivation</a:t>
-            </a:r>
-          </a:p>
-          <a:p>
-            <a:pPr lvl="0"/>
-            <a:r>
-              <a:rPr/>
-              <a:t>Data transfer: automatic via </a:t>
-            </a:r>
-            <a:r>
-              <a:rPr>
-                <a:latin typeface="Courier"/>
-              </a:rPr>
-              <a:t>reticulate</a:t>
-            </a:r>
-            <a:r>
-              <a:rPr/>
-              <a:t> or universal format (JSON)</a:t>
+              <a:t>T</a:t>
+            </a:r>
+            <a:r>
+              <a:rPr/>
+              <a:t> (bonus): </a:t>
+            </a:r>
+            <a:r>
+              <a:rPr>
+                <a:latin typeface="Courier"/>
+              </a:rPr>
+              <a:t>scripts/t_demo/r_py_xgboost_t/</a:t>
             </a:r>
           </a:p>
         </p:txBody>
@@ -5530,7 +5511,13 @@
             </a:pPr>
             <a:r>
               <a:rPr/>
-              <a:t>An example of a polyglot pipeline</a:t>
+              <a:t>Polyglot pipelines with </a:t>
+            </a:r>
+            <a:r>
+              <a:rPr>
+                <a:latin typeface="Courier"/>
+              </a:rPr>
+              <a:t>{rixpress}</a:t>
             </a:r>
           </a:p>
         </p:txBody>
@@ -5550,422 +5537,61 @@
           <a:bodyPr/>
           <a:lstStyle/>
           <a:p>
-            <a:pPr lvl="0" indent="0">
-              <a:buNone/>
-            </a:pPr>
-            <a:r>
-              <a:rPr>
-                <a:solidFill>
-                  <a:srgbClr val="4758AB"/>
-                </a:solidFill>
-                <a:latin typeface="Courier"/>
-              </a:rPr>
-              <a:t>list</a:t>
-            </a:r>
-            <a:r>
-              <a:rPr>
-                <a:solidFill>
-                  <a:srgbClr val="003B4F"/>
-                </a:solidFill>
-                <a:latin typeface="Courier"/>
-              </a:rPr>
-              <a:t>(</a:t>
-            </a:r>
-            <a:br/>
-            <a:r>
-              <a:rPr>
-                <a:solidFill>
-                  <a:srgbClr val="003B4F"/>
-                </a:solidFill>
-                <a:latin typeface="Courier"/>
-              </a:rPr>
-              <a:t>  </a:t>
-            </a:r>
-            <a:r>
-              <a:rPr>
-                <a:solidFill>
-                  <a:srgbClr val="4758AB"/>
-                </a:solidFill>
-                <a:latin typeface="Courier"/>
-              </a:rPr>
-              <a:t>rxp_py_file</a:t>
-            </a:r>
-            <a:r>
-              <a:rPr>
-                <a:solidFill>
-                  <a:srgbClr val="003B4F"/>
-                </a:solidFill>
-                <a:latin typeface="Courier"/>
-              </a:rPr>
-              <a:t>(…),    </a:t>
-            </a:r>
-            <a:r>
-              <a:rPr>
-                <a:solidFill>
-                  <a:srgbClr val="5E5E5E"/>
-                </a:solidFill>
-                <a:latin typeface="Courier"/>
-              </a:rPr>
-              <a:t># Read a CSV with Python</a:t>
-            </a:r>
-            <a:br/>
-            <a:r>
-              <a:rPr>
-                <a:solidFill>
-                  <a:srgbClr val="003B4F"/>
-                </a:solidFill>
-                <a:latin typeface="Courier"/>
-              </a:rPr>
-              <a:t>  </a:t>
-            </a:r>
-            <a:r>
-              <a:rPr>
-                <a:solidFill>
-                  <a:srgbClr val="4758AB"/>
-                </a:solidFill>
-                <a:latin typeface="Courier"/>
-              </a:rPr>
-              <a:t>rxp_py</a:t>
-            </a:r>
-            <a:r>
-              <a:rPr>
-                <a:solidFill>
-                  <a:srgbClr val="003B4F"/>
-                </a:solidFill>
-                <a:latin typeface="Courier"/>
-              </a:rPr>
-              <a:t>(…),         </a:t>
-            </a:r>
-            <a:r>
-              <a:rPr>
-                <a:solidFill>
-                  <a:srgbClr val="5E5E5E"/>
-                </a:solidFill>
-                <a:latin typeface="Courier"/>
-              </a:rPr>
-              <a:t># Filter with Polars</a:t>
-            </a:r>
-            <a:br/>
-            <a:r>
-              <a:rPr>
-                <a:solidFill>
-                  <a:srgbClr val="003B4F"/>
-                </a:solidFill>
-                <a:latin typeface="Courier"/>
-              </a:rPr>
-              <a:t>  </a:t>
-            </a:r>
-            <a:r>
-              <a:rPr>
-                <a:solidFill>
-                  <a:srgbClr val="4758AB"/>
-                </a:solidFill>
-                <a:latin typeface="Courier"/>
-              </a:rPr>
-              <a:t>rxp_py2r</a:t>
-            </a:r>
-            <a:r>
-              <a:rPr>
-                <a:solidFill>
-                  <a:srgbClr val="003B4F"/>
-                </a:solidFill>
-                <a:latin typeface="Courier"/>
-              </a:rPr>
-              <a:t>(…),       </a:t>
-            </a:r>
-            <a:r>
-              <a:rPr>
-                <a:solidFill>
-                  <a:srgbClr val="5E5E5E"/>
-                </a:solidFill>
-                <a:latin typeface="Courier"/>
-              </a:rPr>
-              <a:t># Python → R transfer</a:t>
-            </a:r>
-            <a:br/>
-            <a:r>
-              <a:rPr>
-                <a:solidFill>
-                  <a:srgbClr val="003B4F"/>
-                </a:solidFill>
-                <a:latin typeface="Courier"/>
-              </a:rPr>
-              <a:t>  </a:t>
-            </a:r>
-            <a:r>
-              <a:rPr>
-                <a:solidFill>
-                  <a:srgbClr val="4758AB"/>
-                </a:solidFill>
-                <a:latin typeface="Courier"/>
-              </a:rPr>
-              <a:t>rxp_r</a:t>
-            </a:r>
-            <a:r>
-              <a:rPr>
-                <a:solidFill>
-                  <a:srgbClr val="003B4F"/>
-                </a:solidFill>
-                <a:latin typeface="Courier"/>
-              </a:rPr>
-              <a:t>(…),          </a:t>
-            </a:r>
-            <a:r>
-              <a:rPr>
-                <a:solidFill>
-                  <a:srgbClr val="5E5E5E"/>
-                </a:solidFill>
-                <a:latin typeface="Courier"/>
-              </a:rPr>
-              <a:t># Transformation in R</a:t>
-            </a:r>
-            <a:br/>
-            <a:r>
-              <a:rPr>
-                <a:solidFill>
-                  <a:srgbClr val="003B4F"/>
-                </a:solidFill>
-                <a:latin typeface="Courier"/>
-              </a:rPr>
-              <a:t>  </a:t>
-            </a:r>
-            <a:r>
-              <a:rPr>
-                <a:solidFill>
-                  <a:srgbClr val="4758AB"/>
-                </a:solidFill>
-                <a:latin typeface="Courier"/>
-              </a:rPr>
-              <a:t>rxp_r2py</a:t>
-            </a:r>
-            <a:r>
-              <a:rPr>
-                <a:solidFill>
-                  <a:srgbClr val="003B4F"/>
-                </a:solidFill>
-                <a:latin typeface="Courier"/>
-              </a:rPr>
-              <a:t>(…),       </a:t>
-            </a:r>
-            <a:r>
-              <a:rPr>
-                <a:solidFill>
-                  <a:srgbClr val="5E5E5E"/>
-                </a:solidFill>
-                <a:latin typeface="Courier"/>
-              </a:rPr>
-              <a:t># R → Python transfer</a:t>
-            </a:r>
-            <a:br/>
-            <a:r>
-              <a:rPr>
-                <a:solidFill>
-                  <a:srgbClr val="003B4F"/>
-                </a:solidFill>
-                <a:latin typeface="Courier"/>
-              </a:rPr>
-              <a:t>  </a:t>
-            </a:r>
-            <a:r>
-              <a:rPr>
-                <a:solidFill>
-                  <a:srgbClr val="4758AB"/>
-                </a:solidFill>
-                <a:latin typeface="Courier"/>
-              </a:rPr>
-              <a:t>rxp_py</a:t>
-            </a:r>
-            <a:r>
-              <a:rPr>
-                <a:solidFill>
-                  <a:srgbClr val="003B4F"/>
-                </a:solidFill>
-                <a:latin typeface="Courier"/>
-              </a:rPr>
-              <a:t>(…),         </a:t>
-            </a:r>
-            <a:r>
-              <a:rPr>
-                <a:solidFill>
-                  <a:srgbClr val="5E5E5E"/>
-                </a:solidFill>
-                <a:latin typeface="Courier"/>
-              </a:rPr>
-              <a:t># Another Python step</a:t>
-            </a:r>
-            <a:br/>
-            <a:r>
-              <a:rPr>
-                <a:solidFill>
-                  <a:srgbClr val="003B4F"/>
-                </a:solidFill>
-                <a:latin typeface="Courier"/>
-              </a:rPr>
-              <a:t>  </a:t>
-            </a:r>
-            <a:r>
-              <a:rPr>
-                <a:solidFill>
-                  <a:srgbClr val="4758AB"/>
-                </a:solidFill>
-                <a:latin typeface="Courier"/>
-              </a:rPr>
-              <a:t>rxp_py2r</a:t>
-            </a:r>
-            <a:r>
-              <a:rPr>
-                <a:solidFill>
-                  <a:srgbClr val="003B4F"/>
-                </a:solidFill>
-                <a:latin typeface="Courier"/>
-              </a:rPr>
-              <a:t>(…),       </a:t>
-            </a:r>
-            <a:r>
-              <a:rPr>
-                <a:solidFill>
-                  <a:srgbClr val="5E5E5E"/>
-                </a:solidFill>
-                <a:latin typeface="Courier"/>
-              </a:rPr>
-              <a:t># Back to R</a:t>
-            </a:r>
-            <a:br/>
-            <a:r>
-              <a:rPr>
-                <a:solidFill>
-                  <a:srgbClr val="003B4F"/>
-                </a:solidFill>
-                <a:latin typeface="Courier"/>
-              </a:rPr>
-              <a:t>  </a:t>
-            </a:r>
-            <a:r>
-              <a:rPr>
-                <a:solidFill>
-                  <a:srgbClr val="4758AB"/>
-                </a:solidFill>
-                <a:latin typeface="Courier"/>
-              </a:rPr>
-              <a:t>rxp_r</a:t>
-            </a:r>
-            <a:r>
-              <a:rPr>
-                <a:solidFill>
-                  <a:srgbClr val="003B4F"/>
-                </a:solidFill>
-                <a:latin typeface="Courier"/>
-              </a:rPr>
-              <a:t>(…)           </a:t>
-            </a:r>
-            <a:r>
-              <a:rPr>
-                <a:solidFill>
-                  <a:srgbClr val="5E5E5E"/>
-                </a:solidFill>
-                <a:latin typeface="Courier"/>
-              </a:rPr>
-              <a:t># Final step</a:t>
-            </a:r>
-            <a:br/>
-            <a:r>
-              <a:rPr>
-                <a:solidFill>
-                  <a:srgbClr val="003B4F"/>
-                </a:solidFill>
-                <a:latin typeface="Courier"/>
-              </a:rPr>
-              <a:t>) </a:t>
-            </a:r>
-            <a:r>
-              <a:rPr>
-                <a:solidFill>
-                  <a:srgbClr val="5E5E5E"/>
-                </a:solidFill>
-                <a:latin typeface="Courier"/>
-              </a:rPr>
-              <a:t>|&gt;</a:t>
-            </a:r>
-            <a:r>
-              <a:rPr>
-                <a:solidFill>
-                  <a:srgbClr val="003B4F"/>
-                </a:solidFill>
-                <a:latin typeface="Courier"/>
-              </a:rPr>
-              <a:t> </a:t>
-            </a:r>
-            <a:r>
-              <a:rPr>
-                <a:solidFill>
-                  <a:srgbClr val="4758AB"/>
-                </a:solidFill>
-                <a:latin typeface="Courier"/>
-              </a:rPr>
-              <a:t>rxp_populate</a:t>
-            </a:r>
-            <a:r>
-              <a:rPr>
-                <a:solidFill>
-                  <a:srgbClr val="003B4F"/>
-                </a:solidFill>
-                <a:latin typeface="Courier"/>
-              </a:rPr>
-              <a:t>()</a:t>
-            </a:r>
-          </a:p>
-          <a:p>
-            <a:pPr lvl="0"/>
-            <a:r>
-              <a:rPr/>
-              <a:t>Each step is named and typed (</a:t>
-            </a:r>
-            <a:r>
-              <a:rPr>
-                <a:latin typeface="Courier"/>
-              </a:rPr>
-              <a:t>py</a:t>
-            </a:r>
-            <a:r>
-              <a:rPr/>
-              <a:t>, </a:t>
-            </a:r>
-            <a:r>
-              <a:rPr>
-                <a:latin typeface="Courier"/>
-              </a:rPr>
-              <a:t>r</a:t>
-            </a:r>
-            <a:r>
-              <a:rPr/>
-              <a:t>, </a:t>
-            </a:r>
-            <a:r>
-              <a:rPr>
-                <a:latin typeface="Courier"/>
-              </a:rPr>
-              <a:t>r2py</a:t>
-            </a:r>
-            <a:r>
-              <a:rPr/>
-              <a:t>, etc.)</a:t>
-            </a:r>
-          </a:p>
-          <a:p>
-            <a:pPr lvl="0"/>
-            <a:r>
-              <a:rPr/>
-              <a:t>Ability to add files (</a:t>
-            </a:r>
-            <a:r>
-              <a:rPr>
-                <a:latin typeface="Courier"/>
-              </a:rPr>
-              <a:t>functions.R</a:t>
-            </a:r>
-            <a:r>
-              <a:rPr/>
-              <a:t>, images…)</a:t>
+            <a:pPr lvl="0"/>
+            <a:r>
+              <a:rPr>
+                <a:latin typeface="Courier"/>
+              </a:rPr>
+              <a:t>{rixpress}</a:t>
+            </a:r>
+            <a:r>
+              <a:rPr/>
+              <a:t> allows chaining processing steps in R, Python and Julia</a:t>
+            </a:r>
+          </a:p>
+          <a:p>
+            <a:pPr lvl="0"/>
+            <a:r>
+              <a:rPr/>
+              <a:t>Uses </a:t>
+            </a:r>
+            <a:r>
+              <a:rPr>
+                <a:latin typeface="Courier"/>
+              </a:rPr>
+              <a:t>{rix}</a:t>
+            </a:r>
+            <a:r>
+              <a:rPr/>
+              <a:t> to create a reproducible (via Nix) execution environment for the pipeline</a:t>
+            </a:r>
+          </a:p>
+          <a:p>
+            <a:pPr lvl="0"/>
+            <a:r>
+              <a:rPr/>
+              <a:t>Each pipeline step is a </a:t>
+            </a:r>
+            <a:r>
+              <a:rPr b="1"/>
+              <a:t>Nix derivation</a:t>
+            </a:r>
+          </a:p>
+          <a:p>
+            <a:pPr lvl="0"/>
+            <a:r>
+              <a:rPr/>
+              <a:t>Data transfer: automatic via </a:t>
+            </a:r>
+            <a:r>
+              <a:rPr>
+                <a:latin typeface="Courier"/>
+              </a:rPr>
+              <a:t>reticulate</a:t>
+            </a:r>
+            <a:r>
+              <a:rPr/>
+              <a:t> or universal format (JSON)</a:t>
             </a:r>
           </a:p>
         </p:txBody>
@@ -6012,7 +5638,7 @@
             </a:pPr>
             <a:r>
               <a:rPr/>
-              <a:t>To learn more about rixpress:</a:t>
+              <a:t>An example of a polyglot pipeline</a:t>
             </a:r>
           </a:p>
         </p:txBody>
@@ -6032,43 +5658,422 @@
           <a:bodyPr/>
           <a:lstStyle/>
           <a:p>
-            <a:pPr lvl="0"/>
-            <a:r>
-              <a:rPr>
-                <a:hlinkClick r:id="rId2"/>
-              </a:rPr>
-              <a:t>GitHub Repository</a:t>
-            </a:r>
-          </a:p>
-          <a:p>
-            <a:pPr lvl="0"/>
-            <a:r>
-              <a:rPr>
-                <a:hlinkClick r:id="rId3"/>
-              </a:rPr>
-              <a:t>Website</a:t>
-            </a:r>
-          </a:p>
-          <a:p>
-            <a:pPr lvl="0"/>
-            <a:r>
-              <a:rPr>
-                <a:hlinkClick r:id="rId4"/>
-              </a:rPr>
-              <a:t>Repository of demos</a:t>
-            </a:r>
-          </a:p>
-          <a:p>
-            <a:pPr lvl="0"/>
-            <a:r>
-              <a:rPr/>
-              <a:t>Local demo in this repo: </a:t>
-            </a:r>
-            <a:r>
-              <a:rPr>
-                <a:latin typeface="Courier"/>
-              </a:rPr>
-              <a:t>scripts/rixpress_demo/</a:t>
+            <a:pPr lvl="0" indent="0">
+              <a:buNone/>
+            </a:pPr>
+            <a:r>
+              <a:rPr>
+                <a:solidFill>
+                  <a:srgbClr val="4758AB"/>
+                </a:solidFill>
+                <a:latin typeface="Courier"/>
+              </a:rPr>
+              <a:t>list</a:t>
+            </a:r>
+            <a:r>
+              <a:rPr>
+                <a:solidFill>
+                  <a:srgbClr val="003B4F"/>
+                </a:solidFill>
+                <a:latin typeface="Courier"/>
+              </a:rPr>
+              <a:t>(</a:t>
+            </a:r>
+            <a:br/>
+            <a:r>
+              <a:rPr>
+                <a:solidFill>
+                  <a:srgbClr val="003B4F"/>
+                </a:solidFill>
+                <a:latin typeface="Courier"/>
+              </a:rPr>
+              <a:t>  </a:t>
+            </a:r>
+            <a:r>
+              <a:rPr>
+                <a:solidFill>
+                  <a:srgbClr val="4758AB"/>
+                </a:solidFill>
+                <a:latin typeface="Courier"/>
+              </a:rPr>
+              <a:t>rxp_py_file</a:t>
+            </a:r>
+            <a:r>
+              <a:rPr>
+                <a:solidFill>
+                  <a:srgbClr val="003B4F"/>
+                </a:solidFill>
+                <a:latin typeface="Courier"/>
+              </a:rPr>
+              <a:t>(…),    </a:t>
+            </a:r>
+            <a:r>
+              <a:rPr>
+                <a:solidFill>
+                  <a:srgbClr val="5E5E5E"/>
+                </a:solidFill>
+                <a:latin typeface="Courier"/>
+              </a:rPr>
+              <a:t># Read a CSV with Python</a:t>
+            </a:r>
+            <a:br/>
+            <a:r>
+              <a:rPr>
+                <a:solidFill>
+                  <a:srgbClr val="003B4F"/>
+                </a:solidFill>
+                <a:latin typeface="Courier"/>
+              </a:rPr>
+              <a:t>  </a:t>
+            </a:r>
+            <a:r>
+              <a:rPr>
+                <a:solidFill>
+                  <a:srgbClr val="4758AB"/>
+                </a:solidFill>
+                <a:latin typeface="Courier"/>
+              </a:rPr>
+              <a:t>rxp_py</a:t>
+            </a:r>
+            <a:r>
+              <a:rPr>
+                <a:solidFill>
+                  <a:srgbClr val="003B4F"/>
+                </a:solidFill>
+                <a:latin typeface="Courier"/>
+              </a:rPr>
+              <a:t>(…),         </a:t>
+            </a:r>
+            <a:r>
+              <a:rPr>
+                <a:solidFill>
+                  <a:srgbClr val="5E5E5E"/>
+                </a:solidFill>
+                <a:latin typeface="Courier"/>
+              </a:rPr>
+              <a:t># Filter with Polars</a:t>
+            </a:r>
+            <a:br/>
+            <a:r>
+              <a:rPr>
+                <a:solidFill>
+                  <a:srgbClr val="003B4F"/>
+                </a:solidFill>
+                <a:latin typeface="Courier"/>
+              </a:rPr>
+              <a:t>  </a:t>
+            </a:r>
+            <a:r>
+              <a:rPr>
+                <a:solidFill>
+                  <a:srgbClr val="4758AB"/>
+                </a:solidFill>
+                <a:latin typeface="Courier"/>
+              </a:rPr>
+              <a:t>rxp_py2r</a:t>
+            </a:r>
+            <a:r>
+              <a:rPr>
+                <a:solidFill>
+                  <a:srgbClr val="003B4F"/>
+                </a:solidFill>
+                <a:latin typeface="Courier"/>
+              </a:rPr>
+              <a:t>(…),       </a:t>
+            </a:r>
+            <a:r>
+              <a:rPr>
+                <a:solidFill>
+                  <a:srgbClr val="5E5E5E"/>
+                </a:solidFill>
+                <a:latin typeface="Courier"/>
+              </a:rPr>
+              <a:t># Python → R transfer</a:t>
+            </a:r>
+            <a:br/>
+            <a:r>
+              <a:rPr>
+                <a:solidFill>
+                  <a:srgbClr val="003B4F"/>
+                </a:solidFill>
+                <a:latin typeface="Courier"/>
+              </a:rPr>
+              <a:t>  </a:t>
+            </a:r>
+            <a:r>
+              <a:rPr>
+                <a:solidFill>
+                  <a:srgbClr val="4758AB"/>
+                </a:solidFill>
+                <a:latin typeface="Courier"/>
+              </a:rPr>
+              <a:t>rxp_r</a:t>
+            </a:r>
+            <a:r>
+              <a:rPr>
+                <a:solidFill>
+                  <a:srgbClr val="003B4F"/>
+                </a:solidFill>
+                <a:latin typeface="Courier"/>
+              </a:rPr>
+              <a:t>(…),          </a:t>
+            </a:r>
+            <a:r>
+              <a:rPr>
+                <a:solidFill>
+                  <a:srgbClr val="5E5E5E"/>
+                </a:solidFill>
+                <a:latin typeface="Courier"/>
+              </a:rPr>
+              <a:t># Transformation in R</a:t>
+            </a:r>
+            <a:br/>
+            <a:r>
+              <a:rPr>
+                <a:solidFill>
+                  <a:srgbClr val="003B4F"/>
+                </a:solidFill>
+                <a:latin typeface="Courier"/>
+              </a:rPr>
+              <a:t>  </a:t>
+            </a:r>
+            <a:r>
+              <a:rPr>
+                <a:solidFill>
+                  <a:srgbClr val="4758AB"/>
+                </a:solidFill>
+                <a:latin typeface="Courier"/>
+              </a:rPr>
+              <a:t>rxp_r2py</a:t>
+            </a:r>
+            <a:r>
+              <a:rPr>
+                <a:solidFill>
+                  <a:srgbClr val="003B4F"/>
+                </a:solidFill>
+                <a:latin typeface="Courier"/>
+              </a:rPr>
+              <a:t>(…),       </a:t>
+            </a:r>
+            <a:r>
+              <a:rPr>
+                <a:solidFill>
+                  <a:srgbClr val="5E5E5E"/>
+                </a:solidFill>
+                <a:latin typeface="Courier"/>
+              </a:rPr>
+              <a:t># R → Python transfer</a:t>
+            </a:r>
+            <a:br/>
+            <a:r>
+              <a:rPr>
+                <a:solidFill>
+                  <a:srgbClr val="003B4F"/>
+                </a:solidFill>
+                <a:latin typeface="Courier"/>
+              </a:rPr>
+              <a:t>  </a:t>
+            </a:r>
+            <a:r>
+              <a:rPr>
+                <a:solidFill>
+                  <a:srgbClr val="4758AB"/>
+                </a:solidFill>
+                <a:latin typeface="Courier"/>
+              </a:rPr>
+              <a:t>rxp_py</a:t>
+            </a:r>
+            <a:r>
+              <a:rPr>
+                <a:solidFill>
+                  <a:srgbClr val="003B4F"/>
+                </a:solidFill>
+                <a:latin typeface="Courier"/>
+              </a:rPr>
+              <a:t>(…),         </a:t>
+            </a:r>
+            <a:r>
+              <a:rPr>
+                <a:solidFill>
+                  <a:srgbClr val="5E5E5E"/>
+                </a:solidFill>
+                <a:latin typeface="Courier"/>
+              </a:rPr>
+              <a:t># Another Python step</a:t>
+            </a:r>
+            <a:br/>
+            <a:r>
+              <a:rPr>
+                <a:solidFill>
+                  <a:srgbClr val="003B4F"/>
+                </a:solidFill>
+                <a:latin typeface="Courier"/>
+              </a:rPr>
+              <a:t>  </a:t>
+            </a:r>
+            <a:r>
+              <a:rPr>
+                <a:solidFill>
+                  <a:srgbClr val="4758AB"/>
+                </a:solidFill>
+                <a:latin typeface="Courier"/>
+              </a:rPr>
+              <a:t>rxp_py2r</a:t>
+            </a:r>
+            <a:r>
+              <a:rPr>
+                <a:solidFill>
+                  <a:srgbClr val="003B4F"/>
+                </a:solidFill>
+                <a:latin typeface="Courier"/>
+              </a:rPr>
+              <a:t>(…),       </a:t>
+            </a:r>
+            <a:r>
+              <a:rPr>
+                <a:solidFill>
+                  <a:srgbClr val="5E5E5E"/>
+                </a:solidFill>
+                <a:latin typeface="Courier"/>
+              </a:rPr>
+              <a:t># Back to R</a:t>
+            </a:r>
+            <a:br/>
+            <a:r>
+              <a:rPr>
+                <a:solidFill>
+                  <a:srgbClr val="003B4F"/>
+                </a:solidFill>
+                <a:latin typeface="Courier"/>
+              </a:rPr>
+              <a:t>  </a:t>
+            </a:r>
+            <a:r>
+              <a:rPr>
+                <a:solidFill>
+                  <a:srgbClr val="4758AB"/>
+                </a:solidFill>
+                <a:latin typeface="Courier"/>
+              </a:rPr>
+              <a:t>rxp_r</a:t>
+            </a:r>
+            <a:r>
+              <a:rPr>
+                <a:solidFill>
+                  <a:srgbClr val="003B4F"/>
+                </a:solidFill>
+                <a:latin typeface="Courier"/>
+              </a:rPr>
+              <a:t>(…)           </a:t>
+            </a:r>
+            <a:r>
+              <a:rPr>
+                <a:solidFill>
+                  <a:srgbClr val="5E5E5E"/>
+                </a:solidFill>
+                <a:latin typeface="Courier"/>
+              </a:rPr>
+              <a:t># Final step</a:t>
+            </a:r>
+            <a:br/>
+            <a:r>
+              <a:rPr>
+                <a:solidFill>
+                  <a:srgbClr val="003B4F"/>
+                </a:solidFill>
+                <a:latin typeface="Courier"/>
+              </a:rPr>
+              <a:t>) </a:t>
+            </a:r>
+            <a:r>
+              <a:rPr>
+                <a:solidFill>
+                  <a:srgbClr val="5E5E5E"/>
+                </a:solidFill>
+                <a:latin typeface="Courier"/>
+              </a:rPr>
+              <a:t>|&gt;</a:t>
+            </a:r>
+            <a:r>
+              <a:rPr>
+                <a:solidFill>
+                  <a:srgbClr val="003B4F"/>
+                </a:solidFill>
+                <a:latin typeface="Courier"/>
+              </a:rPr>
+              <a:t> </a:t>
+            </a:r>
+            <a:r>
+              <a:rPr>
+                <a:solidFill>
+                  <a:srgbClr val="4758AB"/>
+                </a:solidFill>
+                <a:latin typeface="Courier"/>
+              </a:rPr>
+              <a:t>rxp_populate</a:t>
+            </a:r>
+            <a:r>
+              <a:rPr>
+                <a:solidFill>
+                  <a:srgbClr val="003B4F"/>
+                </a:solidFill>
+                <a:latin typeface="Courier"/>
+              </a:rPr>
+              <a:t>()</a:t>
+            </a:r>
+          </a:p>
+          <a:p>
+            <a:pPr lvl="0"/>
+            <a:r>
+              <a:rPr/>
+              <a:t>Each step is named and typed (</a:t>
+            </a:r>
+            <a:r>
+              <a:rPr>
+                <a:latin typeface="Courier"/>
+              </a:rPr>
+              <a:t>py</a:t>
+            </a:r>
+            <a:r>
+              <a:rPr/>
+              <a:t>, </a:t>
+            </a:r>
+            <a:r>
+              <a:rPr>
+                <a:latin typeface="Courier"/>
+              </a:rPr>
+              <a:t>r</a:t>
+            </a:r>
+            <a:r>
+              <a:rPr/>
+              <a:t>, </a:t>
+            </a:r>
+            <a:r>
+              <a:rPr>
+                <a:latin typeface="Courier"/>
+              </a:rPr>
+              <a:t>r2py</a:t>
+            </a:r>
+            <a:r>
+              <a:rPr/>
+              <a:t>, etc.)</a:t>
+            </a:r>
+          </a:p>
+          <a:p>
+            <a:pPr lvl="0"/>
+            <a:r>
+              <a:rPr/>
+              <a:t>Ability to add files (</a:t>
+            </a:r>
+            <a:r>
+              <a:rPr>
+                <a:latin typeface="Courier"/>
+              </a:rPr>
+              <a:t>functions.R</a:t>
+            </a:r>
+            <a:r>
+              <a:rPr/>
+              <a:t>, images…)</a:t>
             </a:r>
           </a:p>
         </p:txBody>
@@ -6105,12 +6110,7 @@
             <p:ph type="title"/>
           </p:nvPr>
         </p:nvSpPr>
-        <p:spPr>
-          <a:xfrm>
-            <a:off x="722313" y="3305176"/>
-            <a:ext cx="7772400" cy="1021556"/>
-          </a:xfrm>
-        </p:spPr>
+        <p:spPr/>
         <p:txBody>
           <a:bodyPr/>
           <a:lstStyle/>
@@ -6120,7 +6120,63 @@
             </a:pPr>
             <a:r>
               <a:rPr/>
-              <a:t>If time allows…</a:t>
+              <a:t>To learn more about rixpress:</a:t>
+            </a:r>
+          </a:p>
+        </p:txBody>
+      </p:sp>
+      <p:sp>
+        <p:nvSpPr>
+          <p:cNvPr id="3" name="Content Placeholder 2"/>
+          <p:cNvSpPr>
+            <a:spLocks noGrp="1"/>
+          </p:cNvSpPr>
+          <p:nvPr>
+            <p:ph idx="1"/>
+          </p:nvPr>
+        </p:nvSpPr>
+        <p:spPr/>
+        <p:txBody>
+          <a:bodyPr/>
+          <a:lstStyle/>
+          <a:p>
+            <a:pPr lvl="0"/>
+            <a:r>
+              <a:rPr>
+                <a:hlinkClick r:id="rId2"/>
+              </a:rPr>
+              <a:t>GitHub Repository</a:t>
+            </a:r>
+          </a:p>
+          <a:p>
+            <a:pPr lvl="0"/>
+            <a:r>
+              <a:rPr>
+                <a:hlinkClick r:id="rId3"/>
+              </a:rPr>
+              <a:t>Website</a:t>
+            </a:r>
+          </a:p>
+          <a:p>
+            <a:pPr lvl="0"/>
+            <a:r>
+              <a:rPr>
+                <a:hlinkClick r:id="rId4"/>
+              </a:rPr>
+              <a:t>Repository of demos</a:t>
+            </a:r>
+          </a:p>
+          <a:p>
+            <a:pPr lvl="0"/>
+            <a:r>
+              <a:rPr/>
+              <a:t>Local demo in this repo: </a:t>
+            </a:r>
+            <a:r>
+              <a:rPr>
+                <a:latin typeface="Courier"/>
+              </a:rPr>
+              <a:t>scripts/rixpress_demo/</a:t>
             </a:r>
           </a:p>
         </p:txBody>
@@ -6157,7 +6213,12 @@
             <p:ph type="title"/>
           </p:nvPr>
         </p:nvSpPr>
-        <p:spPr/>
+        <p:spPr>
+          <a:xfrm>
+            <a:off x="722313" y="3305176"/>
+            <a:ext cx="7772400" cy="1021556"/>
+          </a:xfrm>
+        </p:spPr>
         <p:txBody>
           <a:bodyPr/>
           <a:lstStyle/>
@@ -6167,51 +6228,7 @@
             </a:pPr>
             <a:r>
               <a:rPr/>
-              <a:t>Bonus: T, a new DSL for polyglot data science</a:t>
-            </a:r>
-          </a:p>
-        </p:txBody>
-      </p:sp>
-      <p:sp>
-        <p:nvSpPr>
-          <p:cNvPr id="3" name="Content Placeholder 2"/>
-          <p:cNvSpPr>
-            <a:spLocks noGrp="1"/>
-          </p:cNvSpPr>
-          <p:nvPr>
-            <p:ph idx="1"/>
-          </p:nvPr>
-        </p:nvSpPr>
-        <p:spPr/>
-        <p:txBody>
-          <a:bodyPr/>
-          <a:lstStyle/>
-          <a:p>
-            <a:pPr lvl="0"/>
-            <a:r>
-              <a:rPr/>
-              <a:t>Reproducibility is often an afterthought, with ad-hoc tools</a:t>
-            </a:r>
-          </a:p>
-          <a:p>
-            <a:pPr lvl="0"/>
-            <a:r>
-              <a:rPr/>
-              <a:t>Nix eases the pain, but humans have to play ball! (biggest challenge)</a:t>
-            </a:r>
-          </a:p>
-          <a:p>
-            <a:pPr lvl="0"/>
-            <a:r>
-              <a:rPr/>
-              <a:t>What could a “reproducible by design” language look like?</a:t>
-            </a:r>
-          </a:p>
-          <a:p>
-            <a:pPr lvl="0"/>
-            <a:r>
-              <a:rPr/>
-              <a:t>This is T, a language whose package manager is Nix and pipelines are first-class citizens</a:t>
+              <a:t>If time allows…</a:t>
             </a:r>
           </a:p>
         </p:txBody>
@@ -6258,7 +6275,7 @@
             </a:pPr>
             <a:r>
               <a:rPr/>
-              <a:t>T is reproducible by design</a:t>
+              <a:t>Bonus: T, a new DSL for polyglot data science</a:t>
             </a:r>
           </a:p>
         </p:txBody>
@@ -6281,62 +6298,28 @@
             <a:pPr lvl="0"/>
             <a:r>
               <a:rPr/>
-              <a:t>A new T project is a Nix project:</a:t>
-            </a:r>
-          </a:p>
-          <a:p>
-            <a:pPr lvl="0" indent="0" marL="0">
-              <a:buNone/>
-            </a:pPr>
-            <a:r>
-              <a:rPr/>
-              <a:t>. . .</a:t>
-            </a:r>
-          </a:p>
-          <a:p>
-            <a:pPr lvl="0" indent="0">
-              <a:buNone/>
-            </a:pPr>
-            <a:r>
-              <a:rPr>
-                <a:solidFill>
-                  <a:srgbClr val="003B4F"/>
-                </a:solidFill>
-                <a:latin typeface="Courier"/>
-              </a:rPr>
-              <a:t>nix shell github:b-rodrigues/tlang</a:t>
-            </a:r>
-          </a:p>
-          <a:p>
-            <a:pPr lvl="0" indent="0" marL="0">
-              <a:buNone/>
-            </a:pPr>
-            <a:r>
-              <a:rPr/>
-              <a:t>. . .</a:t>
-            </a:r>
-          </a:p>
-          <a:p>
-            <a:pPr lvl="0" indent="0">
-              <a:buNone/>
-            </a:pPr>
-            <a:r>
-              <a:rPr>
-                <a:solidFill>
-                  <a:srgbClr val="003B4F"/>
-                </a:solidFill>
-                <a:latin typeface="Courier"/>
-              </a:rPr>
-              <a:t>t init </a:t>
-            </a:r>
-            <a:r>
-              <a:rPr>
-                <a:solidFill>
-                  <a:srgbClr val="657422"/>
-                </a:solidFill>
-                <a:latin typeface="Courier"/>
-              </a:rPr>
-              <a:t>--project</a:t>
+              <a:t>Reproducibility is often an afterthought, with ad-hoc tools</a:t>
+            </a:r>
+          </a:p>
+          <a:p>
+            <a:pPr lvl="0"/>
+            <a:r>
+              <a:rPr/>
+              <a:t>Nix eases the pain, but humans have to play ball! (biggest challenge)</a:t>
+            </a:r>
+          </a:p>
+          <a:p>
+            <a:pPr lvl="0"/>
+            <a:r>
+              <a:rPr/>
+              <a:t>What could a “reproducible by design” language look like?</a:t>
+            </a:r>
+          </a:p>
+          <a:p>
+            <a:pPr lvl="0"/>
+            <a:r>
+              <a:rPr/>
+              <a:t>This is T, a language whose package manager is Nix and pipelines are first-class citizens</a:t>
             </a:r>
           </a:p>
         </p:txBody>
@@ -6403,24 +6386,65 @@
           <a:bodyPr/>
           <a:lstStyle/>
           <a:p>
+            <a:pPr lvl="0"/>
+            <a:r>
+              <a:rPr/>
+              <a:t>A new T project is a Nix project:</a:t>
+            </a:r>
+          </a:p>
+          <a:p>
+            <a:pPr lvl="0" indent="0" marL="0">
+              <a:buNone/>
+            </a:pPr>
+            <a:r>
+              <a:rPr/>
+              <a:t>. . .</a:t>
+            </a:r>
+          </a:p>
+          <a:p>
             <a:pPr lvl="0" indent="0">
               <a:buNone/>
             </a:pPr>
             <a:r>
               <a:rPr>
-                <a:latin typeface="Courier"/>
-              </a:rPr>
-              <a:t>my_analysis/
-├── tproject.toml       # Project configuration and dependencies
-├── flake.nix           # Reproducible environment definition
-├── README.md           # Project overview
-├── AGENTS.md           # Onboarding guide for AI Agents
-├── T-LANGUAGE-REFERENCE.md # Tiered language reference for LLMs (git-ignored)
-├── src/
-│   └── pipeline.t      # Your main analysis script
-├── data/               # Place your raw data files here
-├── outputs/            # Output directory for results
-└── tests/              # Unit tests for your analysis</a:t>
+                <a:solidFill>
+                  <a:srgbClr val="003B4F"/>
+                </a:solidFill>
+                <a:latin typeface="Courier"/>
+              </a:rPr>
+              <a:t>nix shell github:b-rodrigues/tlang</a:t>
+            </a:r>
+          </a:p>
+          <a:p>
+            <a:pPr lvl="0" indent="0" marL="0">
+              <a:buNone/>
+            </a:pPr>
+            <a:r>
+              <a:rPr/>
+              <a:t>. . .</a:t>
+            </a:r>
+          </a:p>
+          <a:p>
+            <a:pPr lvl="0" indent="0">
+              <a:buNone/>
+            </a:pPr>
+            <a:r>
+              <a:rPr>
+                <a:solidFill>
+                  <a:srgbClr val="003B4F"/>
+                </a:solidFill>
+                <a:latin typeface="Courier"/>
+              </a:rPr>
+              <a:t>t init </a:t>
+            </a:r>
+            <a:r>
+              <a:rPr>
+                <a:solidFill>
+                  <a:srgbClr val="657422"/>
+                </a:solidFill>
+                <a:latin typeface="Courier"/>
+              </a:rPr>
+              <a:t>--project</a:t>
             </a:r>
           </a:p>
         </p:txBody>
@@ -6487,72 +6511,24 @@
           <a:bodyPr/>
           <a:lstStyle/>
           <a:p>
-            <a:pPr lvl="0"/>
-            <a:r>
-              <a:rPr/>
-              <a:t>Add R, Python or Julia dependencies to </a:t>
-            </a:r>
-            <a:r>
-              <a:rPr>
-                <a:latin typeface="Courier"/>
-              </a:rPr>
-              <a:t>tproject.toml</a:t>
-            </a:r>
-          </a:p>
-          <a:p>
-            <a:pPr lvl="0"/>
-            <a:r>
-              <a:rPr/>
-              <a:t>Run </a:t>
-            </a:r>
-            <a:r>
-              <a:rPr>
-                <a:latin typeface="Courier"/>
-              </a:rPr>
-              <a:t>t update</a:t>
-            </a:r>
-          </a:p>
-          <a:p>
-            <a:pPr lvl="0"/>
-            <a:r>
-              <a:rPr/>
-              <a:t>Exit the temporary shell and run </a:t>
-            </a:r>
-            <a:r>
-              <a:rPr>
-                <a:latin typeface="Courier"/>
-              </a:rPr>
-              <a:t>nix develop</a:t>
-            </a:r>
-          </a:p>
-          <a:p>
-            <a:pPr lvl="0"/>
-            <a:r>
-              <a:rPr/>
-              <a:t>Environment is set up, ready to use!</a:t>
-            </a:r>
-          </a:p>
-          <a:p>
-            <a:pPr lvl="0"/>
-            <a:r>
-              <a:rPr/>
-              <a:t>What pipelines look like: </a:t>
-            </a:r>
-            <a:r>
-              <a:rPr>
-                <a:hlinkClick r:id="rId2"/>
-              </a:rPr>
-              <a:t>GitHub repo</a:t>
-            </a:r>
-            <a:r>
-              <a:rPr/>
-              <a:t> or local demo </a:t>
-            </a:r>
-            <a:r>
-              <a:rPr>
-                <a:latin typeface="Courier"/>
-              </a:rPr>
-              <a:t>scripts/t_demo/r_py_xgboost_t/</a:t>
+            <a:pPr lvl="0" indent="0">
+              <a:buNone/>
+            </a:pPr>
+            <a:r>
+              <a:rPr>
+                <a:latin typeface="Courier"/>
+              </a:rPr>
+              <a:t>my_analysis/
+├── tproject.toml       # Project configuration and dependencies
+├── flake.nix           # Reproducible environment definition
+├── README.md           # Project overview
+├── AGENTS.md           # Onboarding guide for AI Agents
+├── T-LANGUAGE-REFERENCE.md # Tiered language reference for LLMs (git-ignored)
+├── src/
+│   └── pipeline.t      # Your main analysis script
+├── data/               # Place your raw data files here
+├── outputs/            # Output directory for results
+└── tests/              # Unit tests for your analysis</a:t>
             </a:r>
           </a:p>
         </p:txBody>
@@ -6599,7 +6575,7 @@
             </a:pPr>
             <a:r>
               <a:rPr/>
-              <a:t>Learning a new language in 2026?!</a:t>
+              <a:t>T is reproducible by design</a:t>
             </a:r>
           </a:p>
         </p:txBody>
@@ -6622,62 +6598,69 @@
             <a:pPr lvl="0"/>
             <a:r>
               <a:rPr/>
-              <a:t>Learning a new language just for pipelines? Never!!</a:t>
-            </a:r>
-          </a:p>
-          <a:p>
-            <a:pPr lvl="0"/>
-            <a:r>
-              <a:rPr/>
-              <a:t>T is built to be </a:t>
-            </a:r>
-            <a:r>
-              <a:rPr i="1"/>
-              <a:t>llm-friendly</a:t>
-            </a:r>
-          </a:p>
-          <a:p>
-            <a:pPr lvl="0"/>
-            <a:r>
-              <a:rPr/>
-              <a:t>Projects ship </a:t>
-            </a:r>
-            <a:r>
-              <a:rPr>
-                <a:latin typeface="Courier"/>
-              </a:rPr>
-              <a:t>AGENTS.md</a:t>
-            </a:r>
-            <a:r>
-              <a:rPr/>
-              <a:t>, </a:t>
-            </a:r>
-            <a:r>
-              <a:rPr>
-                <a:latin typeface="Courier"/>
-              </a:rPr>
-              <a:t>T-LANGUAGE-REFERENCE.md</a:t>
-            </a:r>
-            <a:r>
-              <a:rPr/>
-              <a:t> and </a:t>
-            </a:r>
-            <a:r>
-              <a:rPr>
-                <a:latin typeface="Courier"/>
-              </a:rPr>
-              <a:t>src/pipeline.t</a:t>
-            </a:r>
-            <a:r>
-              <a:rPr/>
-              <a:t> itself is a cheatsheet</a:t>
-            </a:r>
-          </a:p>
-          <a:p>
-            <a:pPr lvl="0"/>
-            <a:r>
-              <a:rPr/>
-              <a:t>LLMs should be able to wire your project using T without much issue!</a:t>
+              <a:t>Add R, Python or Julia dependencies to </a:t>
+            </a:r>
+            <a:r>
+              <a:rPr>
+                <a:latin typeface="Courier"/>
+              </a:rPr>
+              <a:t>tproject.toml</a:t>
+            </a:r>
+          </a:p>
+          <a:p>
+            <a:pPr lvl="0"/>
+            <a:r>
+              <a:rPr/>
+              <a:t>Run </a:t>
+            </a:r>
+            <a:r>
+              <a:rPr>
+                <a:latin typeface="Courier"/>
+              </a:rPr>
+              <a:t>t update</a:t>
+            </a:r>
+          </a:p>
+          <a:p>
+            <a:pPr lvl="0"/>
+            <a:r>
+              <a:rPr/>
+              <a:t>Exit the temporary shell and run </a:t>
+            </a:r>
+            <a:r>
+              <a:rPr>
+                <a:latin typeface="Courier"/>
+              </a:rPr>
+              <a:t>nix develop</a:t>
+            </a:r>
+          </a:p>
+          <a:p>
+            <a:pPr lvl="0"/>
+            <a:r>
+              <a:rPr/>
+              <a:t>Environment is set up, ready to use!</a:t>
+            </a:r>
+          </a:p>
+          <a:p>
+            <a:pPr lvl="0"/>
+            <a:r>
+              <a:rPr/>
+              <a:t>What pipelines look like: </a:t>
+            </a:r>
+            <a:r>
+              <a:rPr>
+                <a:hlinkClick r:id="rId2"/>
+              </a:rPr>
+              <a:t>GitHub repo</a:t>
+            </a:r>
+            <a:r>
+              <a:rPr/>
+              <a:t> or local demo </a:t>
+            </a:r>
+            <a:r>
+              <a:rPr>
+                <a:latin typeface="Courier"/>
+              </a:rPr>
+              <a:t>scripts/t_demo/r_py_xgboost_t/</a:t>
             </a:r>
           </a:p>
         </p:txBody>
@@ -6724,7 +6707,7 @@
             </a:pPr>
             <a:r>
               <a:rPr/>
-              <a:t>Caveat Emptor</a:t>
+              <a:t>Learning a new language in 2026?!</a:t>
             </a:r>
           </a:p>
         </p:txBody>
@@ -6747,28 +6730,62 @@
             <a:pPr lvl="0"/>
             <a:r>
               <a:rPr/>
-              <a:t>This is a 100% vibe-coded side-project by yours truly…</a:t>
-            </a:r>
-          </a:p>
-          <a:p>
-            <a:pPr lvl="0"/>
-            <a:r>
-              <a:rPr/>
-              <a:t>…but thoroughly tested (6000+ unit tests and 80+ end-to-end tests)</a:t>
-            </a:r>
-          </a:p>
-          <a:p>
-            <a:pPr lvl="0"/>
-            <a:r>
-              <a:rPr/>
-              <a:t>I wanted to stress-test the idea of a “reproducible by design” language</a:t>
-            </a:r>
-          </a:p>
-          <a:p>
-            <a:pPr lvl="0"/>
-            <a:r>
-              <a:rPr/>
-              <a:t>Challenges: input/output between languages</a:t>
+              <a:t>Learning a new language just for pipelines? Never!!</a:t>
+            </a:r>
+          </a:p>
+          <a:p>
+            <a:pPr lvl="0"/>
+            <a:r>
+              <a:rPr/>
+              <a:t>T is built to be </a:t>
+            </a:r>
+            <a:r>
+              <a:rPr i="1"/>
+              <a:t>llm-friendly</a:t>
+            </a:r>
+          </a:p>
+          <a:p>
+            <a:pPr lvl="0"/>
+            <a:r>
+              <a:rPr/>
+              <a:t>Projects ship </a:t>
+            </a:r>
+            <a:r>
+              <a:rPr>
+                <a:latin typeface="Courier"/>
+              </a:rPr>
+              <a:t>AGENTS.md</a:t>
+            </a:r>
+            <a:r>
+              <a:rPr/>
+              <a:t>, </a:t>
+            </a:r>
+            <a:r>
+              <a:rPr>
+                <a:latin typeface="Courier"/>
+              </a:rPr>
+              <a:t>T-LANGUAGE-REFERENCE.md</a:t>
+            </a:r>
+            <a:r>
+              <a:rPr/>
+              <a:t> and </a:t>
+            </a:r>
+            <a:r>
+              <a:rPr>
+                <a:latin typeface="Courier"/>
+              </a:rPr>
+              <a:t>src/pipeline.t</a:t>
+            </a:r>
+            <a:r>
+              <a:rPr/>
+              <a:t> itself is a cheatsheet</a:t>
+            </a:r>
+          </a:p>
+          <a:p>
+            <a:pPr lvl="0"/>
+            <a:r>
+              <a:rPr/>
+              <a:t>LLMs should be able to wire your project using T without much issue!</a:t>
             </a:r>
           </a:p>
         </p:txBody>
@@ -6815,7 +6832,7 @@
             </a:pPr>
             <a:r>
               <a:rPr/>
-              <a:t>How did I build T?</a:t>
+              <a:t>Caveat Emptor</a:t>
             </a:r>
           </a:p>
         </p:txBody>
@@ -6838,49 +6855,28 @@
             <a:pPr lvl="0"/>
             <a:r>
               <a:rPr/>
-              <a:t>100% LLM generated Ocaml code</a:t>
-            </a:r>
-          </a:p>
-          <a:p>
-            <a:pPr lvl="0"/>
-            <a:r>
-              <a:rPr/>
-              <a:t>Start with a specification doc</a:t>
-            </a:r>
-          </a:p>
-          <a:p>
-            <a:pPr lvl="0"/>
-            <a:r>
-              <a:rPr/>
-              <a:t>Keep brainstorming, refining…</a:t>
-            </a:r>
-          </a:p>
-          <a:p>
-            <a:pPr lvl="0"/>
-            <a:r>
-              <a:rPr/>
-              <a:t>Give the doc to an LLM</a:t>
-            </a:r>
-          </a:p>
-          <a:p>
-            <a:pPr lvl="0"/>
-            <a:r>
-              <a:rPr/>
-              <a:t>Let another LLM review the work</a:t>
-            </a:r>
-          </a:p>
-          <a:p>
-            <a:pPr lvl="0"/>
-            <a:r>
-              <a:rPr/>
-              <a:t>Implement and review tests</a:t>
-            </a:r>
-          </a:p>
-          <a:p>
-            <a:pPr lvl="0"/>
-            <a:r>
-              <a:rPr/>
-              <a:t>Repeat!</a:t>
+              <a:t>This is a 100% vibe-coded side-project by yours truly…</a:t>
+            </a:r>
+          </a:p>
+          <a:p>
+            <a:pPr lvl="0"/>
+            <a:r>
+              <a:rPr/>
+              <a:t>…but thoroughly tested (6000+ unit tests and 80+ end-to-end tests)</a:t>
+            </a:r>
+          </a:p>
+          <a:p>
+            <a:pPr lvl="0"/>
+            <a:r>
+              <a:rPr/>
+              <a:t>I wanted to stress-test the idea of a “reproducible by design” language</a:t>
+            </a:r>
+          </a:p>
+          <a:p>
+            <a:pPr lvl="0"/>
+            <a:r>
+              <a:rPr/>
+              <a:t>Challenges: input/output between languages</a:t>
             </a:r>
           </a:p>
         </p:txBody>
@@ -7004,6 +7000,118 @@
             </a:pPr>
             <a:r>
               <a:rPr/>
+              <a:t>How did I build T?</a:t>
+            </a:r>
+          </a:p>
+        </p:txBody>
+      </p:sp>
+      <p:sp>
+        <p:nvSpPr>
+          <p:cNvPr id="3" name="Content Placeholder 2"/>
+          <p:cNvSpPr>
+            <a:spLocks noGrp="1"/>
+          </p:cNvSpPr>
+          <p:nvPr>
+            <p:ph idx="1"/>
+          </p:nvPr>
+        </p:nvSpPr>
+        <p:spPr/>
+        <p:txBody>
+          <a:bodyPr/>
+          <a:lstStyle/>
+          <a:p>
+            <a:pPr lvl="0"/>
+            <a:r>
+              <a:rPr/>
+              <a:t>100% LLM generated Ocaml code</a:t>
+            </a:r>
+          </a:p>
+          <a:p>
+            <a:pPr lvl="0"/>
+            <a:r>
+              <a:rPr/>
+              <a:t>Start with a specification doc</a:t>
+            </a:r>
+          </a:p>
+          <a:p>
+            <a:pPr lvl="0"/>
+            <a:r>
+              <a:rPr/>
+              <a:t>Keep brainstorming, refining…</a:t>
+            </a:r>
+          </a:p>
+          <a:p>
+            <a:pPr lvl="0"/>
+            <a:r>
+              <a:rPr/>
+              <a:t>Give the doc to an LLM</a:t>
+            </a:r>
+          </a:p>
+          <a:p>
+            <a:pPr lvl="0"/>
+            <a:r>
+              <a:rPr/>
+              <a:t>Let another LLM review the work</a:t>
+            </a:r>
+          </a:p>
+          <a:p>
+            <a:pPr lvl="0"/>
+            <a:r>
+              <a:rPr/>
+              <a:t>Implement and review tests</a:t>
+            </a:r>
+          </a:p>
+          <a:p>
+            <a:pPr lvl="0"/>
+            <a:r>
+              <a:rPr/>
+              <a:t>Repeat!</a:t>
+            </a:r>
+          </a:p>
+        </p:txBody>
+      </p:sp>
+    </p:spTree>
+  </p:cSld>
+</p:sld>
+</file>
+
+<file path=ppt/slides/slide31.xml><?xml version="1.0" encoding="utf-8"?>
+<p:sld xmlns:a="http://schemas.openxmlformats.org/drawingml/2006/main" xmlns:r="http://schemas.openxmlformats.org/officeDocument/2006/relationships" xmlns:p="http://schemas.openxmlformats.org/presentationml/2006/main">
+  <p:cSld>
+    <p:spTree>
+      <p:nvGrpSpPr>
+        <p:cNvPr id="1" name=""/>
+        <p:cNvGrpSpPr/>
+        <p:nvPr/>
+      </p:nvGrpSpPr>
+      <p:grpSpPr>
+        <a:xfrm>
+          <a:off x="0" y="0"/>
+          <a:ext cx="0" cy="0"/>
+          <a:chOff x="0" y="0"/>
+          <a:chExt cx="0" cy="0"/>
+        </a:xfrm>
+      </p:grpSpPr>
+      <p:sp>
+        <p:nvSpPr>
+          <p:cNvPr id="2" name="Title 1"/>
+          <p:cNvSpPr>
+            <a:spLocks noGrp="1"/>
+          </p:cNvSpPr>
+          <p:nvPr>
+            <p:ph type="title"/>
+          </p:nvPr>
+        </p:nvSpPr>
+        <p:spPr/>
+        <p:txBody>
+          <a:bodyPr/>
+          <a:lstStyle/>
+          <a:p>
+            <a:pPr lvl="0" indent="0" marL="0">
+              <a:buNone/>
+            </a:pPr>
+            <a:r>
+              <a:rPr/>
               <a:t>Fin</a:t>
             </a:r>
           </a:p>
@@ -7597,7 +7705,7 @@
             </a:pPr>
             <a:r>
               <a:rPr/>
-              <a:t>Intro: where to find the code</a:t>
+              <a:t>Intro: Teaching Assistant</a:t>
             </a:r>
           </a:p>
         </p:txBody>
@@ -7609,7 +7717,7 @@
             <a:spLocks noGrp="1"/>
           </p:cNvSpPr>
           <p:nvPr>
-            <p:ph idx="1"/>
+            <p:ph idx="1" sz="half"/>
           </p:nvPr>
         </p:nvSpPr>
         <p:spPr/>
@@ -7622,7 +7730,7 @@
             </a:pPr>
             <a:r>
               <a:rPr/>
-              <a:t>Slides available online:</a:t>
+              <a:t>Eric Nantz</a:t>
             </a:r>
           </a:p>
           <a:p>
@@ -7630,30 +7738,64 @@
               <a:buNone/>
             </a:pPr>
             <a:r>
+              <a:rPr/>
+              <a:t>Eric Nantz</a:t>
+            </a:r>
+          </a:p>
+        </p:txBody>
+      </p:sp>
+      <p:sp>
+        <p:nvSpPr>
+          <p:cNvPr id="4" name="Content Placeholder 3"/>
+          <p:cNvSpPr>
+            <a:spLocks noGrp="1"/>
+          </p:cNvSpPr>
+          <p:nvPr>
+            <p:ph idx="2" sz="half"/>
+          </p:nvPr>
+        </p:nvSpPr>
+        <p:spPr/>
+        <p:txBody>
+          <a:bodyPr/>
+          <a:lstStyle/>
+          <a:p>
+            <a:pPr lvl="0"/>
+            <a:r>
+              <a:rPr/>
+              <a:t>Senior Director - Statistical Innovation Center (Eli Lilly)</a:t>
+            </a:r>
+          </a:p>
+          <a:p>
+            <a:pPr lvl="0"/>
+            <a:r>
+              <a:rPr/>
+              <a:t>Co-lead of </a:t>
+            </a:r>
+            <a:r>
               <a:rPr>
                 <a:hlinkClick r:id="rId2"/>
               </a:rPr>
-              <a:t>https://b-rodrigues.github.io/r_pharma_26</a:t>
-            </a:r>
-          </a:p>
-          <a:p>
-            <a:pPr lvl="0" indent="0" marL="0">
-              <a:buNone/>
-            </a:pPr>
-            <a:r>
-              <a:rPr/>
-              <a:t>Code available here:</a:t>
-            </a:r>
-          </a:p>
-          <a:p>
-            <a:pPr lvl="0" indent="0" marL="0">
-              <a:buNone/>
-            </a:pPr>
+              <a:t>R Consortium Submissions Working Group</a:t>
+            </a:r>
+          </a:p>
+          <a:p>
+            <a:pPr lvl="0"/>
+            <a:r>
+              <a:rPr/>
+              <a:t>Co-organizer of </a:t>
+            </a:r>
             <a:r>
               <a:rPr>
                 <a:hlinkClick r:id="rId3"/>
               </a:rPr>
-              <a:t>https://github.com/b-rodrigues/r_pharma_26</a:t>
+              <a:t>R Pharma</a:t>
+            </a:r>
+          </a:p>
+          <a:p>
+            <a:pPr lvl="0"/>
+            <a:r>
+              <a:rPr/>
+              <a:t>Evangelist of all things open-source: R, Linux, Nix!</a:t>
             </a:r>
           </a:p>
         </p:txBody>
@@ -7690,12 +7832,7 @@
             <p:ph type="title"/>
           </p:nvPr>
         </p:nvSpPr>
-        <p:spPr>
-          <a:xfrm>
-            <a:off x="457201" y="204787"/>
-            <a:ext cx="3008313" cy="871538"/>
-          </a:xfrm>
-        </p:spPr>
+        <p:spPr/>
         <p:txBody>
           <a:bodyPr/>
           <a:lstStyle/>
@@ -7705,19 +7842,19 @@
             </a:pPr>
             <a:r>
               <a:rPr/>
-              <a:t>What I’ll be talking about</a:t>
-            </a:r>
-          </a:p>
-        </p:txBody>
-      </p:sp>
-      <p:sp>
-        <p:nvSpPr>
-          <p:cNvPr id="4" name="Text Placeholder 3"/>
-          <p:cNvSpPr>
-            <a:spLocks noGrp="1"/>
-          </p:cNvSpPr>
-          <p:nvPr>
-            <p:ph idx="2" sz="half" type="body"/>
+              <a:t>Intro: where to find the code</a:t>
+            </a:r>
+          </a:p>
+        </p:txBody>
+      </p:sp>
+      <p:sp>
+        <p:nvSpPr>
+          <p:cNvPr id="3" name="Content Placeholder 2"/>
+          <p:cNvSpPr>
+            <a:spLocks noGrp="1"/>
+          </p:cNvSpPr>
+          <p:nvPr>
+            <p:ph idx="1"/>
           </p:nvPr>
         </p:nvSpPr>
         <p:spPr/>
@@ -7730,41 +7867,62 @@
             </a:pPr>
             <a:r>
               <a:rPr/>
-              <a:t>The puzzle you know:</a:t>
-            </a:r>
-          </a:p>
-        </p:txBody>
-      </p:sp>
-      <p:pic>
-        <p:nvPicPr>
-          <p:cNvPr descr="img/repro_puzzle.png" id="0" name="Picture 1"/>
-          <p:cNvPicPr>
-            <a:picLocks noGrp="1" noChangeAspect="1"/>
-          </p:cNvPicPr>
-          <p:nvPr/>
-        </p:nvPicPr>
-        <p:blipFill>
-          <a:blip r:embed="rId2"/>
-          <a:stretch>
-            <a:fillRect/>
-          </a:stretch>
-        </p:blipFill>
-        <p:spPr bwMode="auto">
-          <a:xfrm>
-            <a:off x="3568700" y="571500"/>
-            <a:ext cx="5105400" cy="3657600"/>
-          </a:xfrm>
-          <a:prstGeom prst="rect">
-            <a:avLst/>
-          </a:prstGeom>
-          <a:noFill/>
-          <a:ln w="9525">
-            <a:noFill/>
-            <a:headEnd/>
-            <a:tailEnd/>
-          </a:ln>
-        </p:spPr>
-      </p:pic>
+              <a:t>Slides available online:</a:t>
+            </a:r>
+          </a:p>
+          <a:p>
+            <a:pPr lvl="0" indent="0" marL="0">
+              <a:buNone/>
+            </a:pPr>
+            <a:r>
+              <a:rPr>
+                <a:hlinkClick r:id="rId2"/>
+              </a:rPr>
+              <a:t>https://b-rodrigues.github.io/r_pharma_26</a:t>
+            </a:r>
+          </a:p>
+          <a:p>
+            <a:pPr lvl="0" indent="0" marL="0">
+              <a:buNone/>
+            </a:pPr>
+            <a:r>
+              <a:rPr/>
+              <a:t>Code available here:</a:t>
+            </a:r>
+          </a:p>
+          <a:p>
+            <a:pPr lvl="0" indent="0" marL="0">
+              <a:buNone/>
+            </a:pPr>
+            <a:r>
+              <a:rPr>
+                <a:hlinkClick r:id="rId3"/>
+              </a:rPr>
+              <a:t>https://github.com/b-rodrigues/r_pharma_26</a:t>
+            </a:r>
+          </a:p>
+          <a:p>
+            <a:pPr lvl="0" indent="0" marL="0">
+              <a:buNone/>
+            </a:pPr>
+            <a:r>
+              <a:rPr/>
+              <a:t>Eric’s demonstration available here:</a:t>
+            </a:r>
+          </a:p>
+          <a:p>
+            <a:pPr lvl="0" indent="0" marL="0">
+              <a:buNone/>
+            </a:pPr>
+            <a:r>
+              <a:rPr>
+                <a:hlinkClick r:id="rId4"/>
+              </a:rPr>
+              <a:t>https://github.com/RConsortium/submissions-pilot2-nixversion</a:t>
+            </a:r>
+          </a:p>
+        </p:txBody>
+      </p:sp>
     </p:spTree>
   </p:cSld>
 </p:sld>

--- a/docs/index.pptx
+++ b/docs/index.pptx
@@ -3181,7 +3181,7 @@
             <a:br/>
             <a:r>
               <a:rPr/>
-              <a:t>Bruno Rodrigues</a:t>
+              <a:t>Bruno Rodrigues &amp; Eric Nantz</a:t>
             </a:r>
           </a:p>
         </p:txBody>
